--- a/ISIA Presentation.pptx
+++ b/ISIA Presentation.pptx
@@ -1,23 +1,23 @@
 
 <file path=ppt/presentation.xml><?xml version="1.0" encoding="utf-8"?>
-<p:presentation xmlns:a="http://schemas.openxmlformats.org/drawingml/2006/main" xmlns:r="http://schemas.openxmlformats.org/officeDocument/2006/relationships" xmlns:p="http://schemas.openxmlformats.org/presentationml/2006/main" xmlns:m="http://schemas.openxmlformats.org/officeDocument/2006/math" xmlns:a14="http://schemas.microsoft.com/office/drawing/2010/main">
+<p:presentation xmlns:a="http://schemas.openxmlformats.org/drawingml/2006/main" xmlns:r="http://schemas.openxmlformats.org/officeDocument/2006/relationships" xmlns:p="http://schemas.openxmlformats.org/presentationml/2006/main">
   <p:sldMasterIdLst>
-    <p:sldMasterId id="2147483648" r:id="rId5"/>
+    <p:sldMasterId id="2147483648" r:id="rId1"/>
   </p:sldMasterIdLst>
   <p:notesMasterIdLst>
-    <p:notesMasterId r:id="rId7"/>
+    <p:notesMasterId r:id="rId12"/>
   </p:notesMasterIdLst>
   <p:sldIdLst>
-    <p:sldId id="256" r:id="rId8"/>
-    <p:sldId id="257" r:id="rId9"/>
-    <p:sldId id="258" r:id="rId10"/>
-    <p:sldId id="259" r:id="rId11"/>
-    <p:sldId id="260" r:id="rId12"/>
-    <p:sldId id="261" r:id="rId13"/>
-    <p:sldId id="262" r:id="rId14"/>
-    <p:sldId id="263" r:id="rId15"/>
-    <p:sldId id="264" r:id="rId16"/>
-    <p:sldId id="265" r:id="rId17"/>
+    <p:sldId id="256" r:id="rId2"/>
+    <p:sldId id="257" r:id="rId3"/>
+    <p:sldId id="258" r:id="rId4"/>
+    <p:sldId id="259" r:id="rId5"/>
+    <p:sldId id="260" r:id="rId6"/>
+    <p:sldId id="261" r:id="rId7"/>
+    <p:sldId id="262" r:id="rId8"/>
+    <p:sldId id="263" r:id="rId9"/>
+    <p:sldId id="264" r:id="rId10"/>
+    <p:sldId id="265" r:id="rId11"/>
   </p:sldIdLst>
   <p:sldSz cx="12192000" cy="6858000"/>
   <p:notesSz cx="6858000" cy="9144000"/>
@@ -37,7 +37,7 @@
       <a:buFontTx/>
       <a:buNone/>
       <a:tabLst/>
-      <a:defRPr b="0" baseline="0" cap="none" i="0" spc="0" strike="noStrike" sz="1800" u="none" kumimoji="0" normalizeH="0">
+      <a:defRPr kumimoji="0" sz="1800" b="0" i="0" u="none" strike="noStrike" cap="none" spc="0" normalizeH="0" baseline="0">
         <a:ln>
           <a:noFill/>
         </a:ln>
@@ -63,7 +63,7 @@
       <a:buFontTx/>
       <a:buNone/>
       <a:tabLst/>
-      <a:defRPr b="0" baseline="0" cap="none" i="0" spc="0" strike="noStrike" sz="1800" u="none" kumimoji="0" normalizeH="0">
+      <a:defRPr kumimoji="0" sz="1800" b="0" i="0" u="none" strike="noStrike" cap="none" spc="0" normalizeH="0" baseline="0">
         <a:ln>
           <a:noFill/>
         </a:ln>
@@ -93,7 +93,7 @@
       <a:buFontTx/>
       <a:buNone/>
       <a:tabLst/>
-      <a:defRPr b="0" baseline="0" cap="none" i="0" spc="0" strike="noStrike" sz="1800" u="none" kumimoji="0" normalizeH="0">
+      <a:defRPr kumimoji="0" sz="1800" b="0" i="0" u="none" strike="noStrike" cap="none" spc="0" normalizeH="0" baseline="0">
         <a:ln>
           <a:noFill/>
         </a:ln>
@@ -123,7 +123,7 @@
       <a:buFontTx/>
       <a:buNone/>
       <a:tabLst/>
-      <a:defRPr b="0" baseline="0" cap="none" i="0" spc="0" strike="noStrike" sz="1800" u="none" kumimoji="0" normalizeH="0">
+      <a:defRPr kumimoji="0" sz="1800" b="0" i="0" u="none" strike="noStrike" cap="none" spc="0" normalizeH="0" baseline="0">
         <a:ln>
           <a:noFill/>
         </a:ln>
@@ -153,7 +153,7 @@
       <a:buFontTx/>
       <a:buNone/>
       <a:tabLst/>
-      <a:defRPr b="0" baseline="0" cap="none" i="0" spc="0" strike="noStrike" sz="1800" u="none" kumimoji="0" normalizeH="0">
+      <a:defRPr kumimoji="0" sz="1800" b="0" i="0" u="none" strike="noStrike" cap="none" spc="0" normalizeH="0" baseline="0">
         <a:ln>
           <a:noFill/>
         </a:ln>
@@ -183,7 +183,7 @@
       <a:buFontTx/>
       <a:buNone/>
       <a:tabLst/>
-      <a:defRPr b="0" baseline="0" cap="none" i="0" spc="0" strike="noStrike" sz="1800" u="none" kumimoji="0" normalizeH="0">
+      <a:defRPr kumimoji="0" sz="1800" b="0" i="0" u="none" strike="noStrike" cap="none" spc="0" normalizeH="0" baseline="0">
         <a:ln>
           <a:noFill/>
         </a:ln>
@@ -213,7 +213,7 @@
       <a:buFontTx/>
       <a:buNone/>
       <a:tabLst/>
-      <a:defRPr b="0" baseline="0" cap="none" i="0" spc="0" strike="noStrike" sz="1800" u="none" kumimoji="0" normalizeH="0">
+      <a:defRPr kumimoji="0" sz="1800" b="0" i="0" u="none" strike="noStrike" cap="none" spc="0" normalizeH="0" baseline="0">
         <a:ln>
           <a:noFill/>
         </a:ln>
@@ -243,7 +243,7 @@
       <a:buFontTx/>
       <a:buNone/>
       <a:tabLst/>
-      <a:defRPr b="0" baseline="0" cap="none" i="0" spc="0" strike="noStrike" sz="1800" u="none" kumimoji="0" normalizeH="0">
+      <a:defRPr kumimoji="0" sz="1800" b="0" i="0" u="none" strike="noStrike" cap="none" spc="0" normalizeH="0" baseline="0">
         <a:ln>
           <a:noFill/>
         </a:ln>
@@ -273,7 +273,7 @@
       <a:buFontTx/>
       <a:buNone/>
       <a:tabLst/>
-      <a:defRPr b="0" baseline="0" cap="none" i="0" spc="0" strike="noStrike" sz="1800" u="none" kumimoji="0" normalizeH="0">
+      <a:defRPr kumimoji="0" sz="1800" b="0" i="0" u="none" strike="noStrike" cap="none" spc="0" normalizeH="0" baseline="0">
         <a:ln>
           <a:noFill/>
         </a:ln>
@@ -303,7 +303,7 @@
       <a:buFontTx/>
       <a:buNone/>
       <a:tabLst/>
-      <a:defRPr b="0" baseline="0" cap="none" i="0" spc="0" strike="noStrike" sz="1800" u="none" kumimoji="0" normalizeH="0">
+      <a:defRPr kumimoji="0" sz="1800" b="0" i="0" u="none" strike="noStrike" cap="none" spc="0" normalizeH="0" baseline="0">
         <a:ln>
           <a:noFill/>
         </a:ln>
@@ -322,13 +322,14 @@
 </p:presentation>
 </file>
 
-<file path=ppt/commentAuthors.xml><?xml version="1.0" encoding="utf-8"?>
-<p:cmAuthorLst xmlns:a="http://schemas.openxmlformats.org/drawingml/2006/main" xmlns:r="http://schemas.openxmlformats.org/officeDocument/2006/relationships" xmlns:p="http://schemas.openxmlformats.org/presentationml/2006/main" xmlns:m="http://schemas.openxmlformats.org/officeDocument/2006/math" xmlns:a14="http://schemas.microsoft.com/office/drawing/2010/main"/>
-</file>
-
 <file path=ppt/notesMasters/notesMaster1.xml><?xml version="1.0" encoding="utf-8"?>
-<p:notesMaster xmlns:a="http://schemas.openxmlformats.org/drawingml/2006/main" xmlns:r="http://schemas.openxmlformats.org/officeDocument/2006/relationships" xmlns:p="http://schemas.openxmlformats.org/presentationml/2006/main" xmlns:m="http://schemas.openxmlformats.org/officeDocument/2006/math" xmlns:a14="http://schemas.microsoft.com/office/drawing/2010/main">
+<p:notesMaster xmlns:a="http://schemas.openxmlformats.org/drawingml/2006/main" xmlns:r="http://schemas.openxmlformats.org/officeDocument/2006/relationships" xmlns:p="http://schemas.openxmlformats.org/presentationml/2006/main">
   <p:cSld>
+    <p:bg>
+      <p:bgRef idx="1001">
+        <a:schemeClr val="bg1"/>
+      </p:bgRef>
+    </p:bg>
     <p:spTree>
       <p:nvGrpSpPr>
         <p:cNvPr id="1" name=""/>
@@ -346,7 +347,9 @@
       <p:sp>
         <p:nvSpPr>
           <p:cNvPr id="119" name="Shape 119"/>
-          <p:cNvSpPr/>
+          <p:cNvSpPr>
+            <a:spLocks noGrp="1" noRot="1" noChangeAspect="1"/>
+          </p:cNvSpPr>
           <p:nvPr>
             <p:ph type="sldImg"/>
           </p:nvPr>
@@ -364,14 +367,16 @@
           <a:bodyPr/>
           <a:lstStyle/>
           <a:p>
-            <a:pPr/>
+            <a:endParaRPr/>
           </a:p>
         </p:txBody>
       </p:sp>
       <p:sp>
         <p:nvSpPr>
           <p:cNvPr id="120" name="Shape 120"/>
-          <p:cNvSpPr/>
+          <p:cNvSpPr>
+            <a:spLocks noGrp="1"/>
+          </p:cNvSpPr>
           <p:nvPr>
             <p:ph type="body" sz="quarter" idx="1"/>
           </p:nvPr>
@@ -389,7 +394,7 @@
           <a:bodyPr/>
           <a:lstStyle/>
           <a:p>
-            <a:pPr/>
+            <a:endParaRPr/>
           </a:p>
         </p:txBody>
       </p:sp>
@@ -474,7 +479,7 @@
 </file>
 
 <file path=ppt/slideLayouts/slideLayout1.xml><?xml version="1.0" encoding="utf-8"?>
-<p:sldLayout xmlns:a="http://schemas.openxmlformats.org/drawingml/2006/main" xmlns:r="http://schemas.openxmlformats.org/officeDocument/2006/relationships" xmlns:p="http://schemas.openxmlformats.org/presentationml/2006/main" xmlns:m="http://schemas.openxmlformats.org/officeDocument/2006/math" xmlns:a14="http://schemas.microsoft.com/office/drawing/2010/main" type="title" showMasterSp="0" showMasterPhAnim="1">
+<p:sldLayout xmlns:a="http://schemas.openxmlformats.org/drawingml/2006/main" xmlns:r="http://schemas.openxmlformats.org/officeDocument/2006/relationships" xmlns:p="http://schemas.openxmlformats.org/presentationml/2006/main" showMasterSp="0" type="title">
   <p:cSld name="Title Slide">
     <p:spTree>
       <p:nvGrpSpPr>
@@ -493,7 +498,9 @@
       <p:sp>
         <p:nvSpPr>
           <p:cNvPr id="13" name="Title Text"/>
-          <p:cNvSpPr txBox="1"/>
+          <p:cNvSpPr txBox="1">
+            <a:spLocks noGrp="1"/>
+          </p:cNvSpPr>
           <p:nvPr>
             <p:ph type="title"/>
           </p:nvPr>
@@ -515,7 +522,6 @@
             </a:lvl1pPr>
           </a:lstStyle>
           <a:p>
-            <a:pPr/>
             <a:r>
               <a:t>Title Text</a:t>
             </a:r>
@@ -525,7 +531,9 @@
       <p:sp>
         <p:nvSpPr>
           <p:cNvPr id="14" name="Body Level One…"/>
-          <p:cNvSpPr txBox="1"/>
+          <p:cNvSpPr txBox="1">
+            <a:spLocks noGrp="1"/>
+          </p:cNvSpPr>
           <p:nvPr>
             <p:ph type="body" sz="quarter" idx="1"/>
           </p:nvPr>
@@ -549,7 +557,7 @@
               <a:buSzTx/>
               <a:buFontTx/>
               <a:buNone/>
-              <a:defRPr cap="all" spc="300" sz="1400"/>
+              <a:defRPr sz="1400" cap="all" spc="300"/>
             </a:lvl1pPr>
             <a:lvl2pPr marL="0" indent="457200">
               <a:lnSpc>
@@ -558,7 +566,7 @@
               <a:buSzTx/>
               <a:buFontTx/>
               <a:buNone/>
-              <a:defRPr cap="all" spc="300" sz="1400"/>
+              <a:defRPr sz="1400" cap="all" spc="300"/>
             </a:lvl2pPr>
             <a:lvl3pPr marL="0" indent="914400">
               <a:lnSpc>
@@ -567,7 +575,7 @@
               <a:buSzTx/>
               <a:buFontTx/>
               <a:buNone/>
-              <a:defRPr cap="all" spc="300" sz="1400"/>
+              <a:defRPr sz="1400" cap="all" spc="300"/>
             </a:lvl3pPr>
             <a:lvl4pPr marL="0" indent="1371600">
               <a:lnSpc>
@@ -576,7 +584,7 @@
               <a:buSzTx/>
               <a:buFontTx/>
               <a:buNone/>
-              <a:defRPr cap="all" spc="300" sz="1400"/>
+              <a:defRPr sz="1400" cap="all" spc="300"/>
             </a:lvl4pPr>
             <a:lvl5pPr marL="0" indent="1828800">
               <a:lnSpc>
@@ -585,11 +593,10 @@
               <a:buSzTx/>
               <a:buFontTx/>
               <a:buNone/>
-              <a:defRPr cap="all" spc="300" sz="1400"/>
+              <a:defRPr sz="1400" cap="all" spc="300"/>
             </a:lvl5pPr>
           </a:lstStyle>
           <a:p>
-            <a:pPr/>
             <a:r>
               <a:t>Body Level One</a:t>
             </a:r>
@@ -645,7 +652,7 @@
           <a:bodyPr lIns="45719" rIns="45719"/>
           <a:lstStyle/>
           <a:p>
-            <a:pPr/>
+            <a:endParaRPr/>
           </a:p>
         </p:txBody>
       </p:sp>
@@ -674,7 +681,7 @@
           <a:bodyPr lIns="45719" rIns="45719"/>
           <a:lstStyle/>
           <a:p>
-            <a:pPr/>
+            <a:endParaRPr/>
           </a:p>
         </p:txBody>
       </p:sp>
@@ -703,14 +710,16 @@
           <a:bodyPr lIns="45719" rIns="45719"/>
           <a:lstStyle/>
           <a:p>
-            <a:pPr/>
+            <a:endParaRPr/>
           </a:p>
         </p:txBody>
       </p:sp>
       <p:sp>
         <p:nvSpPr>
           <p:cNvPr id="18" name="Slide Number"/>
-          <p:cNvSpPr txBox="1"/>
+          <p:cNvSpPr txBox="1">
+            <a:spLocks noGrp="1"/>
+          </p:cNvSpPr>
           <p:nvPr>
             <p:ph type="sldNum" sz="quarter" idx="2"/>
           </p:nvPr>
@@ -724,8 +733,10 @@
           <a:bodyPr/>
           <a:lstStyle/>
           <a:p>
-            <a:pPr/>
-            <a:fld id="{86CB4B4D-7CA3-9044-876B-883B54F8677D}" type="slidenum"/>
+            <a:fld id="{86CB4B4D-7CA3-9044-876B-883B54F8677D}" type="slidenum">
+              <a:t>‹nº›</a:t>
+            </a:fld>
+            <a:endParaRPr/>
           </a:p>
         </p:txBody>
       </p:sp>
@@ -734,12 +745,12 @@
   <p:clrMapOvr>
     <a:masterClrMapping/>
   </p:clrMapOvr>
-  <p:transition xmlns:p14="http://schemas.microsoft.com/office/powerpoint/2010/main" spd="med" advClick="1"/>
+  <p:transition spd="med"/>
 </p:sldLayout>
 </file>
 
 <file path=ppt/slideLayouts/slideLayout2.xml><?xml version="1.0" encoding="utf-8"?>
-<p:sldLayout xmlns:a="http://schemas.openxmlformats.org/drawingml/2006/main" xmlns:r="http://schemas.openxmlformats.org/officeDocument/2006/relationships" xmlns:p="http://schemas.openxmlformats.org/presentationml/2006/main" xmlns:m="http://schemas.openxmlformats.org/officeDocument/2006/math" xmlns:a14="http://schemas.microsoft.com/office/drawing/2010/main" type="tx" showMasterSp="0" showMasterPhAnim="1">
+<p:sldLayout xmlns:a="http://schemas.openxmlformats.org/drawingml/2006/main" xmlns:r="http://schemas.openxmlformats.org/officeDocument/2006/relationships" xmlns:p="http://schemas.openxmlformats.org/presentationml/2006/main" showMasterSp="0" type="tx">
   <p:cSld name="Title and Content">
     <p:spTree>
       <p:nvGrpSpPr>
@@ -780,7 +791,7 @@
           <a:bodyPr lIns="45719" rIns="45719"/>
           <a:lstStyle/>
           <a:p>
-            <a:pPr/>
+            <a:endParaRPr/>
           </a:p>
         </p:txBody>
       </p:sp>
@@ -809,7 +820,7 @@
           <a:bodyPr lIns="45719" rIns="45719"/>
           <a:lstStyle/>
           <a:p>
-            <a:pPr/>
+            <a:endParaRPr/>
           </a:p>
         </p:txBody>
       </p:sp>
@@ -838,14 +849,16 @@
           <a:bodyPr lIns="45719" rIns="45719"/>
           <a:lstStyle/>
           <a:p>
-            <a:pPr/>
+            <a:endParaRPr/>
           </a:p>
         </p:txBody>
       </p:sp>
       <p:sp>
         <p:nvSpPr>
           <p:cNvPr id="28" name="Title Text"/>
-          <p:cNvSpPr txBox="1"/>
+          <p:cNvSpPr txBox="1">
+            <a:spLocks noGrp="1"/>
+          </p:cNvSpPr>
           <p:nvPr>
             <p:ph type="title"/>
           </p:nvPr>
@@ -863,7 +876,6 @@
           <a:bodyPr anchor="ctr"/>
           <a:lstStyle/>
           <a:p>
-            <a:pPr/>
             <a:r>
               <a:t>Title Text</a:t>
             </a:r>
@@ -873,7 +885,9 @@
       <p:sp>
         <p:nvSpPr>
           <p:cNvPr id="29" name="Body Level One…"/>
-          <p:cNvSpPr txBox="1"/>
+          <p:cNvSpPr txBox="1">
+            <a:spLocks noGrp="1"/>
+          </p:cNvSpPr>
           <p:nvPr>
             <p:ph type="body" idx="1"/>
           </p:nvPr>
@@ -891,7 +905,6 @@
           <a:bodyPr/>
           <a:lstStyle/>
           <a:p>
-            <a:pPr/>
             <a:r>
               <a:t>Body Level One</a:t>
             </a:r>
@@ -925,7 +938,9 @@
       <p:sp>
         <p:nvSpPr>
           <p:cNvPr id="30" name="Slide Number"/>
-          <p:cNvSpPr txBox="1"/>
+          <p:cNvSpPr txBox="1">
+            <a:spLocks noGrp="1"/>
+          </p:cNvSpPr>
           <p:nvPr>
             <p:ph type="sldNum" sz="quarter" idx="2"/>
           </p:nvPr>
@@ -939,8 +954,10 @@
           <a:bodyPr/>
           <a:lstStyle/>
           <a:p>
-            <a:pPr/>
-            <a:fld id="{86CB4B4D-7CA3-9044-876B-883B54F8677D}" type="slidenum"/>
+            <a:fld id="{86CB4B4D-7CA3-9044-876B-883B54F8677D}" type="slidenum">
+              <a:t>‹nº›</a:t>
+            </a:fld>
+            <a:endParaRPr/>
           </a:p>
         </p:txBody>
       </p:sp>
@@ -949,12 +966,12 @@
   <p:clrMapOvr>
     <a:masterClrMapping/>
   </p:clrMapOvr>
-  <p:transition xmlns:p14="http://schemas.microsoft.com/office/powerpoint/2010/main" spd="med" advClick="1"/>
+  <p:transition spd="med"/>
 </p:sldLayout>
 </file>
 
 <file path=ppt/slideLayouts/slideLayout3.xml><?xml version="1.0" encoding="utf-8"?>
-<p:sldLayout xmlns:a="http://schemas.openxmlformats.org/drawingml/2006/main" xmlns:r="http://schemas.openxmlformats.org/officeDocument/2006/relationships" xmlns:p="http://schemas.openxmlformats.org/presentationml/2006/main" xmlns:m="http://schemas.openxmlformats.org/officeDocument/2006/math" xmlns:a14="http://schemas.microsoft.com/office/drawing/2010/main" type="tx" showMasterSp="0" showMasterPhAnim="1">
+<p:sldLayout xmlns:a="http://schemas.openxmlformats.org/drawingml/2006/main" xmlns:r="http://schemas.openxmlformats.org/officeDocument/2006/relationships" xmlns:p="http://schemas.openxmlformats.org/presentationml/2006/main" showMasterSp="0" type="tx">
   <p:cSld name="Section Header">
     <p:spTree>
       <p:nvGrpSpPr>
@@ -973,7 +990,9 @@
       <p:sp>
         <p:nvSpPr>
           <p:cNvPr id="37" name="Title Text"/>
-          <p:cNvSpPr txBox="1"/>
+          <p:cNvSpPr txBox="1">
+            <a:spLocks noGrp="1"/>
+          </p:cNvSpPr>
           <p:nvPr>
             <p:ph type="title"/>
           </p:nvPr>
@@ -995,7 +1014,6 @@
             </a:lvl1pPr>
           </a:lstStyle>
           <a:p>
-            <a:pPr/>
             <a:r>
               <a:t>Title Text</a:t>
             </a:r>
@@ -1005,7 +1023,9 @@
       <p:sp>
         <p:nvSpPr>
           <p:cNvPr id="38" name="Body Level One…"/>
-          <p:cNvSpPr txBox="1"/>
+          <p:cNvSpPr txBox="1">
+            <a:spLocks noGrp="1"/>
+          </p:cNvSpPr>
           <p:nvPr>
             <p:ph type="body" sz="quarter" idx="1"/>
           </p:nvPr>
@@ -1029,7 +1049,7 @@
               <a:buSzTx/>
               <a:buFontTx/>
               <a:buNone/>
-              <a:defRPr cap="all" spc="300" sz="1400"/>
+              <a:defRPr sz="1400" cap="all" spc="300"/>
             </a:lvl1pPr>
             <a:lvl2pPr marL="0" indent="457200">
               <a:lnSpc>
@@ -1038,7 +1058,7 @@
               <a:buSzTx/>
               <a:buFontTx/>
               <a:buNone/>
-              <a:defRPr cap="all" spc="300" sz="1400"/>
+              <a:defRPr sz="1400" cap="all" spc="300"/>
             </a:lvl2pPr>
             <a:lvl3pPr marL="0" indent="914400">
               <a:lnSpc>
@@ -1047,7 +1067,7 @@
               <a:buSzTx/>
               <a:buFontTx/>
               <a:buNone/>
-              <a:defRPr cap="all" spc="300" sz="1400"/>
+              <a:defRPr sz="1400" cap="all" spc="300"/>
             </a:lvl3pPr>
             <a:lvl4pPr marL="0" indent="1371600">
               <a:lnSpc>
@@ -1056,7 +1076,7 @@
               <a:buSzTx/>
               <a:buFontTx/>
               <a:buNone/>
-              <a:defRPr cap="all" spc="300" sz="1400"/>
+              <a:defRPr sz="1400" cap="all" spc="300"/>
             </a:lvl4pPr>
             <a:lvl5pPr marL="0" indent="1828800">
               <a:lnSpc>
@@ -1065,11 +1085,10 @@
               <a:buSzTx/>
               <a:buFontTx/>
               <a:buNone/>
-              <a:defRPr cap="all" spc="300" sz="1400"/>
+              <a:defRPr sz="1400" cap="all" spc="300"/>
             </a:lvl5pPr>
           </a:lstStyle>
           <a:p>
-            <a:pPr/>
             <a:r>
               <a:t>Body Level One</a:t>
             </a:r>
@@ -1125,7 +1144,7 @@
           <a:bodyPr lIns="45719" rIns="45719"/>
           <a:lstStyle/>
           <a:p>
-            <a:pPr/>
+            <a:endParaRPr/>
           </a:p>
         </p:txBody>
       </p:sp>
@@ -1154,7 +1173,7 @@
           <a:bodyPr lIns="45719" rIns="45719"/>
           <a:lstStyle/>
           <a:p>
-            <a:pPr/>
+            <a:endParaRPr/>
           </a:p>
         </p:txBody>
       </p:sp>
@@ -1183,14 +1202,16 @@
           <a:bodyPr lIns="45719" rIns="45719"/>
           <a:lstStyle/>
           <a:p>
-            <a:pPr/>
+            <a:endParaRPr/>
           </a:p>
         </p:txBody>
       </p:sp>
       <p:sp>
         <p:nvSpPr>
           <p:cNvPr id="42" name="Slide Number"/>
-          <p:cNvSpPr txBox="1"/>
+          <p:cNvSpPr txBox="1">
+            <a:spLocks noGrp="1"/>
+          </p:cNvSpPr>
           <p:nvPr>
             <p:ph type="sldNum" sz="quarter" idx="2"/>
           </p:nvPr>
@@ -1204,8 +1225,10 @@
           <a:bodyPr/>
           <a:lstStyle/>
           <a:p>
-            <a:pPr/>
-            <a:fld id="{86CB4B4D-7CA3-9044-876B-883B54F8677D}" type="slidenum"/>
+            <a:fld id="{86CB4B4D-7CA3-9044-876B-883B54F8677D}" type="slidenum">
+              <a:t>‹nº›</a:t>
+            </a:fld>
+            <a:endParaRPr/>
           </a:p>
         </p:txBody>
       </p:sp>
@@ -1214,12 +1237,12 @@
   <p:clrMapOvr>
     <a:masterClrMapping/>
   </p:clrMapOvr>
-  <p:transition xmlns:p14="http://schemas.microsoft.com/office/powerpoint/2010/main" spd="med" advClick="1"/>
+  <p:transition spd="med"/>
 </p:sldLayout>
 </file>
 
 <file path=ppt/slideLayouts/slideLayout4.xml><?xml version="1.0" encoding="utf-8"?>
-<p:sldLayout xmlns:a="http://schemas.openxmlformats.org/drawingml/2006/main" xmlns:r="http://schemas.openxmlformats.org/officeDocument/2006/relationships" xmlns:p="http://schemas.openxmlformats.org/presentationml/2006/main" xmlns:m="http://schemas.openxmlformats.org/officeDocument/2006/math" xmlns:a14="http://schemas.microsoft.com/office/drawing/2010/main" type="tx" showMasterSp="0" showMasterPhAnim="1">
+<p:sldLayout xmlns:a="http://schemas.openxmlformats.org/drawingml/2006/main" xmlns:r="http://schemas.openxmlformats.org/officeDocument/2006/relationships" xmlns:p="http://schemas.openxmlformats.org/presentationml/2006/main" showMasterSp="0" type="tx">
   <p:cSld name="Two Content">
     <p:spTree>
       <p:nvGrpSpPr>
@@ -1260,7 +1283,7 @@
           <a:bodyPr lIns="45719" rIns="45719"/>
           <a:lstStyle/>
           <a:p>
-            <a:pPr/>
+            <a:endParaRPr/>
           </a:p>
         </p:txBody>
       </p:sp>
@@ -1289,7 +1312,7 @@
           <a:bodyPr lIns="45719" rIns="45719"/>
           <a:lstStyle/>
           <a:p>
-            <a:pPr/>
+            <a:endParaRPr/>
           </a:p>
         </p:txBody>
       </p:sp>
@@ -1318,14 +1341,16 @@
           <a:bodyPr lIns="45719" rIns="45719"/>
           <a:lstStyle/>
           <a:p>
-            <a:pPr/>
+            <a:endParaRPr/>
           </a:p>
         </p:txBody>
       </p:sp>
       <p:sp>
         <p:nvSpPr>
           <p:cNvPr id="52" name="Title Text"/>
-          <p:cNvSpPr txBox="1"/>
+          <p:cNvSpPr txBox="1">
+            <a:spLocks noGrp="1"/>
+          </p:cNvSpPr>
           <p:nvPr>
             <p:ph type="title"/>
           </p:nvPr>
@@ -1343,7 +1368,6 @@
           <a:bodyPr anchor="ctr"/>
           <a:lstStyle/>
           <a:p>
-            <a:pPr/>
             <a:r>
               <a:t>Title Text</a:t>
             </a:r>
@@ -1353,7 +1377,9 @@
       <p:sp>
         <p:nvSpPr>
           <p:cNvPr id="53" name="Body Level One…"/>
-          <p:cNvSpPr txBox="1"/>
+          <p:cNvSpPr txBox="1">
+            <a:spLocks noGrp="1"/>
+          </p:cNvSpPr>
           <p:nvPr>
             <p:ph type="body" sz="half" idx="1"/>
           </p:nvPr>
@@ -1371,7 +1397,6 @@
           <a:bodyPr/>
           <a:lstStyle/>
           <a:p>
-            <a:pPr/>
             <a:r>
               <a:t>Body Level One</a:t>
             </a:r>
@@ -1427,14 +1452,16 @@
           <a:bodyPr lIns="45719" rIns="45719"/>
           <a:lstStyle/>
           <a:p>
-            <a:pPr/>
+            <a:endParaRPr/>
           </a:p>
         </p:txBody>
       </p:sp>
       <p:sp>
         <p:nvSpPr>
           <p:cNvPr id="55" name="Slide Number"/>
-          <p:cNvSpPr txBox="1"/>
+          <p:cNvSpPr txBox="1">
+            <a:spLocks noGrp="1"/>
+          </p:cNvSpPr>
           <p:nvPr>
             <p:ph type="sldNum" sz="quarter" idx="2"/>
           </p:nvPr>
@@ -1448,8 +1475,10 @@
           <a:bodyPr/>
           <a:lstStyle/>
           <a:p>
-            <a:pPr/>
-            <a:fld id="{86CB4B4D-7CA3-9044-876B-883B54F8677D}" type="slidenum"/>
+            <a:fld id="{86CB4B4D-7CA3-9044-876B-883B54F8677D}" type="slidenum">
+              <a:t>‹nº›</a:t>
+            </a:fld>
+            <a:endParaRPr/>
           </a:p>
         </p:txBody>
       </p:sp>
@@ -1458,12 +1487,12 @@
   <p:clrMapOvr>
     <a:masterClrMapping/>
   </p:clrMapOvr>
-  <p:transition xmlns:p14="http://schemas.microsoft.com/office/powerpoint/2010/main" spd="med" advClick="1"/>
+  <p:transition spd="med"/>
 </p:sldLayout>
 </file>
 
 <file path=ppt/slideLayouts/slideLayout5.xml><?xml version="1.0" encoding="utf-8"?>
-<p:sldLayout xmlns:a="http://schemas.openxmlformats.org/drawingml/2006/main" xmlns:r="http://schemas.openxmlformats.org/officeDocument/2006/relationships" xmlns:p="http://schemas.openxmlformats.org/presentationml/2006/main" xmlns:m="http://schemas.openxmlformats.org/officeDocument/2006/math" xmlns:a14="http://schemas.microsoft.com/office/drawing/2010/main" type="tx" showMasterSp="0" showMasterPhAnim="1">
+<p:sldLayout xmlns:a="http://schemas.openxmlformats.org/drawingml/2006/main" xmlns:r="http://schemas.openxmlformats.org/officeDocument/2006/relationships" xmlns:p="http://schemas.openxmlformats.org/presentationml/2006/main" showMasterSp="0" type="tx">
   <p:cSld name="Comparison">
     <p:spTree>
       <p:nvGrpSpPr>
@@ -1504,7 +1533,7 @@
           <a:bodyPr lIns="45719" rIns="45719"/>
           <a:lstStyle/>
           <a:p>
-            <a:pPr/>
+            <a:endParaRPr/>
           </a:p>
         </p:txBody>
       </p:sp>
@@ -1533,7 +1562,7 @@
           <a:bodyPr lIns="45719" rIns="45719"/>
           <a:lstStyle/>
           <a:p>
-            <a:pPr/>
+            <a:endParaRPr/>
           </a:p>
         </p:txBody>
       </p:sp>
@@ -1562,14 +1591,16 @@
           <a:bodyPr lIns="45719" rIns="45719"/>
           <a:lstStyle/>
           <a:p>
-            <a:pPr/>
+            <a:endParaRPr/>
           </a:p>
         </p:txBody>
       </p:sp>
       <p:sp>
         <p:nvSpPr>
           <p:cNvPr id="65" name="Title Text"/>
-          <p:cNvSpPr txBox="1"/>
+          <p:cNvSpPr txBox="1">
+            <a:spLocks noGrp="1"/>
+          </p:cNvSpPr>
           <p:nvPr>
             <p:ph type="title"/>
           </p:nvPr>
@@ -1587,7 +1618,6 @@
           <a:bodyPr anchor="ctr"/>
           <a:lstStyle/>
           <a:p>
-            <a:pPr/>
             <a:r>
               <a:t>Title Text</a:t>
             </a:r>
@@ -1597,7 +1627,9 @@
       <p:sp>
         <p:nvSpPr>
           <p:cNvPr id="66" name="Body Level One…"/>
-          <p:cNvSpPr txBox="1"/>
+          <p:cNvSpPr txBox="1">
+            <a:spLocks noGrp="1"/>
+          </p:cNvSpPr>
           <p:nvPr>
             <p:ph type="body" sz="quarter" idx="1"/>
           </p:nvPr>
@@ -1618,35 +1650,34 @@
               <a:buSzTx/>
               <a:buFontTx/>
               <a:buNone/>
-              <a:defRPr b="1" cap="all" spc="300" sz="1600"/>
+              <a:defRPr sz="1600" b="1" cap="all" spc="300"/>
             </a:lvl1pPr>
             <a:lvl2pPr marL="0" indent="457200">
               <a:buSzTx/>
               <a:buFontTx/>
               <a:buNone/>
-              <a:defRPr b="1" cap="all" spc="300" sz="1600"/>
+              <a:defRPr sz="1600" b="1" cap="all" spc="300"/>
             </a:lvl2pPr>
             <a:lvl3pPr marL="0" indent="914400">
               <a:buSzTx/>
               <a:buFontTx/>
               <a:buNone/>
-              <a:defRPr b="1" cap="all" spc="300" sz="1600"/>
+              <a:defRPr sz="1600" b="1" cap="all" spc="300"/>
             </a:lvl3pPr>
             <a:lvl4pPr marL="0" indent="1371600">
               <a:buSzTx/>
               <a:buFontTx/>
               <a:buNone/>
-              <a:defRPr b="1" cap="all" spc="300" sz="1600"/>
+              <a:defRPr sz="1600" b="1" cap="all" spc="300"/>
             </a:lvl4pPr>
             <a:lvl5pPr marL="0" indent="1828800">
               <a:buSzTx/>
               <a:buFontTx/>
               <a:buNone/>
-              <a:defRPr b="1" cap="all" spc="300" sz="1600"/>
+              <a:defRPr sz="1600" b="1" cap="all" spc="300"/>
             </a:lvl5pPr>
           </a:lstStyle>
           <a:p>
-            <a:pPr/>
             <a:r>
               <a:t>Body Level One</a:t>
             </a:r>
@@ -1680,7 +1711,9 @@
       <p:sp>
         <p:nvSpPr>
           <p:cNvPr id="67" name="Text Placeholder 4"/>
-          <p:cNvSpPr/>
+          <p:cNvSpPr>
+            <a:spLocks noGrp="1"/>
+          </p:cNvSpPr>
           <p:nvPr>
             <p:ph type="body" sz="quarter" idx="21"/>
           </p:nvPr>
@@ -1702,8 +1735,9 @@
               <a:buSzTx/>
               <a:buFontTx/>
               <a:buNone/>
-              <a:defRPr b="1" cap="all" spc="300" sz="1600"/>
+              <a:defRPr sz="1600" b="1" cap="all" spc="300"/>
             </a:pPr>
+            <a:endParaRPr/>
           </a:p>
         </p:txBody>
       </p:sp>
@@ -1732,7 +1766,7 @@
           <a:bodyPr lIns="45719" rIns="45719"/>
           <a:lstStyle/>
           <a:p>
-            <a:pPr/>
+            <a:endParaRPr/>
           </a:p>
         </p:txBody>
       </p:sp>
@@ -1761,14 +1795,16 @@
           <a:bodyPr lIns="45719" rIns="45719"/>
           <a:lstStyle/>
           <a:p>
-            <a:pPr/>
+            <a:endParaRPr/>
           </a:p>
         </p:txBody>
       </p:sp>
       <p:sp>
         <p:nvSpPr>
           <p:cNvPr id="70" name="Slide Number"/>
-          <p:cNvSpPr txBox="1"/>
+          <p:cNvSpPr txBox="1">
+            <a:spLocks noGrp="1"/>
+          </p:cNvSpPr>
           <p:nvPr>
             <p:ph type="sldNum" sz="quarter" idx="2"/>
           </p:nvPr>
@@ -1782,8 +1818,10 @@
           <a:bodyPr/>
           <a:lstStyle/>
           <a:p>
-            <a:pPr/>
-            <a:fld id="{86CB4B4D-7CA3-9044-876B-883B54F8677D}" type="slidenum"/>
+            <a:fld id="{86CB4B4D-7CA3-9044-876B-883B54F8677D}" type="slidenum">
+              <a:t>‹nº›</a:t>
+            </a:fld>
+            <a:endParaRPr/>
           </a:p>
         </p:txBody>
       </p:sp>
@@ -1792,12 +1830,12 @@
   <p:clrMapOvr>
     <a:masterClrMapping/>
   </p:clrMapOvr>
-  <p:transition xmlns:p14="http://schemas.microsoft.com/office/powerpoint/2010/main" spd="med" advClick="1"/>
+  <p:transition spd="med"/>
 </p:sldLayout>
 </file>
 
 <file path=ppt/slideLayouts/slideLayout6.xml><?xml version="1.0" encoding="utf-8"?>
-<p:sldLayout xmlns:a="http://schemas.openxmlformats.org/drawingml/2006/main" xmlns:r="http://schemas.openxmlformats.org/officeDocument/2006/relationships" xmlns:p="http://schemas.openxmlformats.org/presentationml/2006/main" xmlns:m="http://schemas.openxmlformats.org/officeDocument/2006/math" xmlns:a14="http://schemas.microsoft.com/office/drawing/2010/main" type="tx" showMasterSp="1" showMasterPhAnim="1">
+<p:sldLayout xmlns:a="http://schemas.openxmlformats.org/drawingml/2006/main" xmlns:r="http://schemas.openxmlformats.org/officeDocument/2006/relationships" xmlns:p="http://schemas.openxmlformats.org/presentationml/2006/main" type="tx">
   <p:cSld name="Title Only">
     <p:spTree>
       <p:nvGrpSpPr>
@@ -1816,7 +1854,9 @@
       <p:sp>
         <p:nvSpPr>
           <p:cNvPr id="77" name="Title Text"/>
-          <p:cNvSpPr txBox="1"/>
+          <p:cNvSpPr txBox="1">
+            <a:spLocks noGrp="1"/>
+          </p:cNvSpPr>
           <p:nvPr>
             <p:ph type="title"/>
           </p:nvPr>
@@ -1830,7 +1870,6 @@
           <a:bodyPr/>
           <a:lstStyle/>
           <a:p>
-            <a:pPr/>
             <a:r>
               <a:t>Title Text</a:t>
             </a:r>
@@ -1840,7 +1879,9 @@
       <p:sp>
         <p:nvSpPr>
           <p:cNvPr id="78" name="Slide Number"/>
-          <p:cNvSpPr txBox="1"/>
+          <p:cNvSpPr txBox="1">
+            <a:spLocks noGrp="1"/>
+          </p:cNvSpPr>
           <p:nvPr>
             <p:ph type="sldNum" sz="quarter" idx="2"/>
           </p:nvPr>
@@ -1854,8 +1895,10 @@
           <a:bodyPr/>
           <a:lstStyle/>
           <a:p>
-            <a:pPr/>
-            <a:fld id="{86CB4B4D-7CA3-9044-876B-883B54F8677D}" type="slidenum"/>
+            <a:fld id="{86CB4B4D-7CA3-9044-876B-883B54F8677D}" type="slidenum">
+              <a:t>‹nº›</a:t>
+            </a:fld>
+            <a:endParaRPr/>
           </a:p>
         </p:txBody>
       </p:sp>
@@ -1864,12 +1907,12 @@
   <p:clrMapOvr>
     <a:masterClrMapping/>
   </p:clrMapOvr>
-  <p:transition xmlns:p14="http://schemas.microsoft.com/office/powerpoint/2010/main" spd="med" advClick="1"/>
+  <p:transition spd="med"/>
 </p:sldLayout>
 </file>
 
 <file path=ppt/slideLayouts/slideLayout7.xml><?xml version="1.0" encoding="utf-8"?>
-<p:sldLayout xmlns:a="http://schemas.openxmlformats.org/drawingml/2006/main" xmlns:r="http://schemas.openxmlformats.org/officeDocument/2006/relationships" xmlns:p="http://schemas.openxmlformats.org/presentationml/2006/main" xmlns:m="http://schemas.openxmlformats.org/officeDocument/2006/math" xmlns:a14="http://schemas.microsoft.com/office/drawing/2010/main" type="tx" showMasterSp="0" showMasterPhAnim="1">
+<p:sldLayout xmlns:a="http://schemas.openxmlformats.org/drawingml/2006/main" xmlns:r="http://schemas.openxmlformats.org/officeDocument/2006/relationships" xmlns:p="http://schemas.openxmlformats.org/presentationml/2006/main" showMasterSp="0" type="tx">
   <p:cSld name="Blank">
     <p:spTree>
       <p:nvGrpSpPr>
@@ -1888,7 +1931,9 @@
       <p:sp>
         <p:nvSpPr>
           <p:cNvPr id="85" name="Slide Number"/>
-          <p:cNvSpPr txBox="1"/>
+          <p:cNvSpPr txBox="1">
+            <a:spLocks noGrp="1"/>
+          </p:cNvSpPr>
           <p:nvPr>
             <p:ph type="sldNum" sz="quarter" idx="2"/>
           </p:nvPr>
@@ -1902,8 +1947,10 @@
           <a:bodyPr/>
           <a:lstStyle/>
           <a:p>
-            <a:pPr/>
-            <a:fld id="{86CB4B4D-7CA3-9044-876B-883B54F8677D}" type="slidenum"/>
+            <a:fld id="{86CB4B4D-7CA3-9044-876B-883B54F8677D}" type="slidenum">
+              <a:t>‹nº›</a:t>
+            </a:fld>
+            <a:endParaRPr/>
           </a:p>
         </p:txBody>
       </p:sp>
@@ -1912,12 +1959,12 @@
   <p:clrMapOvr>
     <a:masterClrMapping/>
   </p:clrMapOvr>
-  <p:transition xmlns:p14="http://schemas.microsoft.com/office/powerpoint/2010/main" spd="med" advClick="1"/>
+  <p:transition spd="med"/>
 </p:sldLayout>
 </file>
 
 <file path=ppt/slideLayouts/slideLayout8.xml><?xml version="1.0" encoding="utf-8"?>
-<p:sldLayout xmlns:a="http://schemas.openxmlformats.org/drawingml/2006/main" xmlns:r="http://schemas.openxmlformats.org/officeDocument/2006/relationships" xmlns:p="http://schemas.openxmlformats.org/presentationml/2006/main" xmlns:m="http://schemas.openxmlformats.org/officeDocument/2006/math" xmlns:a14="http://schemas.microsoft.com/office/drawing/2010/main" type="tx" showMasterSp="0" showMasterPhAnim="1">
+<p:sldLayout xmlns:a="http://schemas.openxmlformats.org/drawingml/2006/main" xmlns:r="http://schemas.openxmlformats.org/officeDocument/2006/relationships" xmlns:p="http://schemas.openxmlformats.org/presentationml/2006/main" showMasterSp="0" type="tx">
   <p:cSld name="Content with Caption">
     <p:spTree>
       <p:nvGrpSpPr>
@@ -1936,7 +1983,9 @@
       <p:sp>
         <p:nvSpPr>
           <p:cNvPr id="92" name="Title Text"/>
-          <p:cNvSpPr txBox="1"/>
+          <p:cNvSpPr txBox="1">
+            <a:spLocks noGrp="1"/>
+          </p:cNvSpPr>
           <p:nvPr>
             <p:ph type="title"/>
           </p:nvPr>
@@ -1958,7 +2007,6 @@
             </a:lvl1pPr>
           </a:lstStyle>
           <a:p>
-            <a:pPr/>
             <a:r>
               <a:t>Title Text</a:t>
             </a:r>
@@ -1968,7 +2016,9 @@
       <p:sp>
         <p:nvSpPr>
           <p:cNvPr id="93" name="Body Level One…"/>
-          <p:cNvSpPr txBox="1"/>
+          <p:cNvSpPr txBox="1">
+            <a:spLocks noGrp="1"/>
+          </p:cNvSpPr>
           <p:nvPr>
             <p:ph type="body" idx="1"/>
           </p:nvPr>
@@ -2002,7 +2052,6 @@
             </a:lvl5pPr>
           </a:lstStyle>
           <a:p>
-            <a:pPr/>
             <a:r>
               <a:t>Body Level One</a:t>
             </a:r>
@@ -2036,7 +2085,9 @@
       <p:sp>
         <p:nvSpPr>
           <p:cNvPr id="94" name="Text Placeholder 3"/>
-          <p:cNvSpPr/>
+          <p:cNvSpPr>
+            <a:spLocks noGrp="1"/>
+          </p:cNvSpPr>
           <p:nvPr>
             <p:ph type="body" sz="quarter" idx="21"/>
           </p:nvPr>
@@ -2060,6 +2111,7 @@
               <a:buNone/>
               <a:defRPr sz="1600"/>
             </a:pPr>
+            <a:endParaRPr/>
           </a:p>
         </p:txBody>
       </p:sp>
@@ -2088,7 +2140,7 @@
           <a:bodyPr lIns="45719" rIns="45719"/>
           <a:lstStyle/>
           <a:p>
-            <a:pPr/>
+            <a:endParaRPr/>
           </a:p>
         </p:txBody>
       </p:sp>
@@ -2117,7 +2169,7 @@
           <a:bodyPr lIns="45719" rIns="45719"/>
           <a:lstStyle/>
           <a:p>
-            <a:pPr/>
+            <a:endParaRPr/>
           </a:p>
         </p:txBody>
       </p:sp>
@@ -2146,7 +2198,7 @@
           <a:bodyPr lIns="45719" rIns="45719"/>
           <a:lstStyle/>
           <a:p>
-            <a:pPr/>
+            <a:endParaRPr/>
           </a:p>
         </p:txBody>
       </p:sp>
@@ -2175,14 +2227,16 @@
           <a:bodyPr lIns="45719" rIns="45719"/>
           <a:lstStyle/>
           <a:p>
-            <a:pPr/>
+            <a:endParaRPr/>
           </a:p>
         </p:txBody>
       </p:sp>
       <p:sp>
         <p:nvSpPr>
           <p:cNvPr id="99" name="Slide Number"/>
-          <p:cNvSpPr txBox="1"/>
+          <p:cNvSpPr txBox="1">
+            <a:spLocks noGrp="1"/>
+          </p:cNvSpPr>
           <p:nvPr>
             <p:ph type="sldNum" sz="quarter" idx="2"/>
           </p:nvPr>
@@ -2196,8 +2250,10 @@
           <a:bodyPr/>
           <a:lstStyle/>
           <a:p>
-            <a:pPr/>
-            <a:fld id="{86CB4B4D-7CA3-9044-876B-883B54F8677D}" type="slidenum"/>
+            <a:fld id="{86CB4B4D-7CA3-9044-876B-883B54F8677D}" type="slidenum">
+              <a:t>‹nº›</a:t>
+            </a:fld>
+            <a:endParaRPr/>
           </a:p>
         </p:txBody>
       </p:sp>
@@ -2206,12 +2262,12 @@
   <p:clrMapOvr>
     <a:masterClrMapping/>
   </p:clrMapOvr>
-  <p:transition xmlns:p14="http://schemas.microsoft.com/office/powerpoint/2010/main" spd="med" advClick="1"/>
+  <p:transition spd="med"/>
 </p:sldLayout>
 </file>
 
 <file path=ppt/slideLayouts/slideLayout9.xml><?xml version="1.0" encoding="utf-8"?>
-<p:sldLayout xmlns:a="http://schemas.openxmlformats.org/drawingml/2006/main" xmlns:r="http://schemas.openxmlformats.org/officeDocument/2006/relationships" xmlns:p="http://schemas.openxmlformats.org/presentationml/2006/main" xmlns:m="http://schemas.openxmlformats.org/officeDocument/2006/math" xmlns:a14="http://schemas.microsoft.com/office/drawing/2010/main" type="tx" showMasterSp="0" showMasterPhAnim="1">
+<p:sldLayout xmlns:a="http://schemas.openxmlformats.org/drawingml/2006/main" xmlns:r="http://schemas.openxmlformats.org/officeDocument/2006/relationships" xmlns:p="http://schemas.openxmlformats.org/presentationml/2006/main" showMasterSp="0" type="tx">
   <p:cSld name="Picture with Caption">
     <p:spTree>
       <p:nvGrpSpPr>
@@ -2230,7 +2286,9 @@
       <p:sp>
         <p:nvSpPr>
           <p:cNvPr id="106" name="Title Text"/>
-          <p:cNvSpPr txBox="1"/>
+          <p:cNvSpPr txBox="1">
+            <a:spLocks noGrp="1"/>
+          </p:cNvSpPr>
           <p:nvPr>
             <p:ph type="title"/>
           </p:nvPr>
@@ -2252,7 +2310,6 @@
             </a:lvl1pPr>
           </a:lstStyle>
           <a:p>
-            <a:pPr/>
             <a:r>
               <a:t>Title Text</a:t>
             </a:r>
@@ -2262,7 +2319,9 @@
       <p:sp>
         <p:nvSpPr>
           <p:cNvPr id="107" name="Picture Placeholder 2"/>
-          <p:cNvSpPr/>
+          <p:cNvSpPr>
+            <a:spLocks noGrp="1"/>
+          </p:cNvSpPr>
           <p:nvPr>
             <p:ph type="pic" idx="21"/>
           </p:nvPr>
@@ -2282,14 +2341,16 @@
           </a:bodyPr>
           <a:lstStyle/>
           <a:p>
-            <a:pPr/>
+            <a:endParaRPr/>
           </a:p>
         </p:txBody>
       </p:sp>
       <p:sp>
         <p:nvSpPr>
           <p:cNvPr id="108" name="Body Level One…"/>
-          <p:cNvSpPr txBox="1"/>
+          <p:cNvSpPr txBox="1">
+            <a:spLocks noGrp="1"/>
+          </p:cNvSpPr>
           <p:nvPr>
             <p:ph type="body" sz="quarter" idx="1"/>
           </p:nvPr>
@@ -2338,7 +2399,6 @@
             </a:lvl5pPr>
           </a:lstStyle>
           <a:p>
-            <a:pPr/>
             <a:r>
               <a:t>Body Level One</a:t>
             </a:r>
@@ -2394,7 +2454,7 @@
           <a:bodyPr lIns="45719" rIns="45719"/>
           <a:lstStyle/>
           <a:p>
-            <a:pPr/>
+            <a:endParaRPr/>
           </a:p>
         </p:txBody>
       </p:sp>
@@ -2423,7 +2483,7 @@
           <a:bodyPr lIns="45719" rIns="45719"/>
           <a:lstStyle/>
           <a:p>
-            <a:pPr/>
+            <a:endParaRPr/>
           </a:p>
         </p:txBody>
       </p:sp>
@@ -2452,7 +2512,7 @@
           <a:bodyPr lIns="45719" rIns="45719"/>
           <a:lstStyle/>
           <a:p>
-            <a:pPr/>
+            <a:endParaRPr/>
           </a:p>
         </p:txBody>
       </p:sp>
@@ -2481,14 +2541,16 @@
           <a:bodyPr lIns="45719" rIns="45719"/>
           <a:lstStyle/>
           <a:p>
-            <a:pPr/>
+            <a:endParaRPr/>
           </a:p>
         </p:txBody>
       </p:sp>
       <p:sp>
         <p:nvSpPr>
           <p:cNvPr id="113" name="Slide Number"/>
-          <p:cNvSpPr txBox="1"/>
+          <p:cNvSpPr txBox="1">
+            <a:spLocks noGrp="1"/>
+          </p:cNvSpPr>
           <p:nvPr>
             <p:ph type="sldNum" sz="quarter" idx="2"/>
           </p:nvPr>
@@ -2502,8 +2564,10 @@
           <a:bodyPr/>
           <a:lstStyle/>
           <a:p>
-            <a:pPr/>
-            <a:fld id="{86CB4B4D-7CA3-9044-876B-883B54F8677D}" type="slidenum"/>
+            <a:fld id="{86CB4B4D-7CA3-9044-876B-883B54F8677D}" type="slidenum">
+              <a:t>‹nº›</a:t>
+            </a:fld>
+            <a:endParaRPr/>
           </a:p>
         </p:txBody>
       </p:sp>
@@ -2512,18 +2576,19 @@
   <p:clrMapOvr>
     <a:masterClrMapping/>
   </p:clrMapOvr>
-  <p:transition xmlns:p14="http://schemas.microsoft.com/office/powerpoint/2010/main" spd="med" advClick="1"/>
+  <p:transition spd="med"/>
 </p:sldLayout>
 </file>
 
 <file path=ppt/slideMasters/slideMaster1.xml><?xml version="1.0" encoding="utf-8"?>
-<p:sldMaster xmlns:a="http://schemas.openxmlformats.org/drawingml/2006/main" xmlns:r="http://schemas.openxmlformats.org/officeDocument/2006/relationships" xmlns:p="http://schemas.openxmlformats.org/presentationml/2006/main" xmlns:m="http://schemas.openxmlformats.org/officeDocument/2006/math" xmlns:a14="http://schemas.microsoft.com/office/drawing/2010/main">
+<p:sldMaster xmlns:a="http://schemas.openxmlformats.org/drawingml/2006/main" xmlns:r="http://schemas.openxmlformats.org/officeDocument/2006/relationships" xmlns:p="http://schemas.openxmlformats.org/presentationml/2006/main">
   <p:cSld>
     <p:bg>
       <p:bgPr>
         <a:solidFill>
           <a:srgbClr val="E2E3E8"/>
         </a:solidFill>
+        <a:effectLst/>
       </p:bgPr>
     </p:bg>
     <p:spTree>
@@ -2543,7 +2608,9 @@
       <p:sp>
         <p:nvSpPr>
           <p:cNvPr id="2" name="Title Text"/>
-          <p:cNvSpPr txBox="1"/>
+          <p:cNvSpPr txBox="1">
+            <a:spLocks noGrp="1"/>
+          </p:cNvSpPr>
           <p:nvPr>
             <p:ph type="title"/>
           </p:nvPr>
@@ -2561,17 +2628,16 @@
           </a:ln>
           <a:extLst>
             <a:ext uri="{C572A759-6A51-4108-AA02-DFA0A04FC94B}">
-              <ma14:wrappingTextBoxFlag xmlns:ma14="http://schemas.microsoft.com/office/mac/drawingml/2011/main" val="1"/>
+              <ma14:wrappingTextBoxFlag xmlns:ma14="http://schemas.microsoft.com/office/mac/drawingml/2011/main" xmlns:a14="http://schemas.microsoft.com/office/drawing/2010/main" xmlns:m="http://schemas.openxmlformats.org/officeDocument/2006/math" xmlns="" val="1"/>
             </a:ext>
           </a:extLst>
         </p:spPr>
         <p:txBody>
           <a:bodyPr lIns="45719" rIns="45719">
-            <a:normAutofit fontScale="100000" lnSpcReduction="0"/>
+            <a:normAutofit/>
           </a:bodyPr>
           <a:lstStyle/>
           <a:p>
-            <a:pPr/>
             <a:r>
               <a:t>Title Text</a:t>
             </a:r>
@@ -2603,7 +2669,7 @@
           <a:bodyPr lIns="45719" rIns="45719"/>
           <a:lstStyle/>
           <a:p>
-            <a:pPr/>
+            <a:endParaRPr/>
           </a:p>
         </p:txBody>
       </p:sp>
@@ -2632,14 +2698,16 @@
           <a:bodyPr lIns="45719" rIns="45719"/>
           <a:lstStyle/>
           <a:p>
-            <a:pPr/>
+            <a:endParaRPr/>
           </a:p>
         </p:txBody>
       </p:sp>
       <p:sp>
         <p:nvSpPr>
           <p:cNvPr id="5" name="Body Level One…"/>
-          <p:cNvSpPr txBox="1"/>
+          <p:cNvSpPr txBox="1">
+            <a:spLocks noGrp="1"/>
+          </p:cNvSpPr>
           <p:nvPr>
             <p:ph type="body" idx="1"/>
           </p:nvPr>
@@ -2657,17 +2725,16 @@
           </a:ln>
           <a:extLst>
             <a:ext uri="{C572A759-6A51-4108-AA02-DFA0A04FC94B}">
-              <ma14:wrappingTextBoxFlag xmlns:ma14="http://schemas.microsoft.com/office/mac/drawingml/2011/main" val="1"/>
+              <ma14:wrappingTextBoxFlag xmlns:ma14="http://schemas.microsoft.com/office/mac/drawingml/2011/main" xmlns:a14="http://schemas.microsoft.com/office/drawing/2010/main" xmlns:m="http://schemas.openxmlformats.org/officeDocument/2006/math" xmlns="" val="1"/>
             </a:ext>
           </a:extLst>
         </p:spPr>
         <p:txBody>
           <a:bodyPr lIns="45719" rIns="45719">
-            <a:normAutofit fontScale="100000" lnSpcReduction="0"/>
+            <a:normAutofit/>
           </a:bodyPr>
           <a:lstStyle/>
           <a:p>
-            <a:pPr/>
             <a:r>
               <a:t>Body Level One</a:t>
             </a:r>
@@ -2701,7 +2768,9 @@
       <p:sp>
         <p:nvSpPr>
           <p:cNvPr id="6" name="Slide Number"/>
-          <p:cNvSpPr txBox="1"/>
+          <p:cNvSpPr txBox="1">
+            <a:spLocks noGrp="1"/>
+          </p:cNvSpPr>
           <p:nvPr>
             <p:ph type="sldNum" sz="quarter" idx="2"/>
           </p:nvPr>
@@ -2728,8 +2797,10 @@
             </a:lvl1pPr>
           </a:lstStyle>
           <a:p>
-            <a:pPr/>
-            <a:fld id="{86CB4B4D-7CA3-9044-876B-883B54F8677D}" type="slidenum"/>
+            <a:fld id="{86CB4B4D-7CA3-9044-876B-883B54F8677D}" type="slidenum">
+              <a:t>‹nº›</a:t>
+            </a:fld>
+            <a:endParaRPr/>
           </a:p>
         </p:txBody>
       </p:sp>
@@ -2737,17 +2808,17 @@
   </p:cSld>
   <p:clrMap bg1="lt1" tx1="dk1" bg2="lt2" tx2="dk2" accent1="accent1" accent2="accent2" accent3="accent3" accent4="accent4" accent5="accent5" accent6="accent6" hlink="hlink" folHlink="folHlink"/>
   <p:sldLayoutIdLst>
-    <p:sldLayoutId id="2147483649" r:id="rId2"/>
-    <p:sldLayoutId id="2147483650" r:id="rId3"/>
-    <p:sldLayoutId id="2147483651" r:id="rId4"/>
-    <p:sldLayoutId id="2147483652" r:id="rId5"/>
-    <p:sldLayoutId id="2147483653" r:id="rId6"/>
-    <p:sldLayoutId id="2147483654" r:id="rId7"/>
-    <p:sldLayoutId id="2147483655" r:id="rId8"/>
-    <p:sldLayoutId id="2147483656" r:id="rId9"/>
-    <p:sldLayoutId id="2147483657" r:id="rId10"/>
+    <p:sldLayoutId id="2147483649" r:id="rId1"/>
+    <p:sldLayoutId id="2147483650" r:id="rId2"/>
+    <p:sldLayoutId id="2147483651" r:id="rId3"/>
+    <p:sldLayoutId id="2147483652" r:id="rId4"/>
+    <p:sldLayoutId id="2147483653" r:id="rId5"/>
+    <p:sldLayoutId id="2147483654" r:id="rId6"/>
+    <p:sldLayoutId id="2147483655" r:id="rId7"/>
+    <p:sldLayoutId id="2147483656" r:id="rId8"/>
+    <p:sldLayoutId id="2147483657" r:id="rId9"/>
   </p:sldLayoutIdLst>
-  <p:transition xmlns:p14="http://schemas.microsoft.com/office/powerpoint/2010/main" spd="med" advClick="1"/>
+  <p:transition spd="med"/>
   <p:txStyles>
     <p:titleStyle>
       <a:lvl1pPr marL="0" marR="0" indent="0" algn="l" defTabSz="914400" rtl="0" latinLnBrk="0">
@@ -2765,7 +2836,7 @@
         <a:buFontTx/>
         <a:buNone/>
         <a:tabLst/>
-        <a:defRPr b="0" baseline="0" cap="none" i="0" spc="-100" strike="noStrike" sz="4000" u="none">
+        <a:defRPr sz="4000" b="0" i="0" u="none" strike="noStrike" cap="none" spc="-100" baseline="0">
           <a:solidFill>
             <a:srgbClr val="000000"/>
           </a:solidFill>
@@ -2791,7 +2862,7 @@
         <a:buFontTx/>
         <a:buNone/>
         <a:tabLst/>
-        <a:defRPr b="0" baseline="0" cap="none" i="0" spc="-100" strike="noStrike" sz="4000" u="none">
+        <a:defRPr sz="4000" b="0" i="0" u="none" strike="noStrike" cap="none" spc="-100" baseline="0">
           <a:solidFill>
             <a:srgbClr val="000000"/>
           </a:solidFill>
@@ -2817,7 +2888,7 @@
         <a:buFontTx/>
         <a:buNone/>
         <a:tabLst/>
-        <a:defRPr b="0" baseline="0" cap="none" i="0" spc="-100" strike="noStrike" sz="4000" u="none">
+        <a:defRPr sz="4000" b="0" i="0" u="none" strike="noStrike" cap="none" spc="-100" baseline="0">
           <a:solidFill>
             <a:srgbClr val="000000"/>
           </a:solidFill>
@@ -2843,7 +2914,7 @@
         <a:buFontTx/>
         <a:buNone/>
         <a:tabLst/>
-        <a:defRPr b="0" baseline="0" cap="none" i="0" spc="-100" strike="noStrike" sz="4000" u="none">
+        <a:defRPr sz="4000" b="0" i="0" u="none" strike="noStrike" cap="none" spc="-100" baseline="0">
           <a:solidFill>
             <a:srgbClr val="000000"/>
           </a:solidFill>
@@ -2869,7 +2940,7 @@
         <a:buFontTx/>
         <a:buNone/>
         <a:tabLst/>
-        <a:defRPr b="0" baseline="0" cap="none" i="0" spc="-100" strike="noStrike" sz="4000" u="none">
+        <a:defRPr sz="4000" b="0" i="0" u="none" strike="noStrike" cap="none" spc="-100" baseline="0">
           <a:solidFill>
             <a:srgbClr val="000000"/>
           </a:solidFill>
@@ -2895,7 +2966,7 @@
         <a:buFontTx/>
         <a:buNone/>
         <a:tabLst/>
-        <a:defRPr b="0" baseline="0" cap="none" i="0" spc="-100" strike="noStrike" sz="4000" u="none">
+        <a:defRPr sz="4000" b="0" i="0" u="none" strike="noStrike" cap="none" spc="-100" baseline="0">
           <a:solidFill>
             <a:srgbClr val="000000"/>
           </a:solidFill>
@@ -2921,7 +2992,7 @@
         <a:buFontTx/>
         <a:buNone/>
         <a:tabLst/>
-        <a:defRPr b="0" baseline="0" cap="none" i="0" spc="-100" strike="noStrike" sz="4000" u="none">
+        <a:defRPr sz="4000" b="0" i="0" u="none" strike="noStrike" cap="none" spc="-100" baseline="0">
           <a:solidFill>
             <a:srgbClr val="000000"/>
           </a:solidFill>
@@ -2947,7 +3018,7 @@
         <a:buFontTx/>
         <a:buNone/>
         <a:tabLst/>
-        <a:defRPr b="0" baseline="0" cap="none" i="0" spc="-100" strike="noStrike" sz="4000" u="none">
+        <a:defRPr sz="4000" b="0" i="0" u="none" strike="noStrike" cap="none" spc="-100" baseline="0">
           <a:solidFill>
             <a:srgbClr val="000000"/>
           </a:solidFill>
@@ -2973,7 +3044,7 @@
         <a:buFontTx/>
         <a:buNone/>
         <a:tabLst/>
-        <a:defRPr b="0" baseline="0" cap="none" i="0" spc="-100" strike="noStrike" sz="4000" u="none">
+        <a:defRPr sz="4000" b="0" i="0" u="none" strike="noStrike" cap="none" spc="-100" baseline="0">
           <a:solidFill>
             <a:srgbClr val="000000"/>
           </a:solidFill>
@@ -3001,7 +3072,7 @@
         <a:buFont typeface="Arial"/>
         <a:buChar char="•"/>
         <a:tabLst/>
-        <a:defRPr b="0" baseline="0" cap="none" i="0" spc="0" strike="noStrike" sz="2000" u="none">
+        <a:defRPr sz="2000" b="0" i="0" u="none" strike="noStrike" cap="none" spc="0" baseline="0">
           <a:solidFill>
             <a:srgbClr val="000000"/>
           </a:solidFill>
@@ -3027,7 +3098,7 @@
         <a:buFont typeface="Arial"/>
         <a:buChar char="–"/>
         <a:tabLst/>
-        <a:defRPr b="0" baseline="0" cap="none" i="0" spc="0" strike="noStrike" sz="2000" u="none">
+        <a:defRPr sz="2000" b="0" i="0" u="none" strike="noStrike" cap="none" spc="0" baseline="0">
           <a:solidFill>
             <a:srgbClr val="000000"/>
           </a:solidFill>
@@ -3053,7 +3124,7 @@
         <a:buFont typeface="Arial"/>
         <a:buChar char="•"/>
         <a:tabLst/>
-        <a:defRPr b="0" baseline="0" cap="none" i="0" spc="0" strike="noStrike" sz="2000" u="none">
+        <a:defRPr sz="2000" b="0" i="0" u="none" strike="noStrike" cap="none" spc="0" baseline="0">
           <a:solidFill>
             <a:srgbClr val="000000"/>
           </a:solidFill>
@@ -3079,7 +3150,7 @@
         <a:buFont typeface="Arial"/>
         <a:buChar char="–"/>
         <a:tabLst/>
-        <a:defRPr b="0" baseline="0" cap="none" i="0" spc="0" strike="noStrike" sz="2000" u="none">
+        <a:defRPr sz="2000" b="0" i="0" u="none" strike="noStrike" cap="none" spc="0" baseline="0">
           <a:solidFill>
             <a:srgbClr val="000000"/>
           </a:solidFill>
@@ -3105,7 +3176,7 @@
         <a:buFont typeface="Arial"/>
         <a:buChar char="•"/>
         <a:tabLst/>
-        <a:defRPr b="0" baseline="0" cap="none" i="0" spc="0" strike="noStrike" sz="2000" u="none">
+        <a:defRPr sz="2000" b="0" i="0" u="none" strike="noStrike" cap="none" spc="0" baseline="0">
           <a:solidFill>
             <a:srgbClr val="000000"/>
           </a:solidFill>
@@ -3131,7 +3202,7 @@
         <a:buFont typeface="Arial"/>
         <a:buChar char="•"/>
         <a:tabLst/>
-        <a:defRPr b="0" baseline="0" cap="none" i="0" spc="0" strike="noStrike" sz="2000" u="none">
+        <a:defRPr sz="2000" b="0" i="0" u="none" strike="noStrike" cap="none" spc="0" baseline="0">
           <a:solidFill>
             <a:srgbClr val="000000"/>
           </a:solidFill>
@@ -3157,7 +3228,7 @@
         <a:buFont typeface="Arial"/>
         <a:buChar char="•"/>
         <a:tabLst/>
-        <a:defRPr b="0" baseline="0" cap="none" i="0" spc="0" strike="noStrike" sz="2000" u="none">
+        <a:defRPr sz="2000" b="0" i="0" u="none" strike="noStrike" cap="none" spc="0" baseline="0">
           <a:solidFill>
             <a:srgbClr val="000000"/>
           </a:solidFill>
@@ -3183,7 +3254,7 @@
         <a:buFont typeface="Arial"/>
         <a:buChar char="•"/>
         <a:tabLst/>
-        <a:defRPr b="0" baseline="0" cap="none" i="0" spc="0" strike="noStrike" sz="2000" u="none">
+        <a:defRPr sz="2000" b="0" i="0" u="none" strike="noStrike" cap="none" spc="0" baseline="0">
           <a:solidFill>
             <a:srgbClr val="000000"/>
           </a:solidFill>
@@ -3209,7 +3280,7 @@
         <a:buFont typeface="Arial"/>
         <a:buChar char="•"/>
         <a:tabLst/>
-        <a:defRPr b="0" baseline="0" cap="none" i="0" spc="0" strike="noStrike" sz="2000" u="none">
+        <a:defRPr sz="2000" b="0" i="0" u="none" strike="noStrike" cap="none" spc="0" baseline="0">
           <a:solidFill>
             <a:srgbClr val="000000"/>
           </a:solidFill>
@@ -3237,7 +3308,7 @@
         <a:buFontTx/>
         <a:buNone/>
         <a:tabLst/>
-        <a:defRPr b="0" baseline="0" cap="none" i="0" spc="0" strike="noStrike" sz="800" u="none">
+        <a:defRPr sz="800" b="0" i="0" u="none" strike="noStrike" cap="none" spc="0" baseline="0">
           <a:solidFill>
             <a:schemeClr val="tx1"/>
           </a:solidFill>
@@ -3263,7 +3334,7 @@
         <a:buFontTx/>
         <a:buNone/>
         <a:tabLst/>
-        <a:defRPr b="0" baseline="0" cap="none" i="0" spc="0" strike="noStrike" sz="800" u="none">
+        <a:defRPr sz="800" b="0" i="0" u="none" strike="noStrike" cap="none" spc="0" baseline="0">
           <a:solidFill>
             <a:schemeClr val="tx1"/>
           </a:solidFill>
@@ -3289,7 +3360,7 @@
         <a:buFontTx/>
         <a:buNone/>
         <a:tabLst/>
-        <a:defRPr b="0" baseline="0" cap="none" i="0" spc="0" strike="noStrike" sz="800" u="none">
+        <a:defRPr sz="800" b="0" i="0" u="none" strike="noStrike" cap="none" spc="0" baseline="0">
           <a:solidFill>
             <a:schemeClr val="tx1"/>
           </a:solidFill>
@@ -3315,7 +3386,7 @@
         <a:buFontTx/>
         <a:buNone/>
         <a:tabLst/>
-        <a:defRPr b="0" baseline="0" cap="none" i="0" spc="0" strike="noStrike" sz="800" u="none">
+        <a:defRPr sz="800" b="0" i="0" u="none" strike="noStrike" cap="none" spc="0" baseline="0">
           <a:solidFill>
             <a:schemeClr val="tx1"/>
           </a:solidFill>
@@ -3341,7 +3412,7 @@
         <a:buFontTx/>
         <a:buNone/>
         <a:tabLst/>
-        <a:defRPr b="0" baseline="0" cap="none" i="0" spc="0" strike="noStrike" sz="800" u="none">
+        <a:defRPr sz="800" b="0" i="0" u="none" strike="noStrike" cap="none" spc="0" baseline="0">
           <a:solidFill>
             <a:schemeClr val="tx1"/>
           </a:solidFill>
@@ -3367,7 +3438,7 @@
         <a:buFontTx/>
         <a:buNone/>
         <a:tabLst/>
-        <a:defRPr b="0" baseline="0" cap="none" i="0" spc="0" strike="noStrike" sz="800" u="none">
+        <a:defRPr sz="800" b="0" i="0" u="none" strike="noStrike" cap="none" spc="0" baseline="0">
           <a:solidFill>
             <a:schemeClr val="tx1"/>
           </a:solidFill>
@@ -3393,7 +3464,7 @@
         <a:buFontTx/>
         <a:buNone/>
         <a:tabLst/>
-        <a:defRPr b="0" baseline="0" cap="none" i="0" spc="0" strike="noStrike" sz="800" u="none">
+        <a:defRPr sz="800" b="0" i="0" u="none" strike="noStrike" cap="none" spc="0" baseline="0">
           <a:solidFill>
             <a:schemeClr val="tx1"/>
           </a:solidFill>
@@ -3419,7 +3490,7 @@
         <a:buFontTx/>
         <a:buNone/>
         <a:tabLst/>
-        <a:defRPr b="0" baseline="0" cap="none" i="0" spc="0" strike="noStrike" sz="800" u="none">
+        <a:defRPr sz="800" b="0" i="0" u="none" strike="noStrike" cap="none" spc="0" baseline="0">
           <a:solidFill>
             <a:schemeClr val="tx1"/>
           </a:solidFill>
@@ -3445,7 +3516,7 @@
         <a:buFontTx/>
         <a:buNone/>
         <a:tabLst/>
-        <a:defRPr b="0" baseline="0" cap="none" i="0" spc="0" strike="noStrike" sz="800" u="none">
+        <a:defRPr sz="800" b="0" i="0" u="none" strike="noStrike" cap="none" spc="0" baseline="0">
           <a:solidFill>
             <a:schemeClr val="tx1"/>
           </a:solidFill>
@@ -3462,13 +3533,14 @@
 </file>
 
 <file path=ppt/slides/slide1.xml><?xml version="1.0" encoding="utf-8"?>
-<p:sld xmlns:a="http://schemas.openxmlformats.org/drawingml/2006/main" xmlns:r="http://schemas.openxmlformats.org/officeDocument/2006/relationships" xmlns:p="http://schemas.openxmlformats.org/presentationml/2006/main" xmlns:m="http://schemas.openxmlformats.org/officeDocument/2006/math" xmlns:a14="http://schemas.microsoft.com/office/drawing/2010/main" showMasterSp="1" showMasterPhAnim="1">
+<p:sld xmlns:a="http://schemas.openxmlformats.org/drawingml/2006/main" xmlns:r="http://schemas.openxmlformats.org/officeDocument/2006/relationships" xmlns:p="http://schemas.openxmlformats.org/presentationml/2006/main">
   <p:cSld>
     <p:bg>
       <p:bgPr>
         <a:solidFill>
           <a:srgbClr val="FFFFFF"/>
         </a:solidFill>
+        <a:effectLst/>
       </p:bgPr>
     </p:bg>
     <p:spTree>
@@ -3517,6 +3589,7 @@
                 </a:solidFill>
               </a:defRPr>
             </a:pPr>
+            <a:endParaRPr/>
           </a:p>
         </p:txBody>
       </p:sp>
@@ -3531,9 +3604,8 @@
         <p:blipFill>
           <a:blip r:embed="rId2">
             <a:alphaModFix amt="60000"/>
-            <a:extLst/>
           </a:blip>
-          <a:srcRect l="0" t="24982" r="0" b="0"/>
+          <a:srcRect t="24982"/>
           <a:stretch>
             <a:fillRect/>
           </a:stretch>
@@ -3554,7 +3626,9 @@
       <p:sp>
         <p:nvSpPr>
           <p:cNvPr id="124" name="Título 1"/>
-          <p:cNvSpPr txBox="1"/>
+          <p:cNvSpPr txBox="1">
+            <a:spLocks noGrp="1"/>
+          </p:cNvSpPr>
           <p:nvPr>
             <p:ph type="ctrTitle"/>
           </p:nvPr>
@@ -3580,7 +3654,6 @@
             </a:lvl1pPr>
           </a:lstStyle>
           <a:p>
-            <a:pPr/>
             <a:r>
               <a:t>Multi-Agent Disaster Response and Relief Coordination System</a:t>
             </a:r>
@@ -3590,7 +3663,9 @@
       <p:sp>
         <p:nvSpPr>
           <p:cNvPr id="125" name="Subtítulo 2"/>
-          <p:cNvSpPr txBox="1"/>
+          <p:cNvSpPr txBox="1">
+            <a:spLocks noGrp="1"/>
+          </p:cNvSpPr>
           <p:nvPr>
             <p:ph type="subTitle" sz="quarter" idx="1"/>
           </p:nvPr>
@@ -3704,7 +3779,7 @@
           <a:bodyPr lIns="45719" rIns="45719"/>
           <a:lstStyle/>
           <a:p>
-            <a:pPr/>
+            <a:endParaRPr/>
           </a:p>
         </p:txBody>
       </p:sp>
@@ -3733,7 +3808,7 @@
           <a:bodyPr lIns="45719" rIns="45719"/>
           <a:lstStyle/>
           <a:p>
-            <a:pPr/>
+            <a:endParaRPr/>
           </a:p>
         </p:txBody>
       </p:sp>
@@ -3762,7 +3837,7 @@
           <a:bodyPr lIns="45719" rIns="45719"/>
           <a:lstStyle/>
           <a:p>
-            <a:pPr/>
+            <a:endParaRPr/>
           </a:p>
         </p:txBody>
       </p:sp>
@@ -3771,12 +3846,12 @@
   <p:clrMapOvr>
     <a:masterClrMapping/>
   </p:clrMapOvr>
-  <p:transition xmlns:p14="http://schemas.microsoft.com/office/powerpoint/2010/main" spd="med" advClick="1"/>
+  <p:transition spd="med"/>
 </p:sld>
 </file>
 
 <file path=ppt/slides/slide10.xml><?xml version="1.0" encoding="utf-8"?>
-<p:sld xmlns:a="http://schemas.openxmlformats.org/drawingml/2006/main" xmlns:r="http://schemas.openxmlformats.org/officeDocument/2006/relationships" xmlns:p="http://schemas.openxmlformats.org/presentationml/2006/main" xmlns:m="http://schemas.openxmlformats.org/officeDocument/2006/math" xmlns:a14="http://schemas.microsoft.com/office/drawing/2010/main" showMasterSp="1" showMasterPhAnim="1">
+<p:sld xmlns:a="http://schemas.openxmlformats.org/drawingml/2006/main" xmlns:r="http://schemas.openxmlformats.org/officeDocument/2006/relationships" xmlns:p="http://schemas.openxmlformats.org/presentationml/2006/main">
   <p:cSld>
     <p:spTree>
       <p:nvGrpSpPr>
@@ -3824,6 +3899,7 @@
                 </a:solidFill>
               </a:defRPr>
             </a:pPr>
+            <a:endParaRPr/>
           </a:p>
         </p:txBody>
       </p:sp>
@@ -3838,9 +3914,8 @@
         <p:blipFill>
           <a:blip r:embed="rId2">
             <a:alphaModFix amt="60000"/>
-            <a:extLst/>
           </a:blip>
-          <a:srcRect l="0" t="24982" r="0" b="0"/>
+          <a:srcRect t="24982"/>
           <a:stretch>
             <a:fillRect/>
           </a:stretch>
@@ -3861,7 +3936,9 @@
       <p:sp>
         <p:nvSpPr>
           <p:cNvPr id="200" name="Título 1"/>
-          <p:cNvSpPr txBox="1"/>
+          <p:cNvSpPr txBox="1">
+            <a:spLocks noGrp="1"/>
+          </p:cNvSpPr>
           <p:nvPr>
             <p:ph type="ctrTitle"/>
           </p:nvPr>
@@ -3880,7 +3957,7 @@
           <a:lstStyle/>
           <a:p>
             <a:pPr>
-              <a:defRPr spc="-99" sz="4700">
+              <a:defRPr sz="4700" spc="-99">
                 <a:solidFill>
                   <a:srgbClr val="FFFFFF"/>
                 </a:solidFill>
@@ -3892,86 +3969,86 @@
           </a:p>
           <a:p>
             <a:pPr>
-              <a:defRPr spc="-99" sz="4700">
+              <a:defRPr sz="4700" spc="-99">
                 <a:solidFill>
                   <a:srgbClr val="FFFFFF"/>
                 </a:solidFill>
               </a:defRPr>
             </a:pPr>
+            <a:endParaRPr/>
           </a:p>
           <a:p>
             <a:pPr>
-              <a:defRPr spc="-99" sz="4700">
+              <a:defRPr sz="4700" spc="-99">
                 <a:solidFill>
                   <a:srgbClr val="FFFFFF"/>
                 </a:solidFill>
               </a:defRPr>
             </a:pPr>
             <a:r>
-              <a:rPr spc="-100" sz="1800"/>
+              <a:rPr sz="1800" spc="-100"/>
               <a:t>No geral, pensamos que o trabalho está bem executado. Em todas as simulações, para 36 horas, as métricas medidas são muito positivas e o sistema age com poucas falhas.</a:t>
             </a:r>
-            <a:endParaRPr spc="-100" sz="1800"/>
           </a:p>
           <a:p>
             <a:pPr>
-              <a:defRPr spc="-99" sz="4700">
+              <a:defRPr sz="4700" spc="-99">
                 <a:solidFill>
                   <a:srgbClr val="FFFFFF"/>
                 </a:solidFill>
               </a:defRPr>
             </a:pPr>
-            <a:endParaRPr spc="-100" sz="1800"/>
+            <a:endParaRPr sz="1800" spc="-100"/>
           </a:p>
           <a:p>
             <a:pPr>
-              <a:defRPr spc="-99" sz="4700">
+              <a:defRPr sz="4700" spc="-99">
                 <a:solidFill>
                   <a:srgbClr val="FFFFFF"/>
                 </a:solidFill>
               </a:defRPr>
             </a:pPr>
             <a:br>
-              <a:rPr spc="-100" sz="1800"/>
+              <a:rPr sz="1800" spc="-100"/>
             </a:br>
             <a:r>
-              <a:rPr spc="-100" sz="1800"/>
+              <a:rPr sz="1800" spc="-100"/>
               <a:t>Alguns pontos a rever e onde o trabalho poderia ser melhorado (na nossa opinião) são:</a:t>
             </a:r>
-            <a:endParaRPr spc="-100" sz="1800"/>
           </a:p>
           <a:p>
             <a:pPr>
-              <a:defRPr spc="-99" sz="4700">
+              <a:defRPr sz="4700" spc="-99">
                 <a:solidFill>
                   <a:srgbClr val="FFFFFF"/>
                 </a:solidFill>
               </a:defRPr>
             </a:pPr>
             <a:br>
-              <a:rPr spc="-100" sz="1800"/>
+              <a:rPr sz="1800" spc="-100"/>
             </a:br>
             <a:r>
-              <a:rPr spc="-100" sz="1800"/>
+              <a:rPr sz="1800" spc="-100"/>
               <a:t>- Os agentes poderiam incluir-se a si próprios no protocolo Contract Net (o sistema não prevê que o melhor agente para socorrer uma célula possa ser o agente que recebeu o pedido de ajuda)</a:t>
             </a:r>
             <a:br>
-              <a:rPr spc="-100" sz="1800"/>
+              <a:rPr sz="1800" spc="-100"/>
             </a:br>
             <a:r>
-              <a:rPr spc="-100" sz="1800"/>
+              <a:rPr sz="1800" spc="-100"/>
               <a:t>- Os Shelter Agents poderiam “dividir” os agentes desabrigados de uma célula entre si (o sistema não prevê que mais do que um Shelter Agent possa socorrer os civis desabrigados de uma determinada célula)</a:t>
             </a:r>
             <a:br>
-              <a:rPr spc="-100" sz="1800"/>
+              <a:rPr sz="1800" spc="-100"/>
             </a:br>
             <a:r>
-              <a:rPr spc="-100" sz="1800"/>
+              <a:rPr sz="1800" spc="-100"/>
               <a:t>- O sistema poderia estar melhor preparado para lidar com os fenómenos Terramoto e Tsunami simultaneamente (o sistema pretende ser realista, mas ao fazê-lo demonstra falta de capacidade para lidar com um fenómeno tão grande). </a:t>
             </a:r>
             <a:br>
-              <a:rPr spc="-100" sz="1800"/>
+              <a:rPr sz="1800" spc="-100"/>
             </a:br>
+            <a:endParaRPr sz="1800" spc="-100"/>
           </a:p>
         </p:txBody>
       </p:sp>
@@ -4000,7 +4077,7 @@
           <a:bodyPr lIns="45719" rIns="45719"/>
           <a:lstStyle/>
           <a:p>
-            <a:pPr/>
+            <a:endParaRPr/>
           </a:p>
         </p:txBody>
       </p:sp>
@@ -4029,7 +4106,7 @@
           <a:bodyPr lIns="45719" rIns="45719"/>
           <a:lstStyle/>
           <a:p>
-            <a:pPr/>
+            <a:endParaRPr/>
           </a:p>
         </p:txBody>
       </p:sp>
@@ -4038,12 +4115,12 @@
   <p:clrMapOvr>
     <a:masterClrMapping/>
   </p:clrMapOvr>
-  <p:transition xmlns:p14="http://schemas.microsoft.com/office/powerpoint/2010/main" spd="med" advClick="1"/>
+  <p:transition spd="med"/>
 </p:sld>
 </file>
 
 <file path=ppt/slides/slide2.xml><?xml version="1.0" encoding="utf-8"?>
-<p:sld xmlns:a="http://schemas.openxmlformats.org/drawingml/2006/main" xmlns:r="http://schemas.openxmlformats.org/officeDocument/2006/relationships" xmlns:p="http://schemas.openxmlformats.org/presentationml/2006/main" xmlns:m="http://schemas.openxmlformats.org/officeDocument/2006/math" xmlns:a14="http://schemas.microsoft.com/office/drawing/2010/main" showMasterSp="1" showMasterPhAnim="1">
+<p:sld xmlns:a="http://schemas.openxmlformats.org/drawingml/2006/main" xmlns:r="http://schemas.openxmlformats.org/officeDocument/2006/relationships" xmlns:p="http://schemas.openxmlformats.org/presentationml/2006/main">
   <p:cSld>
     <p:spTree>
       <p:nvGrpSpPr>
@@ -4091,6 +4168,7 @@
                 </a:solidFill>
               </a:defRPr>
             </a:pPr>
+            <a:endParaRPr/>
           </a:p>
         </p:txBody>
       </p:sp>
@@ -4105,9 +4183,8 @@
         <p:blipFill>
           <a:blip r:embed="rId2">
             <a:alphaModFix amt="60000"/>
-            <a:extLst/>
           </a:blip>
-          <a:srcRect l="0" t="24982" r="0" b="0"/>
+          <a:srcRect t="24982"/>
           <a:stretch>
             <a:fillRect/>
           </a:stretch>
@@ -4128,7 +4205,9 @@
       <p:sp>
         <p:nvSpPr>
           <p:cNvPr id="132" name="Título 1"/>
-          <p:cNvSpPr txBox="1"/>
+          <p:cNvSpPr txBox="1">
+            <a:spLocks noGrp="1"/>
+          </p:cNvSpPr>
           <p:nvPr>
             <p:ph type="ctrTitle"/>
           </p:nvPr>
@@ -4156,7 +4235,20 @@
               </a:defRPr>
             </a:pPr>
             <a:r>
-              <a:t>Contexto do problema:</a:t>
+              <a:rPr dirty="0" err="1"/>
+              <a:t>Contexto</a:t>
+            </a:r>
+            <a:r>
+              <a:rPr dirty="0"/>
+              <a:t> do </a:t>
+            </a:r>
+            <a:r>
+              <a:rPr dirty="0" err="1"/>
+              <a:t>problema</a:t>
+            </a:r>
+            <a:r>
+              <a:rPr dirty="0"/>
+              <a:t>:</a:t>
             </a:r>
           </a:p>
           <a:p>
@@ -4167,13 +4259,14 @@
               <a:spcBef>
                 <a:spcPts val="1000"/>
               </a:spcBef>
-              <a:defRPr spc="0" sz="1600">
+              <a:defRPr sz="1600" spc="0">
                 <a:latin typeface="+mn-lt"/>
                 <a:ea typeface="+mn-ea"/>
                 <a:cs typeface="+mn-cs"/>
                 <a:sym typeface="Avenir Next LT Pro Light"/>
               </a:defRPr>
             </a:pPr>
+            <a:endParaRPr dirty="0"/>
           </a:p>
           <a:p>
             <a:pPr>
@@ -4184,10 +4277,325 @@
               </a:defRPr>
             </a:pPr>
             <a:r>
-              <a:rPr sz="1800"/>
-              <a:t>Esse trabalho tem como objetivo simular desastres naturais em um ambiente que simula uma cidade e implementar agentes que se comportem de acordo nas situações simuladas. O ambiente simula tsunamis, terramotos, ou ambos ao mesmo tempo, assim a simular os danos causados por tais desastres naturais. A simulação teve de ser feita com um sistema descentralizado e conta com 4 tipos diferentes de agentes: </a:t>
-            </a:r>
-            <a:endParaRPr sz="1800"/>
+              <a:rPr sz="1800" dirty="0"/>
+              <a:t>Es</a:t>
+            </a:r>
+            <a:r>
+              <a:rPr lang="pt-PT" sz="1800" dirty="0"/>
+              <a:t>t</a:t>
+            </a:r>
+            <a:r>
+              <a:rPr sz="1800" dirty="0"/>
+              <a:t>e </a:t>
+            </a:r>
+            <a:r>
+              <a:rPr sz="1800" dirty="0" err="1"/>
+              <a:t>trabalho</a:t>
+            </a:r>
+            <a:r>
+              <a:rPr sz="1800" dirty="0"/>
+              <a:t> </a:t>
+            </a:r>
+            <a:r>
+              <a:rPr sz="1800" dirty="0" err="1"/>
+              <a:t>tem</a:t>
+            </a:r>
+            <a:r>
+              <a:rPr sz="1800" dirty="0"/>
+              <a:t> </a:t>
+            </a:r>
+            <a:r>
+              <a:rPr sz="1800" dirty="0" err="1"/>
+              <a:t>como</a:t>
+            </a:r>
+            <a:r>
+              <a:rPr sz="1800" dirty="0"/>
+              <a:t> </a:t>
+            </a:r>
+            <a:r>
+              <a:rPr sz="1800" dirty="0" err="1"/>
+              <a:t>objetivo</a:t>
+            </a:r>
+            <a:r>
+              <a:rPr sz="1800" dirty="0"/>
+              <a:t> </a:t>
+            </a:r>
+            <a:r>
+              <a:rPr sz="1800" dirty="0" err="1"/>
+              <a:t>simular</a:t>
+            </a:r>
+            <a:r>
+              <a:rPr sz="1800" dirty="0"/>
+              <a:t> </a:t>
+            </a:r>
+            <a:r>
+              <a:rPr sz="1800" dirty="0" err="1"/>
+              <a:t>desastres</a:t>
+            </a:r>
+            <a:r>
+              <a:rPr sz="1800" dirty="0"/>
+              <a:t> </a:t>
+            </a:r>
+            <a:r>
+              <a:rPr sz="1800" dirty="0" err="1"/>
+              <a:t>naturais</a:t>
+            </a:r>
+            <a:r>
+              <a:rPr sz="1800" dirty="0"/>
+              <a:t> </a:t>
+            </a:r>
+            <a:r>
+              <a:rPr lang="pt-PT" sz="1800" dirty="0"/>
+              <a:t>numa </a:t>
+            </a:r>
+            <a:r>
+              <a:rPr sz="1800" dirty="0" err="1"/>
+              <a:t>cidade</a:t>
+            </a:r>
+            <a:r>
+              <a:rPr sz="1800" dirty="0"/>
+              <a:t> e </a:t>
+            </a:r>
+            <a:r>
+              <a:rPr sz="1800" dirty="0" err="1"/>
+              <a:t>implementar</a:t>
+            </a:r>
+            <a:r>
+              <a:rPr sz="1800" dirty="0"/>
+              <a:t> </a:t>
+            </a:r>
+            <a:r>
+              <a:rPr sz="1800" dirty="0" err="1"/>
+              <a:t>agentes</a:t>
+            </a:r>
+            <a:r>
+              <a:rPr sz="1800" dirty="0"/>
+              <a:t> que se </a:t>
+            </a:r>
+            <a:r>
+              <a:rPr sz="1800" dirty="0" err="1"/>
+              <a:t>comportem</a:t>
+            </a:r>
+            <a:r>
+              <a:rPr sz="1800" dirty="0"/>
+              <a:t> de </a:t>
+            </a:r>
+            <a:r>
+              <a:rPr sz="1800" dirty="0" err="1"/>
+              <a:t>acordo</a:t>
+            </a:r>
+            <a:r>
+              <a:rPr lang="pt-PT" sz="1800" dirty="0"/>
+              <a:t> com o acontecimento</a:t>
+            </a:r>
+            <a:r>
+              <a:rPr sz="1800" dirty="0"/>
+              <a:t> n</a:t>
+            </a:r>
+            <a:r>
+              <a:rPr lang="pt-PT" sz="1800" dirty="0"/>
+              <a:t>essas mesmas</a:t>
+            </a:r>
+            <a:r>
+              <a:rPr sz="1800" dirty="0"/>
+              <a:t> </a:t>
+            </a:r>
+            <a:r>
+              <a:rPr sz="1800" dirty="0" err="1"/>
+              <a:t>situações</a:t>
+            </a:r>
+            <a:r>
+              <a:rPr sz="1800" dirty="0"/>
+              <a:t> </a:t>
+            </a:r>
+            <a:r>
+              <a:rPr sz="1800" dirty="0" err="1"/>
+              <a:t>simuladas</a:t>
+            </a:r>
+            <a:r>
+              <a:rPr sz="1800" dirty="0"/>
+              <a:t>. O </a:t>
+            </a:r>
+            <a:r>
+              <a:rPr sz="1800" dirty="0" err="1"/>
+              <a:t>ambiente</a:t>
+            </a:r>
+            <a:r>
+              <a:rPr sz="1800" dirty="0"/>
+              <a:t> </a:t>
+            </a:r>
+            <a:r>
+              <a:rPr sz="1800" dirty="0" err="1"/>
+              <a:t>simula</a:t>
+            </a:r>
+            <a:r>
+              <a:rPr sz="1800" dirty="0"/>
+              <a:t> tsunamis, </a:t>
+            </a:r>
+            <a:r>
+              <a:rPr sz="1800" dirty="0" err="1"/>
+              <a:t>terramotos</a:t>
+            </a:r>
+            <a:r>
+              <a:rPr lang="pt-PT" sz="1800" dirty="0"/>
+              <a:t> </a:t>
+            </a:r>
+            <a:r>
+              <a:rPr sz="1800" dirty="0" err="1"/>
+              <a:t>ou</a:t>
+            </a:r>
+            <a:r>
+              <a:rPr sz="1800" dirty="0"/>
+              <a:t> ambos </a:t>
+            </a:r>
+            <a:r>
+              <a:rPr lang="pt-PT" sz="1800" dirty="0"/>
+              <a:t>(ao </a:t>
+            </a:r>
+            <a:r>
+              <a:rPr sz="1800" dirty="0" err="1"/>
+              <a:t>mesmo</a:t>
+            </a:r>
+            <a:r>
+              <a:rPr sz="1800" dirty="0"/>
+              <a:t> tempo</a:t>
+            </a:r>
+            <a:r>
+              <a:rPr lang="pt-PT" sz="1800" dirty="0"/>
+              <a:t>)</a:t>
+            </a:r>
+            <a:r>
+              <a:rPr sz="1800" dirty="0"/>
+              <a:t>, </a:t>
+            </a:r>
+            <a:r>
+              <a:rPr sz="1800" dirty="0" err="1"/>
+              <a:t>simula</a:t>
+            </a:r>
+            <a:r>
+              <a:rPr lang="pt-PT" sz="1800" dirty="0" err="1"/>
+              <a:t>ndo</a:t>
+            </a:r>
+            <a:r>
+              <a:rPr sz="1800" dirty="0"/>
+              <a:t> </a:t>
+            </a:r>
+            <a:r>
+              <a:rPr sz="1800" dirty="0" err="1"/>
+              <a:t>os</a:t>
+            </a:r>
+            <a:r>
+              <a:rPr sz="1800" dirty="0"/>
+              <a:t> </a:t>
+            </a:r>
+            <a:r>
+              <a:rPr sz="1800" dirty="0" err="1"/>
+              <a:t>danos</a:t>
+            </a:r>
+            <a:r>
+              <a:rPr sz="1800" dirty="0"/>
+              <a:t> </a:t>
+            </a:r>
+            <a:r>
+              <a:rPr sz="1800" dirty="0" err="1"/>
+              <a:t>causados</a:t>
+            </a:r>
+            <a:r>
+              <a:rPr sz="1800" dirty="0"/>
+              <a:t> </a:t>
+            </a:r>
+            <a:r>
+              <a:rPr sz="1800" dirty="0" err="1"/>
+              <a:t>por</a:t>
+            </a:r>
+            <a:r>
+              <a:rPr sz="1800" dirty="0"/>
+              <a:t> tais </a:t>
+            </a:r>
+            <a:r>
+              <a:rPr sz="1800" dirty="0" err="1"/>
+              <a:t>desastres</a:t>
+            </a:r>
+            <a:r>
+              <a:rPr sz="1800" dirty="0"/>
+              <a:t> </a:t>
+            </a:r>
+            <a:r>
+              <a:rPr sz="1800" dirty="0" err="1"/>
+              <a:t>naturais</a:t>
+            </a:r>
+            <a:r>
+              <a:rPr sz="1800" dirty="0"/>
+              <a:t>. A </a:t>
+            </a:r>
+            <a:r>
+              <a:rPr sz="1800" dirty="0" err="1"/>
+              <a:t>simulação</a:t>
+            </a:r>
+            <a:r>
+              <a:rPr sz="1800" dirty="0"/>
+              <a:t> </a:t>
+            </a:r>
+            <a:r>
+              <a:rPr lang="pt-PT" sz="1800" dirty="0"/>
+              <a:t>é </a:t>
+            </a:r>
+            <a:r>
+              <a:rPr sz="1800" dirty="0" err="1"/>
+              <a:t>feita</a:t>
+            </a:r>
+            <a:r>
+              <a:rPr sz="1800" dirty="0"/>
+              <a:t> com um </a:t>
+            </a:r>
+            <a:r>
+              <a:rPr sz="1800" dirty="0" err="1"/>
+              <a:t>sistema</a:t>
+            </a:r>
+            <a:r>
+              <a:rPr sz="1800" dirty="0"/>
+              <a:t> </a:t>
+            </a:r>
+            <a:r>
+              <a:rPr sz="1800" dirty="0" err="1"/>
+              <a:t>descentralizado</a:t>
+            </a:r>
+            <a:r>
+              <a:rPr sz="1800" dirty="0"/>
+              <a:t> e </a:t>
+            </a:r>
+            <a:r>
+              <a:rPr sz="1800" dirty="0" err="1"/>
+              <a:t>conta</a:t>
+            </a:r>
+            <a:r>
+              <a:rPr sz="1800" dirty="0"/>
+              <a:t> com 4 </a:t>
+            </a:r>
+            <a:r>
+              <a:rPr sz="1800" dirty="0" err="1"/>
+              <a:t>tipos</a:t>
+            </a:r>
+            <a:r>
+              <a:rPr sz="1800" dirty="0"/>
+              <a:t> </a:t>
+            </a:r>
+            <a:r>
+              <a:rPr sz="1800" dirty="0" err="1"/>
+              <a:t>diferentes</a:t>
+            </a:r>
+            <a:r>
+              <a:rPr sz="1800" dirty="0"/>
+              <a:t> de </a:t>
+            </a:r>
+            <a:r>
+              <a:rPr sz="1800" dirty="0" err="1"/>
+              <a:t>agentes</a:t>
+            </a:r>
+            <a:r>
+              <a:rPr sz="1800" dirty="0"/>
+              <a:t>: </a:t>
+            </a:r>
           </a:p>
           <a:p>
             <a:pPr>
@@ -4197,7 +4605,7 @@
                 </a:solidFill>
               </a:defRPr>
             </a:pPr>
-            <a:endParaRPr sz="1800"/>
+            <a:endParaRPr sz="1800" dirty="0"/>
           </a:p>
           <a:p>
             <a:pPr lvl="4">
@@ -4208,10 +4616,121 @@
               </a:defRPr>
             </a:pPr>
             <a:r>
-              <a:rPr sz="1800"/>
-              <a:t>- Civil agents: agentes que se comportam como civis ao meio de desastres naturais e devem receber ajuda e/ou abrigo.</a:t>
-            </a:r>
-            <a:endParaRPr sz="1800"/>
+              <a:rPr sz="1800" dirty="0"/>
+              <a:t>- Civil agents: </a:t>
+            </a:r>
+            <a:r>
+              <a:rPr sz="1800" dirty="0" err="1"/>
+              <a:t>agentes</a:t>
+            </a:r>
+            <a:r>
+              <a:rPr sz="1800" dirty="0"/>
+              <a:t> que se </a:t>
+            </a:r>
+            <a:r>
+              <a:rPr sz="1800" dirty="0" err="1"/>
+              <a:t>comportam</a:t>
+            </a:r>
+            <a:r>
+              <a:rPr sz="1800" dirty="0"/>
+              <a:t> </a:t>
+            </a:r>
+            <a:r>
+              <a:rPr sz="1800" dirty="0" err="1"/>
+              <a:t>como</a:t>
+            </a:r>
+            <a:r>
+              <a:rPr sz="1800" dirty="0"/>
+              <a:t> </a:t>
+            </a:r>
+            <a:r>
+              <a:rPr sz="1800" dirty="0" err="1"/>
+              <a:t>civis</a:t>
+            </a:r>
+            <a:r>
+              <a:rPr sz="1800" dirty="0"/>
+              <a:t> </a:t>
+            </a:r>
+            <a:r>
+              <a:rPr lang="pt-PT" sz="1800" dirty="0"/>
+              <a:t>no</a:t>
+            </a:r>
+            <a:r>
+              <a:rPr sz="1800" dirty="0"/>
+              <a:t> </a:t>
+            </a:r>
+            <a:r>
+              <a:rPr sz="1800" dirty="0" err="1"/>
+              <a:t>meio</a:t>
+            </a:r>
+            <a:r>
+              <a:rPr sz="1800" dirty="0"/>
+              <a:t> de </a:t>
+            </a:r>
+            <a:r>
+              <a:rPr sz="1800" dirty="0" err="1"/>
+              <a:t>desastres</a:t>
+            </a:r>
+            <a:r>
+              <a:rPr sz="1800" dirty="0"/>
+              <a:t> </a:t>
+            </a:r>
+            <a:r>
+              <a:rPr sz="1800" dirty="0" err="1"/>
+              <a:t>naturais</a:t>
+            </a:r>
+            <a:r>
+              <a:rPr sz="1800" dirty="0"/>
+              <a:t> e</a:t>
+            </a:r>
+            <a:r>
+              <a:rPr lang="pt-PT" sz="1800" dirty="0"/>
+              <a:t> que</a:t>
+            </a:r>
+            <a:r>
+              <a:rPr sz="1800" dirty="0"/>
+              <a:t> </a:t>
+            </a:r>
+            <a:r>
+              <a:rPr sz="1800" dirty="0" err="1"/>
+              <a:t>devem</a:t>
+            </a:r>
+            <a:r>
+              <a:rPr sz="1800" dirty="0"/>
+              <a:t> </a:t>
+            </a:r>
+            <a:r>
+              <a:rPr sz="1800" dirty="0" err="1"/>
+              <a:t>receber</a:t>
+            </a:r>
+            <a:r>
+              <a:rPr sz="1800" dirty="0"/>
+              <a:t> </a:t>
+            </a:r>
+            <a:r>
+              <a:rPr sz="1800" dirty="0" err="1"/>
+              <a:t>ajuda</a:t>
+            </a:r>
+            <a:r>
+              <a:rPr sz="1800" dirty="0"/>
+              <a:t> e/</a:t>
+            </a:r>
+            <a:r>
+              <a:rPr sz="1800" dirty="0" err="1"/>
+              <a:t>ou</a:t>
+            </a:r>
+            <a:r>
+              <a:rPr sz="1800" dirty="0"/>
+              <a:t> </a:t>
+            </a:r>
+            <a:r>
+              <a:rPr sz="1800" dirty="0" err="1"/>
+              <a:t>abrigo</a:t>
+            </a:r>
+            <a:r>
+              <a:rPr sz="1800" dirty="0"/>
+              <a:t>.</a:t>
+            </a:r>
           </a:p>
           <a:p>
             <a:pPr>
@@ -4222,10 +4741,65 @@
               </a:defRPr>
             </a:pPr>
             <a:r>
-              <a:rPr sz="1800"/>
-              <a:t>- Responder agents: agentes que se encarregam de socorrer os agentes civis que precisam de ajuda.</a:t>
-            </a:r>
-            <a:endParaRPr sz="1800"/>
+              <a:rPr sz="1800" dirty="0"/>
+              <a:t>- Responder agents: </a:t>
+            </a:r>
+            <a:r>
+              <a:rPr sz="1800" dirty="0" err="1"/>
+              <a:t>agentes</a:t>
+            </a:r>
+            <a:r>
+              <a:rPr sz="1800" dirty="0"/>
+              <a:t> que se </a:t>
+            </a:r>
+            <a:r>
+              <a:rPr sz="1800" dirty="0" err="1"/>
+              <a:t>encarregam</a:t>
+            </a:r>
+            <a:r>
+              <a:rPr sz="1800" dirty="0"/>
+              <a:t> de </a:t>
+            </a:r>
+            <a:r>
+              <a:rPr sz="1800" dirty="0" err="1"/>
+              <a:t>socorrer</a:t>
+            </a:r>
+            <a:r>
+              <a:rPr sz="1800" dirty="0"/>
+              <a:t> </a:t>
+            </a:r>
+            <a:r>
+              <a:rPr sz="1800" dirty="0" err="1"/>
+              <a:t>os</a:t>
+            </a:r>
+            <a:r>
+              <a:rPr sz="1800" dirty="0"/>
+              <a:t> </a:t>
+            </a:r>
+            <a:r>
+              <a:rPr sz="1800" dirty="0" err="1"/>
+              <a:t>agentes</a:t>
+            </a:r>
+            <a:r>
+              <a:rPr sz="1800" dirty="0"/>
+              <a:t> </a:t>
+            </a:r>
+            <a:r>
+              <a:rPr sz="1800" dirty="0" err="1"/>
+              <a:t>civis</a:t>
+            </a:r>
+            <a:r>
+              <a:rPr sz="1800" dirty="0"/>
+              <a:t> que </a:t>
+            </a:r>
+            <a:r>
+              <a:rPr lang="pt-PT" sz="1800" dirty="0"/>
+              <a:t>necessitam</a:t>
+            </a:r>
+            <a:r>
+              <a:rPr sz="1800" dirty="0"/>
+              <a:t>.</a:t>
+            </a:r>
           </a:p>
           <a:p>
             <a:pPr>
@@ -4236,10 +4810,157 @@
               </a:defRPr>
             </a:pPr>
             <a:r>
-              <a:rPr sz="1800"/>
-              <a:t>- Shelter agents: agentes que disponibilizam abrigo para os agentes civis desabrigados, nestes abrigos, são disponibilizados recursos aos agentes civis abrigados como comida, água e medicamentos.</a:t>
-            </a:r>
-            <a:endParaRPr sz="1800"/>
+              <a:rPr sz="1800" dirty="0"/>
+              <a:t>- Shelter agents: </a:t>
+            </a:r>
+            <a:r>
+              <a:rPr sz="1800" dirty="0" err="1"/>
+              <a:t>agentes</a:t>
+            </a:r>
+            <a:r>
+              <a:rPr sz="1800" dirty="0"/>
+              <a:t> que </a:t>
+            </a:r>
+            <a:r>
+              <a:rPr sz="1800" dirty="0" err="1"/>
+              <a:t>disponibilizam</a:t>
+            </a:r>
+            <a:r>
+              <a:rPr sz="1800" dirty="0"/>
+              <a:t> </a:t>
+            </a:r>
+            <a:r>
+              <a:rPr sz="1800" dirty="0" err="1"/>
+              <a:t>abrigo</a:t>
+            </a:r>
+            <a:r>
+              <a:rPr sz="1800" dirty="0"/>
+              <a:t> para </a:t>
+            </a:r>
+            <a:r>
+              <a:rPr sz="1800" dirty="0" err="1"/>
+              <a:t>os</a:t>
+            </a:r>
+            <a:r>
+              <a:rPr sz="1800" dirty="0"/>
+              <a:t> </a:t>
+            </a:r>
+            <a:r>
+              <a:rPr sz="1800" dirty="0" err="1"/>
+              <a:t>agentes</a:t>
+            </a:r>
+            <a:r>
+              <a:rPr sz="1800" dirty="0"/>
+              <a:t> </a:t>
+            </a:r>
+            <a:r>
+              <a:rPr sz="1800" dirty="0" err="1"/>
+              <a:t>civis</a:t>
+            </a:r>
+            <a:r>
+              <a:rPr sz="1800" dirty="0"/>
+              <a:t> </a:t>
+            </a:r>
+            <a:r>
+              <a:rPr sz="1800" dirty="0" err="1"/>
+              <a:t>desabrigados</a:t>
+            </a:r>
+            <a:r>
+              <a:rPr lang="pt-PT" sz="1800" dirty="0"/>
+              <a:t>. N</a:t>
+            </a:r>
+            <a:r>
+              <a:rPr sz="1800" dirty="0" err="1"/>
+              <a:t>estes</a:t>
+            </a:r>
+            <a:r>
+              <a:rPr sz="1800" dirty="0"/>
+              <a:t> </a:t>
+            </a:r>
+            <a:r>
+              <a:rPr sz="1800" dirty="0" err="1"/>
+              <a:t>abrigos</a:t>
+            </a:r>
+            <a:r>
+              <a:rPr sz="1800" dirty="0"/>
+              <a:t>, </a:t>
+            </a:r>
+            <a:r>
+              <a:rPr sz="1800" dirty="0" err="1"/>
+              <a:t>são</a:t>
+            </a:r>
+            <a:r>
+              <a:rPr sz="1800" dirty="0"/>
+              <a:t> </a:t>
+            </a:r>
+            <a:r>
+              <a:rPr sz="1800" dirty="0" err="1"/>
+              <a:t>disponibilizados</a:t>
+            </a:r>
+            <a:r>
+              <a:rPr sz="1800" dirty="0"/>
+              <a:t> </a:t>
+            </a:r>
+            <a:r>
+              <a:rPr sz="1800" dirty="0" err="1"/>
+              <a:t>recursos</a:t>
+            </a:r>
+            <a:r>
+              <a:rPr sz="1800" dirty="0"/>
+              <a:t> </a:t>
+            </a:r>
+            <a:r>
+              <a:rPr sz="1800" dirty="0" err="1"/>
+              <a:t>aos</a:t>
+            </a:r>
+            <a:r>
+              <a:rPr sz="1800" dirty="0"/>
+              <a:t> </a:t>
+            </a:r>
+            <a:r>
+              <a:rPr sz="1800" dirty="0" err="1"/>
+              <a:t>civis</a:t>
+            </a:r>
+            <a:r>
+              <a:rPr sz="1800" dirty="0"/>
+              <a:t> </a:t>
+            </a:r>
+            <a:r>
+              <a:rPr sz="1800" dirty="0" err="1"/>
+              <a:t>abrigado</a:t>
+            </a:r>
+            <a:r>
+              <a:rPr lang="pt-PT" sz="1800" dirty="0"/>
+              <a:t>s,</a:t>
+            </a:r>
+            <a:r>
+              <a:rPr sz="1800" dirty="0"/>
+              <a:t> </a:t>
+            </a:r>
+            <a:r>
+              <a:rPr sz="1800" dirty="0" err="1"/>
+              <a:t>como</a:t>
+            </a:r>
+            <a:r>
+              <a:rPr sz="1800" dirty="0"/>
+              <a:t> comida, </a:t>
+            </a:r>
+            <a:r>
+              <a:rPr sz="1800" dirty="0" err="1"/>
+              <a:t>água</a:t>
+            </a:r>
+            <a:r>
+              <a:rPr sz="1800" dirty="0"/>
+              <a:t> e </a:t>
+            </a:r>
+            <a:r>
+              <a:rPr sz="1800" dirty="0" err="1"/>
+              <a:t>medicamentos</a:t>
+            </a:r>
+            <a:r>
+              <a:rPr sz="1800" dirty="0"/>
+              <a:t>.</a:t>
+            </a:r>
           </a:p>
           <a:p>
             <a:pPr>
@@ -4250,10 +4971,93 @@
               </a:defRPr>
             </a:pPr>
             <a:r>
-              <a:rPr sz="1800"/>
-              <a:t>- Supply Vehicle agents: agentes que são encarregados de abastecer ou reabastecer os abrigos com os recursos necessários para o uso dos civis. </a:t>
-            </a:r>
-            <a:endParaRPr sz="1800"/>
+              <a:rPr sz="1800" dirty="0"/>
+              <a:t>- Supply Vehicle agents: </a:t>
+            </a:r>
+            <a:r>
+              <a:rPr sz="1800" dirty="0" err="1"/>
+              <a:t>agentes</a:t>
+            </a:r>
+            <a:r>
+              <a:rPr sz="1800" dirty="0"/>
+              <a:t> que </a:t>
+            </a:r>
+            <a:r>
+              <a:rPr lang="pt-PT" sz="1800" dirty="0"/>
+              <a:t>estão encarregues</a:t>
+            </a:r>
+            <a:r>
+              <a:rPr sz="1800" dirty="0"/>
+              <a:t> de </a:t>
+            </a:r>
+            <a:r>
+              <a:rPr sz="1800" dirty="0" err="1"/>
+              <a:t>abastecer</a:t>
+            </a:r>
+            <a:r>
+              <a:rPr sz="1800" dirty="0"/>
+              <a:t> </a:t>
+            </a:r>
+            <a:r>
+              <a:rPr sz="1800" dirty="0" err="1"/>
+              <a:t>ou</a:t>
+            </a:r>
+            <a:r>
+              <a:rPr sz="1800" dirty="0"/>
+              <a:t> </a:t>
+            </a:r>
+            <a:r>
+              <a:rPr sz="1800" dirty="0" err="1"/>
+              <a:t>reabastecer</a:t>
+            </a:r>
+            <a:r>
+              <a:rPr sz="1800" dirty="0"/>
+              <a:t> </a:t>
+            </a:r>
+            <a:r>
+              <a:rPr sz="1800" dirty="0" err="1"/>
+              <a:t>os</a:t>
+            </a:r>
+            <a:r>
+              <a:rPr sz="1800" dirty="0"/>
+              <a:t> </a:t>
+            </a:r>
+            <a:r>
+              <a:rPr sz="1800" dirty="0" err="1"/>
+              <a:t>abrigos</a:t>
+            </a:r>
+            <a:r>
+              <a:rPr sz="1800" dirty="0"/>
+              <a:t> com </a:t>
+            </a:r>
+            <a:r>
+              <a:rPr sz="1800" dirty="0" err="1"/>
+              <a:t>os</a:t>
+            </a:r>
+            <a:r>
+              <a:rPr sz="1800" dirty="0"/>
+              <a:t> </a:t>
+            </a:r>
+            <a:r>
+              <a:rPr sz="1800" dirty="0" err="1"/>
+              <a:t>recursos</a:t>
+            </a:r>
+            <a:r>
+              <a:rPr sz="1800" dirty="0"/>
+              <a:t> </a:t>
+            </a:r>
+            <a:r>
+              <a:rPr sz="1800" dirty="0" err="1"/>
+              <a:t>necessário</a:t>
+            </a:r>
+            <a:r>
+              <a:rPr lang="pt-PT" sz="1800" dirty="0"/>
+              <a:t>s.</a:t>
+            </a:r>
+            <a:br>
+              <a:rPr lang="pt-PT" sz="1800" dirty="0"/>
+            </a:br>
+            <a:endParaRPr sz="1800" dirty="0"/>
           </a:p>
           <a:p>
             <a:pPr>
@@ -4263,19 +5067,117 @@
                 </a:solidFill>
               </a:defRPr>
             </a:pPr>
-            <a:endParaRPr sz="1800"/>
-          </a:p>
-          <a:p>
-            <a:pPr>
-              <a:defRPr>
-                <a:solidFill>
-                  <a:srgbClr val="FFFFFF"/>
-                </a:solidFill>
-              </a:defRPr>
-            </a:pPr>
-            <a:r>
-              <a:rPr sz="1800"/>
-              <a:t>Os agentes comunicam-se uns com os outros, a colaborar para os melhores resultados, e tomam decisões flexíveis e adaptáveis em tempo real. </a:t>
+            <a:r>
+              <a:rPr sz="1800" dirty="0" err="1"/>
+              <a:t>Os</a:t>
+            </a:r>
+            <a:r>
+              <a:rPr sz="1800" dirty="0"/>
+              <a:t> </a:t>
+            </a:r>
+            <a:r>
+              <a:rPr sz="1800" dirty="0" err="1"/>
+              <a:t>agentes</a:t>
+            </a:r>
+            <a:r>
+              <a:rPr sz="1800" dirty="0"/>
+              <a:t> </a:t>
+            </a:r>
+            <a:r>
+              <a:rPr sz="1800" dirty="0" err="1"/>
+              <a:t>comunicam</a:t>
+            </a:r>
+            <a:r>
+              <a:rPr sz="1800" dirty="0"/>
+              <a:t> </a:t>
+            </a:r>
+            <a:r>
+              <a:rPr sz="1800" dirty="0" err="1"/>
+              <a:t>uns</a:t>
+            </a:r>
+            <a:r>
+              <a:rPr sz="1800" dirty="0"/>
+              <a:t> com </a:t>
+            </a:r>
+            <a:r>
+              <a:rPr sz="1800" dirty="0" err="1"/>
+              <a:t>os</a:t>
+            </a:r>
+            <a:r>
+              <a:rPr sz="1800" dirty="0"/>
+              <a:t> outros, a </a:t>
+            </a:r>
+            <a:r>
+              <a:rPr sz="1800" dirty="0" err="1"/>
+              <a:t>colaborar</a:t>
+            </a:r>
+            <a:r>
+              <a:rPr sz="1800" dirty="0"/>
+              <a:t> para </a:t>
+            </a:r>
+            <a:r>
+              <a:rPr lang="pt-PT" sz="1800" dirty="0"/>
+              <a:t>a obtenção dos</a:t>
+            </a:r>
+            <a:r>
+              <a:rPr sz="1800" dirty="0"/>
+              <a:t> </a:t>
+            </a:r>
+            <a:r>
+              <a:rPr sz="1800" dirty="0" err="1"/>
+              <a:t>melhores</a:t>
+            </a:r>
+            <a:r>
+              <a:rPr sz="1800" dirty="0"/>
+              <a:t> </a:t>
+            </a:r>
+            <a:r>
+              <a:rPr sz="1800" dirty="0" err="1"/>
+              <a:t>resultados</a:t>
+            </a:r>
+            <a:r>
+              <a:rPr sz="1800" dirty="0"/>
+              <a:t>, e </a:t>
+            </a:r>
+            <a:r>
+              <a:rPr sz="1800" dirty="0" err="1"/>
+              <a:t>tomam</a:t>
+            </a:r>
+            <a:r>
+              <a:rPr sz="1800" dirty="0"/>
+              <a:t> </a:t>
+            </a:r>
+            <a:r>
+              <a:rPr sz="1800" dirty="0" err="1"/>
+              <a:t>decisões</a:t>
+            </a:r>
+            <a:r>
+              <a:rPr sz="1800" dirty="0"/>
+              <a:t> </a:t>
+            </a:r>
+            <a:r>
+              <a:rPr sz="1800" dirty="0" err="1"/>
+              <a:t>flexíveis</a:t>
+            </a:r>
+            <a:r>
+              <a:rPr sz="1800" dirty="0"/>
+              <a:t> e </a:t>
+            </a:r>
+            <a:r>
+              <a:rPr sz="1800" dirty="0" err="1"/>
+              <a:t>adaptáveis</a:t>
+            </a:r>
+            <a:r>
+              <a:rPr sz="1800" dirty="0"/>
+              <a:t> </a:t>
+            </a:r>
+            <a:r>
+              <a:rPr sz="1800" dirty="0" err="1"/>
+              <a:t>em</a:t>
+            </a:r>
+            <a:r>
+              <a:rPr sz="1800" dirty="0"/>
+              <a:t> tempo real. </a:t>
             </a:r>
           </a:p>
         </p:txBody>
@@ -4305,7 +5207,7 @@
           <a:bodyPr lIns="45719" rIns="45719"/>
           <a:lstStyle/>
           <a:p>
-            <a:pPr/>
+            <a:endParaRPr/>
           </a:p>
         </p:txBody>
       </p:sp>
@@ -4334,7 +5236,7 @@
           <a:bodyPr lIns="45719" rIns="45719"/>
           <a:lstStyle/>
           <a:p>
-            <a:pPr/>
+            <a:endParaRPr/>
           </a:p>
         </p:txBody>
       </p:sp>
@@ -4343,12 +5245,12 @@
   <p:clrMapOvr>
     <a:masterClrMapping/>
   </p:clrMapOvr>
-  <p:transition xmlns:p14="http://schemas.microsoft.com/office/powerpoint/2010/main" spd="med" advClick="1"/>
+  <p:transition spd="med"/>
 </p:sld>
 </file>
 
 <file path=ppt/slides/slide3.xml><?xml version="1.0" encoding="utf-8"?>
-<p:sld xmlns:a="http://schemas.openxmlformats.org/drawingml/2006/main" xmlns:r="http://schemas.openxmlformats.org/officeDocument/2006/relationships" xmlns:p="http://schemas.openxmlformats.org/presentationml/2006/main" xmlns:m="http://schemas.openxmlformats.org/officeDocument/2006/math" xmlns:a14="http://schemas.microsoft.com/office/drawing/2010/main" showMasterSp="1" showMasterPhAnim="1">
+<p:sld xmlns:a="http://schemas.openxmlformats.org/drawingml/2006/main" xmlns:r="http://schemas.openxmlformats.org/officeDocument/2006/relationships" xmlns:p="http://schemas.openxmlformats.org/presentationml/2006/main">
   <p:cSld>
     <p:spTree>
       <p:nvGrpSpPr>
@@ -4396,6 +5298,7 @@
                 </a:solidFill>
               </a:defRPr>
             </a:pPr>
+            <a:endParaRPr/>
           </a:p>
         </p:txBody>
       </p:sp>
@@ -4410,9 +5313,8 @@
         <p:blipFill>
           <a:blip r:embed="rId2">
             <a:alphaModFix amt="60000"/>
-            <a:extLst/>
           </a:blip>
-          <a:srcRect l="0" t="24982" r="0" b="0"/>
+          <a:srcRect t="24982"/>
           <a:stretch>
             <a:fillRect/>
           </a:stretch>
@@ -4433,7 +5335,9 @@
       <p:sp>
         <p:nvSpPr>
           <p:cNvPr id="138" name="Título 1"/>
-          <p:cNvSpPr txBox="1"/>
+          <p:cNvSpPr txBox="1">
+            <a:spLocks noGrp="1"/>
+          </p:cNvSpPr>
           <p:nvPr>
             <p:ph type="ctrTitle"/>
           </p:nvPr>
@@ -4459,6 +5363,7 @@
               </a:defRPr>
             </a:pPr>
             <a:r>
+              <a:rPr dirty="0"/>
               <a:t>Civil Agent:</a:t>
             </a:r>
           </a:p>
@@ -4470,10 +5375,328 @@
                 </a:solidFill>
               </a:defRPr>
             </a:pPr>
-            <a:br/>
-            <a:r>
-              <a:rPr sz="1800"/>
-              <a:t>Existem 2 tipos de agentes que representam os civis e existe 1 agente civil de cada tipo em cada célula do mapa afetada pelo desastre. Um dos civis é o representante dos mortos e feridos, e vai enviar mensagens para um dos Responder Agents até receber a confirmação de que um Responder Agent se encontra a caminho, e o outro é o representante das pessoas desalojadas, e vai enviar mensagens para um dos Shelter Agents até receber confirmação de que um Shelter Agent se encontra a caminho.</a:t>
+            <a:br>
+              <a:rPr dirty="0"/>
+            </a:br>
+            <a:r>
+              <a:rPr sz="1800" dirty="0" err="1"/>
+              <a:t>Existem</a:t>
+            </a:r>
+            <a:r>
+              <a:rPr sz="1800" dirty="0"/>
+              <a:t> 2 </a:t>
+            </a:r>
+            <a:r>
+              <a:rPr sz="1800" dirty="0" err="1"/>
+              <a:t>tipos</a:t>
+            </a:r>
+            <a:r>
+              <a:rPr sz="1800" dirty="0"/>
+              <a:t> de </a:t>
+            </a:r>
+            <a:r>
+              <a:rPr sz="1800" dirty="0" err="1"/>
+              <a:t>agentes</a:t>
+            </a:r>
+            <a:r>
+              <a:rPr sz="1800" dirty="0"/>
+              <a:t> que </a:t>
+            </a:r>
+            <a:r>
+              <a:rPr sz="1800" dirty="0" err="1"/>
+              <a:t>representam</a:t>
+            </a:r>
+            <a:r>
+              <a:rPr sz="1800" dirty="0"/>
+              <a:t> </a:t>
+            </a:r>
+            <a:r>
+              <a:rPr sz="1800" dirty="0" err="1"/>
+              <a:t>os</a:t>
+            </a:r>
+            <a:r>
+              <a:rPr sz="1800" dirty="0"/>
+              <a:t> </a:t>
+            </a:r>
+            <a:r>
+              <a:rPr sz="1800" dirty="0" err="1"/>
+              <a:t>civis</a:t>
+            </a:r>
+            <a:r>
+              <a:rPr sz="1800" dirty="0"/>
+              <a:t> e </a:t>
+            </a:r>
+            <a:r>
+              <a:rPr sz="1800" dirty="0" err="1"/>
+              <a:t>existe</a:t>
+            </a:r>
+            <a:r>
+              <a:rPr sz="1800" dirty="0"/>
+              <a:t> 1 </a:t>
+            </a:r>
+            <a:r>
+              <a:rPr sz="1800" dirty="0" err="1"/>
+              <a:t>agente</a:t>
+            </a:r>
+            <a:r>
+              <a:rPr sz="1800" dirty="0"/>
+              <a:t> civil de </a:t>
+            </a:r>
+            <a:r>
+              <a:rPr sz="1800" dirty="0" err="1"/>
+              <a:t>cada</a:t>
+            </a:r>
+            <a:r>
+              <a:rPr sz="1800" dirty="0"/>
+              <a:t> </a:t>
+            </a:r>
+            <a:r>
+              <a:rPr sz="1800" dirty="0" err="1"/>
+              <a:t>tipo</a:t>
+            </a:r>
+            <a:r>
+              <a:rPr sz="1800" dirty="0"/>
+              <a:t> </a:t>
+            </a:r>
+            <a:r>
+              <a:rPr sz="1800" dirty="0" err="1"/>
+              <a:t>em</a:t>
+            </a:r>
+            <a:r>
+              <a:rPr sz="1800" dirty="0"/>
+              <a:t> </a:t>
+            </a:r>
+            <a:r>
+              <a:rPr sz="1800" dirty="0" err="1"/>
+              <a:t>cada</a:t>
+            </a:r>
+            <a:r>
+              <a:rPr sz="1800" dirty="0"/>
+              <a:t> </a:t>
+            </a:r>
+            <a:r>
+              <a:rPr sz="1800" dirty="0" err="1"/>
+              <a:t>célula</a:t>
+            </a:r>
+            <a:r>
+              <a:rPr sz="1800" dirty="0"/>
+              <a:t> do </a:t>
+            </a:r>
+            <a:r>
+              <a:rPr sz="1800" dirty="0" err="1"/>
+              <a:t>mapa</a:t>
+            </a:r>
+            <a:r>
+              <a:rPr sz="1800" dirty="0"/>
+              <a:t> </a:t>
+            </a:r>
+            <a:r>
+              <a:rPr sz="1800" dirty="0" err="1"/>
+              <a:t>afetada</a:t>
+            </a:r>
+            <a:r>
+              <a:rPr sz="1800" dirty="0"/>
+              <a:t> </a:t>
+            </a:r>
+            <a:r>
+              <a:rPr sz="1800" dirty="0" err="1"/>
+              <a:t>pelo</a:t>
+            </a:r>
+            <a:r>
+              <a:rPr sz="1800" dirty="0"/>
+              <a:t> </a:t>
+            </a:r>
+            <a:r>
+              <a:rPr sz="1800" dirty="0" err="1"/>
+              <a:t>desastre</a:t>
+            </a:r>
+            <a:r>
+              <a:rPr sz="1800" dirty="0"/>
+              <a:t>. Um dos </a:t>
+            </a:r>
+            <a:r>
+              <a:rPr sz="1800" dirty="0" err="1"/>
+              <a:t>civis</a:t>
+            </a:r>
+            <a:r>
+              <a:rPr sz="1800" dirty="0"/>
+              <a:t> é o </a:t>
+            </a:r>
+            <a:r>
+              <a:rPr sz="1800" dirty="0" err="1"/>
+              <a:t>representante</a:t>
+            </a:r>
+            <a:r>
+              <a:rPr sz="1800" dirty="0"/>
+              <a:t> dos </a:t>
+            </a:r>
+            <a:r>
+              <a:rPr sz="1800" dirty="0" err="1"/>
+              <a:t>mortos</a:t>
+            </a:r>
+            <a:r>
+              <a:rPr sz="1800" dirty="0"/>
+              <a:t> e </a:t>
+            </a:r>
+            <a:r>
+              <a:rPr sz="1800" dirty="0" err="1"/>
+              <a:t>feridos</a:t>
+            </a:r>
+            <a:r>
+              <a:rPr sz="1800" dirty="0"/>
+              <a:t>, e </a:t>
+            </a:r>
+            <a:r>
+              <a:rPr sz="1800" dirty="0" err="1"/>
+              <a:t>vai</a:t>
+            </a:r>
+            <a:r>
+              <a:rPr sz="1800" dirty="0"/>
+              <a:t> </a:t>
+            </a:r>
+            <a:r>
+              <a:rPr sz="1800" dirty="0" err="1"/>
+              <a:t>enviar</a:t>
+            </a:r>
+            <a:r>
+              <a:rPr sz="1800" dirty="0"/>
+              <a:t> </a:t>
+            </a:r>
+            <a:r>
+              <a:rPr sz="1800" dirty="0" err="1"/>
+              <a:t>mensagens</a:t>
+            </a:r>
+            <a:r>
+              <a:rPr sz="1800" dirty="0"/>
+              <a:t> para um dos Responder Agents </a:t>
+            </a:r>
+            <a:r>
+              <a:rPr sz="1800" dirty="0" err="1"/>
+              <a:t>até</a:t>
+            </a:r>
+            <a:r>
+              <a:rPr sz="1800" dirty="0"/>
+              <a:t> </a:t>
+            </a:r>
+            <a:r>
+              <a:rPr sz="1800" dirty="0" err="1"/>
+              <a:t>receber</a:t>
+            </a:r>
+            <a:r>
+              <a:rPr sz="1800" dirty="0"/>
+              <a:t> a </a:t>
+            </a:r>
+            <a:r>
+              <a:rPr sz="1800" dirty="0" err="1"/>
+              <a:t>confirmação</a:t>
+            </a:r>
+            <a:r>
+              <a:rPr sz="1800" dirty="0"/>
+              <a:t> de que um Responder Agent se </a:t>
+            </a:r>
+            <a:r>
+              <a:rPr sz="1800" dirty="0" err="1"/>
+              <a:t>encontra</a:t>
+            </a:r>
+            <a:r>
+              <a:rPr sz="1800" dirty="0"/>
+              <a:t> a </a:t>
+            </a:r>
+            <a:r>
+              <a:rPr sz="1800" dirty="0" err="1"/>
+              <a:t>caminho</a:t>
+            </a:r>
+            <a:r>
+              <a:rPr sz="1800" dirty="0"/>
+              <a:t>, e o outro é o </a:t>
+            </a:r>
+            <a:r>
+              <a:rPr sz="1800" dirty="0" err="1"/>
+              <a:t>representante</a:t>
+            </a:r>
+            <a:r>
+              <a:rPr sz="1800" dirty="0"/>
+              <a:t> das </a:t>
+            </a:r>
+            <a:r>
+              <a:rPr sz="1800" dirty="0" err="1"/>
+              <a:t>pessoas</a:t>
+            </a:r>
+            <a:r>
+              <a:rPr sz="1800" dirty="0"/>
+              <a:t> </a:t>
+            </a:r>
+            <a:r>
+              <a:rPr sz="1800" dirty="0" err="1"/>
+              <a:t>desalojadas</a:t>
+            </a:r>
+            <a:r>
+              <a:rPr sz="1800" dirty="0"/>
+              <a:t>, e </a:t>
+            </a:r>
+            <a:r>
+              <a:rPr sz="1800" dirty="0" err="1"/>
+              <a:t>vai</a:t>
+            </a:r>
+            <a:r>
+              <a:rPr sz="1800" dirty="0"/>
+              <a:t> </a:t>
+            </a:r>
+            <a:r>
+              <a:rPr sz="1800" dirty="0" err="1"/>
+              <a:t>enviar</a:t>
+            </a:r>
+            <a:r>
+              <a:rPr sz="1800" dirty="0"/>
+              <a:t> </a:t>
+            </a:r>
+            <a:r>
+              <a:rPr sz="1800" dirty="0" err="1"/>
+              <a:t>mensagens</a:t>
+            </a:r>
+            <a:r>
+              <a:rPr sz="1800" dirty="0"/>
+              <a:t> para um dos Shelter Agents </a:t>
+            </a:r>
+            <a:r>
+              <a:rPr sz="1800" dirty="0" err="1"/>
+              <a:t>até</a:t>
+            </a:r>
+            <a:r>
+              <a:rPr sz="1800" dirty="0"/>
+              <a:t> </a:t>
+            </a:r>
+            <a:r>
+              <a:rPr sz="1800" dirty="0" err="1"/>
+              <a:t>receber</a:t>
+            </a:r>
+            <a:r>
+              <a:rPr sz="1800" dirty="0"/>
+              <a:t> </a:t>
+            </a:r>
+            <a:r>
+              <a:rPr sz="1800" dirty="0" err="1"/>
+              <a:t>confirmação</a:t>
+            </a:r>
+            <a:r>
+              <a:rPr sz="1800" dirty="0"/>
+              <a:t> de que um Shelter Agent se </a:t>
+            </a:r>
+            <a:r>
+              <a:rPr sz="1800" dirty="0" err="1"/>
+              <a:t>encontra</a:t>
+            </a:r>
+            <a:r>
+              <a:rPr sz="1800" dirty="0"/>
+              <a:t> a </a:t>
+            </a:r>
+            <a:r>
+              <a:rPr sz="1800" dirty="0" err="1"/>
+              <a:t>caminho</a:t>
+            </a:r>
+            <a:r>
+              <a:rPr sz="1800" dirty="0"/>
+              <a:t>.</a:t>
             </a:r>
           </a:p>
         </p:txBody>
@@ -4503,7 +5726,7 @@
           <a:bodyPr lIns="45719" rIns="45719"/>
           <a:lstStyle/>
           <a:p>
-            <a:pPr/>
+            <a:endParaRPr/>
           </a:p>
         </p:txBody>
       </p:sp>
@@ -4532,7 +5755,7 @@
           <a:bodyPr lIns="45719" rIns="45719"/>
           <a:lstStyle/>
           <a:p>
-            <a:pPr/>
+            <a:endParaRPr/>
           </a:p>
         </p:txBody>
       </p:sp>
@@ -4561,7 +5784,7 @@
           <a:bodyPr lIns="45719" rIns="45719"/>
           <a:lstStyle/>
           <a:p>
-            <a:pPr/>
+            <a:endParaRPr/>
           </a:p>
         </p:txBody>
       </p:sp>
@@ -4584,13 +5807,13 @@
           </a:ln>
           <a:extLst>
             <a:ext uri="{C572A759-6A51-4108-AA02-DFA0A04FC94B}">
-              <ma14:wrappingTextBoxFlag xmlns:ma14="http://schemas.microsoft.com/office/mac/drawingml/2011/main" val="1"/>
+              <ma14:wrappingTextBoxFlag xmlns:ma14="http://schemas.microsoft.com/office/mac/drawingml/2011/main" xmlns:a14="http://schemas.microsoft.com/office/drawing/2010/main" xmlns:m="http://schemas.openxmlformats.org/officeDocument/2006/math" xmlns="" val="1"/>
             </a:ext>
           </a:extLst>
         </p:spPr>
         <p:txBody>
           <a:bodyPr lIns="45719" rIns="45719">
-            <a:normAutofit fontScale="100000" lnSpcReduction="0"/>
+            <a:normAutofit/>
           </a:bodyPr>
           <a:lstStyle/>
           <a:p>
@@ -4598,7 +5821,7 @@
               <a:lnSpc>
                 <a:spcPct val="90000"/>
               </a:lnSpc>
-              <a:defRPr spc="-100" sz="4800">
+              <a:defRPr sz="4800" spc="-100">
                 <a:solidFill>
                   <a:srgbClr val="FFFFFF"/>
                 </a:solidFill>
@@ -4617,7 +5840,7 @@
               <a:lnSpc>
                 <a:spcPct val="90000"/>
               </a:lnSpc>
-              <a:defRPr spc="-100" sz="4800">
+              <a:defRPr sz="4800" spc="-100">
                 <a:solidFill>
                   <a:srgbClr val="FFFFFF"/>
                 </a:solidFill>
@@ -4627,6 +5850,7 @@
                 <a:sym typeface="Batang"/>
               </a:defRPr>
             </a:pPr>
+            <a:endParaRPr/>
           </a:p>
           <a:p>
             <a:pPr>
@@ -4647,6 +5871,7 @@
               <a:t>O mapa representa o ambiente onde tudo acontece. É simulado um fenómeno aleatório (Terramoto, Tsunami ou ambos)e a partir daí o resto do programa “desenrola-se”. Daqui é possível obter várias informações, desde o número de civis feridos numa determinada célula à localização das bases dos responder agentes que foram afetadas pela catástrofe.</a:t>
             </a:r>
             <a:br/>
+            <a:endParaRPr/>
           </a:p>
         </p:txBody>
       </p:sp>
@@ -4655,12 +5880,12 @@
   <p:clrMapOvr>
     <a:masterClrMapping/>
   </p:clrMapOvr>
-  <p:transition xmlns:p14="http://schemas.microsoft.com/office/powerpoint/2010/main" spd="med" advClick="1"/>
+  <p:transition spd="med"/>
 </p:sld>
 </file>
 
 <file path=ppt/slides/slide4.xml><?xml version="1.0" encoding="utf-8"?>
-<p:sld xmlns:a="http://schemas.openxmlformats.org/drawingml/2006/main" xmlns:r="http://schemas.openxmlformats.org/officeDocument/2006/relationships" xmlns:p="http://schemas.openxmlformats.org/presentationml/2006/main" xmlns:m="http://schemas.openxmlformats.org/officeDocument/2006/math" xmlns:a14="http://schemas.microsoft.com/office/drawing/2010/main" showMasterSp="1" showMasterPhAnim="1">
+<p:sld xmlns:a="http://schemas.openxmlformats.org/drawingml/2006/main" xmlns:r="http://schemas.openxmlformats.org/officeDocument/2006/relationships" xmlns:p="http://schemas.openxmlformats.org/presentationml/2006/main">
   <p:cSld>
     <p:spTree>
       <p:nvGrpSpPr>
@@ -4708,6 +5933,7 @@
                 </a:solidFill>
               </a:defRPr>
             </a:pPr>
+            <a:endParaRPr/>
           </a:p>
         </p:txBody>
       </p:sp>
@@ -4722,9 +5948,8 @@
         <p:blipFill>
           <a:blip r:embed="rId2">
             <a:alphaModFix amt="60000"/>
-            <a:extLst/>
           </a:blip>
-          <a:srcRect l="0" t="24982" r="0" b="0"/>
+          <a:srcRect t="24982"/>
           <a:stretch>
             <a:fillRect/>
           </a:stretch>
@@ -4745,7 +5970,9 @@
       <p:sp>
         <p:nvSpPr>
           <p:cNvPr id="146" name="Título 1"/>
-          <p:cNvSpPr txBox="1"/>
+          <p:cNvSpPr txBox="1">
+            <a:spLocks noGrp="1"/>
+          </p:cNvSpPr>
           <p:nvPr>
             <p:ph type="ctrTitle"/>
           </p:nvPr>
@@ -4782,6 +6009,7 @@
                 </a:solidFill>
               </a:defRPr>
             </a:pPr>
+            <a:endParaRPr/>
           </a:p>
           <a:p>
             <a:pPr>
@@ -4830,7 +6058,7 @@
           <a:bodyPr lIns="45719" rIns="45719"/>
           <a:lstStyle/>
           <a:p>
-            <a:pPr/>
+            <a:endParaRPr/>
           </a:p>
         </p:txBody>
       </p:sp>
@@ -4859,7 +6087,7 @@
           <a:bodyPr lIns="45719" rIns="45719"/>
           <a:lstStyle/>
           <a:p>
-            <a:pPr/>
+            <a:endParaRPr/>
           </a:p>
         </p:txBody>
       </p:sp>
@@ -4888,7 +6116,7 @@
           <a:bodyPr lIns="45719" rIns="45719"/>
           <a:lstStyle/>
           <a:p>
-            <a:pPr/>
+            <a:endParaRPr/>
           </a:p>
         </p:txBody>
       </p:sp>
@@ -4911,13 +6139,13 @@
           </a:ln>
           <a:extLst>
             <a:ext uri="{C572A759-6A51-4108-AA02-DFA0A04FC94B}">
-              <ma14:wrappingTextBoxFlag xmlns:ma14="http://schemas.microsoft.com/office/mac/drawingml/2011/main" val="1"/>
+              <ma14:wrappingTextBoxFlag xmlns:ma14="http://schemas.microsoft.com/office/mac/drawingml/2011/main" xmlns:a14="http://schemas.microsoft.com/office/drawing/2010/main" xmlns:m="http://schemas.openxmlformats.org/officeDocument/2006/math" xmlns="" val="1"/>
             </a:ext>
           </a:extLst>
         </p:spPr>
         <p:txBody>
           <a:bodyPr lIns="45719" rIns="45719">
-            <a:normAutofit fontScale="100000" lnSpcReduction="0"/>
+            <a:normAutofit lnSpcReduction="10000"/>
           </a:bodyPr>
           <a:lstStyle/>
           <a:p>
@@ -4925,7 +6153,7 @@
               <a:lnSpc>
                 <a:spcPct val="90000"/>
               </a:lnSpc>
-              <a:defRPr spc="-100" sz="4800">
+              <a:defRPr sz="4800" spc="-100">
                 <a:solidFill>
                   <a:srgbClr val="FFFFFF"/>
                 </a:solidFill>
@@ -4936,28 +6164,13 @@
               </a:defRPr>
             </a:pPr>
             <a:r>
+              <a:rPr dirty="0"/>
               <a:t>Contract Net </a:t>
             </a:r>
             <a:r>
-              <a:rPr sz="2400"/>
+              <a:rPr sz="2400" dirty="0"/>
               <a:t>(Responders):</a:t>
             </a:r>
-          </a:p>
-          <a:p>
-            <a:pPr>
-              <a:lnSpc>
-                <a:spcPct val="90000"/>
-              </a:lnSpc>
-              <a:defRPr spc="-100" sz="4800">
-                <a:solidFill>
-                  <a:srgbClr val="FFFFFF"/>
-                </a:solidFill>
-                <a:latin typeface="Batang"/>
-                <a:ea typeface="Batang"/>
-                <a:cs typeface="Batang"/>
-                <a:sym typeface="Batang"/>
-              </a:defRPr>
-            </a:pPr>
           </a:p>
           <a:p>
             <a:pPr>
@@ -4975,7 +6188,288 @@
               </a:defRPr>
             </a:pPr>
             <a:r>
-              <a:t>O  Responder Agent que inicia o protocolo envia para os outros Responders um “request”, com a localização da célula afetada e o nº de mortos e feridos. Cada um desses Responders ou responde com uma proposta (distância a que está da célula) ou com uma rejeição por estar ocupado.  O agente inicial avalia as propostas e escolhe a melhor, enviando mensagem de confirmação a um agente e rejeição aos outros. </a:t>
+              <a:rPr dirty="0"/>
+              <a:t>O  Responder Agent que </a:t>
+            </a:r>
+            <a:r>
+              <a:rPr dirty="0" err="1"/>
+              <a:t>inicia</a:t>
+            </a:r>
+            <a:r>
+              <a:rPr dirty="0"/>
+              <a:t> o </a:t>
+            </a:r>
+            <a:r>
+              <a:rPr dirty="0" err="1"/>
+              <a:t>protocolo</a:t>
+            </a:r>
+            <a:r>
+              <a:rPr dirty="0"/>
+              <a:t> </a:t>
+            </a:r>
+            <a:r>
+              <a:rPr dirty="0" err="1"/>
+              <a:t>envia</a:t>
+            </a:r>
+            <a:r>
+              <a:rPr dirty="0"/>
+              <a:t> para </a:t>
+            </a:r>
+            <a:r>
+              <a:rPr dirty="0" err="1"/>
+              <a:t>os</a:t>
+            </a:r>
+            <a:r>
+              <a:rPr dirty="0"/>
+              <a:t> outros Responders um “request”, com a </a:t>
+            </a:r>
+            <a:r>
+              <a:rPr dirty="0" err="1"/>
+              <a:t>localização</a:t>
+            </a:r>
+            <a:r>
+              <a:rPr dirty="0"/>
+              <a:t> da </a:t>
+            </a:r>
+            <a:r>
+              <a:rPr dirty="0" err="1"/>
+              <a:t>célula</a:t>
+            </a:r>
+            <a:r>
+              <a:rPr dirty="0"/>
+              <a:t> </a:t>
+            </a:r>
+            <a:r>
+              <a:rPr dirty="0" err="1"/>
+              <a:t>afetada</a:t>
+            </a:r>
+            <a:r>
+              <a:rPr dirty="0"/>
+              <a:t> e o nº de </a:t>
+            </a:r>
+            <a:r>
+              <a:rPr dirty="0" err="1"/>
+              <a:t>mortos</a:t>
+            </a:r>
+            <a:r>
+              <a:rPr dirty="0"/>
+              <a:t> e </a:t>
+            </a:r>
+            <a:r>
+              <a:rPr dirty="0" err="1"/>
+              <a:t>feridos</a:t>
+            </a:r>
+            <a:r>
+              <a:rPr dirty="0"/>
+              <a:t>. Cada um </a:t>
+            </a:r>
+            <a:r>
+              <a:rPr dirty="0" err="1"/>
+              <a:t>desses</a:t>
+            </a:r>
+            <a:r>
+              <a:rPr dirty="0"/>
+              <a:t> Responders </a:t>
+            </a:r>
+            <a:r>
+              <a:rPr dirty="0" err="1"/>
+              <a:t>ou</a:t>
+            </a:r>
+            <a:r>
+              <a:rPr dirty="0"/>
+              <a:t> </a:t>
+            </a:r>
+            <a:r>
+              <a:rPr dirty="0" err="1"/>
+              <a:t>responde</a:t>
+            </a:r>
+            <a:r>
+              <a:rPr dirty="0"/>
+              <a:t> com </a:t>
+            </a:r>
+            <a:r>
+              <a:rPr dirty="0" err="1"/>
+              <a:t>uma</a:t>
+            </a:r>
+            <a:r>
+              <a:rPr dirty="0"/>
+              <a:t> </a:t>
+            </a:r>
+            <a:r>
+              <a:rPr dirty="0" err="1"/>
+              <a:t>proposta</a:t>
+            </a:r>
+            <a:r>
+              <a:rPr dirty="0"/>
+              <a:t> (</a:t>
+            </a:r>
+            <a:r>
+              <a:rPr dirty="0" err="1"/>
+              <a:t>distância</a:t>
+            </a:r>
+            <a:r>
+              <a:rPr dirty="0"/>
+              <a:t> a que </a:t>
+            </a:r>
+            <a:r>
+              <a:rPr dirty="0" err="1"/>
+              <a:t>está</a:t>
+            </a:r>
+            <a:r>
+              <a:rPr dirty="0"/>
+              <a:t> da </a:t>
+            </a:r>
+            <a:r>
+              <a:rPr dirty="0" err="1"/>
+              <a:t>célula</a:t>
+            </a:r>
+            <a:r>
+              <a:rPr dirty="0"/>
+              <a:t>) </a:t>
+            </a:r>
+            <a:r>
+              <a:rPr dirty="0" err="1"/>
+              <a:t>ou</a:t>
+            </a:r>
+            <a:r>
+              <a:rPr dirty="0"/>
+              <a:t> com </a:t>
+            </a:r>
+            <a:r>
+              <a:rPr dirty="0" err="1"/>
+              <a:t>uma</a:t>
+            </a:r>
+            <a:r>
+              <a:rPr dirty="0"/>
+              <a:t> </a:t>
+            </a:r>
+            <a:r>
+              <a:rPr dirty="0" err="1"/>
+              <a:t>rejeição</a:t>
+            </a:r>
+            <a:r>
+              <a:rPr dirty="0"/>
+              <a:t> </a:t>
+            </a:r>
+            <a:r>
+              <a:rPr dirty="0" err="1"/>
+              <a:t>por</a:t>
+            </a:r>
+            <a:r>
+              <a:rPr dirty="0"/>
+              <a:t> </a:t>
+            </a:r>
+            <a:r>
+              <a:rPr dirty="0" err="1"/>
+              <a:t>estar</a:t>
+            </a:r>
+            <a:r>
+              <a:rPr dirty="0"/>
+              <a:t> </a:t>
+            </a:r>
+            <a:r>
+              <a:rPr dirty="0" err="1"/>
+              <a:t>ocupado</a:t>
+            </a:r>
+            <a:r>
+              <a:rPr dirty="0"/>
+              <a:t>.  O </a:t>
+            </a:r>
+            <a:r>
+              <a:rPr dirty="0" err="1"/>
+              <a:t>agente</a:t>
+            </a:r>
+            <a:r>
+              <a:rPr dirty="0"/>
+              <a:t> </a:t>
+            </a:r>
+            <a:r>
+              <a:rPr dirty="0" err="1"/>
+              <a:t>inicial</a:t>
+            </a:r>
+            <a:r>
+              <a:rPr dirty="0"/>
+              <a:t> </a:t>
+            </a:r>
+            <a:r>
+              <a:rPr dirty="0" err="1"/>
+              <a:t>avalia</a:t>
+            </a:r>
+            <a:r>
+              <a:rPr dirty="0"/>
+              <a:t> as </a:t>
+            </a:r>
+            <a:r>
+              <a:rPr dirty="0" err="1"/>
+              <a:t>propostas</a:t>
+            </a:r>
+            <a:r>
+              <a:rPr dirty="0"/>
+              <a:t> e </a:t>
+            </a:r>
+            <a:r>
+              <a:rPr dirty="0" err="1"/>
+              <a:t>escolhe</a:t>
+            </a:r>
+            <a:r>
+              <a:rPr dirty="0"/>
+              <a:t> a </a:t>
+            </a:r>
+            <a:r>
+              <a:rPr dirty="0" err="1"/>
+              <a:t>melhor</a:t>
+            </a:r>
+            <a:r>
+              <a:rPr dirty="0"/>
+              <a:t>, </a:t>
+            </a:r>
+            <a:r>
+              <a:rPr dirty="0" err="1"/>
+              <a:t>enviando</a:t>
+            </a:r>
+            <a:r>
+              <a:rPr dirty="0"/>
+              <a:t> </a:t>
+            </a:r>
+            <a:r>
+              <a:rPr dirty="0" err="1"/>
+              <a:t>mensagem</a:t>
+            </a:r>
+            <a:r>
+              <a:rPr dirty="0"/>
+              <a:t> de </a:t>
+            </a:r>
+            <a:r>
+              <a:rPr dirty="0" err="1"/>
+              <a:t>confirmação</a:t>
+            </a:r>
+            <a:r>
+              <a:rPr dirty="0"/>
+              <a:t> a um </a:t>
+            </a:r>
+            <a:r>
+              <a:rPr dirty="0" err="1"/>
+              <a:t>agente</a:t>
+            </a:r>
+            <a:r>
+              <a:rPr dirty="0"/>
+              <a:t> e </a:t>
+            </a:r>
+            <a:r>
+              <a:rPr dirty="0" err="1"/>
+              <a:t>rejeição</a:t>
+            </a:r>
+            <a:r>
+              <a:rPr dirty="0"/>
+              <a:t> </a:t>
+            </a:r>
+            <a:r>
+              <a:rPr dirty="0" err="1"/>
+              <a:t>aos</a:t>
+            </a:r>
+            <a:r>
+              <a:rPr dirty="0"/>
+              <a:t> outros. </a:t>
             </a:r>
           </a:p>
         </p:txBody>
@@ -4985,12 +6479,12 @@
   <p:clrMapOvr>
     <a:masterClrMapping/>
   </p:clrMapOvr>
-  <p:transition xmlns:p14="http://schemas.microsoft.com/office/powerpoint/2010/main" spd="med" advClick="1"/>
+  <p:transition spd="med"/>
 </p:sld>
 </file>
 
 <file path=ppt/slides/slide5.xml><?xml version="1.0" encoding="utf-8"?>
-<p:sld xmlns:a="http://schemas.openxmlformats.org/drawingml/2006/main" xmlns:r="http://schemas.openxmlformats.org/officeDocument/2006/relationships" xmlns:p="http://schemas.openxmlformats.org/presentationml/2006/main" xmlns:m="http://schemas.openxmlformats.org/officeDocument/2006/math" xmlns:a14="http://schemas.microsoft.com/office/drawing/2010/main" showMasterSp="1" showMasterPhAnim="1">
+<p:sld xmlns:a="http://schemas.openxmlformats.org/drawingml/2006/main" xmlns:r="http://schemas.openxmlformats.org/officeDocument/2006/relationships" xmlns:p="http://schemas.openxmlformats.org/presentationml/2006/main">
   <p:cSld>
     <p:spTree>
       <p:nvGrpSpPr>
@@ -5038,6 +6532,7 @@
                 </a:solidFill>
               </a:defRPr>
             </a:pPr>
+            <a:endParaRPr/>
           </a:p>
         </p:txBody>
       </p:sp>
@@ -5052,9 +6547,8 @@
         <p:blipFill>
           <a:blip r:embed="rId2">
             <a:alphaModFix amt="60000"/>
-            <a:extLst/>
           </a:blip>
-          <a:srcRect l="0" t="24982" r="0" b="0"/>
+          <a:srcRect t="24982"/>
           <a:stretch>
             <a:fillRect/>
           </a:stretch>
@@ -5075,7 +6569,9 @@
       <p:sp>
         <p:nvSpPr>
           <p:cNvPr id="154" name="Título 1"/>
-          <p:cNvSpPr txBox="1"/>
+          <p:cNvSpPr txBox="1">
+            <a:spLocks noGrp="1"/>
+          </p:cNvSpPr>
           <p:nvPr>
             <p:ph type="ctrTitle"/>
           </p:nvPr>
@@ -5094,7 +6590,7 @@
           <a:lstStyle/>
           <a:p>
             <a:pPr>
-              <a:defRPr spc="-99" sz="4700">
+              <a:defRPr sz="4700" spc="-99">
                 <a:solidFill>
                   <a:srgbClr val="FFFFFF"/>
                 </a:solidFill>
@@ -5106,7 +6602,7 @@
           </a:p>
           <a:p>
             <a:pPr>
-              <a:defRPr spc="-99" sz="4700">
+              <a:defRPr sz="4700" spc="-99">
                 <a:solidFill>
                   <a:srgbClr val="FFFFFF"/>
                 </a:solidFill>
@@ -5114,14 +6610,14 @@
             </a:pPr>
             <a:br/>
             <a:r>
-              <a:rPr spc="-100" sz="1800"/>
+              <a:rPr sz="1800" spc="-100"/>
               <a:t>Existem 12 Shelter Agents espalhados por 3 localizações ao longo do mapa. Depois da catástrofe, só são iniciados os Shelter Agents que não foram afetados pela mesma. Cada Shelter Agent tem um comportamento repetitivo em que inicialmente espera por uma mensagem, que se chegar pode ser de “inform”, “request” ou “confirm”.</a:t>
             </a:r>
             <a:br>
-              <a:rPr spc="-100" sz="1800"/>
+              <a:rPr sz="1800" spc="-100"/>
             </a:br>
             <a:r>
-              <a:rPr spc="-100" sz="1800"/>
+              <a:rPr sz="1800" spc="-100"/>
               <a:t>Se for “inform”, vem de um civil a pedir ajuda e imediatamente inicia um contract net com os outros Shelter Agents que estejam disponíveis, para ver quem está mais próximo do pedido de ajuda. Se for “request” vem de outro Shelter Agent a pedir para socorrer determinada célula, e envia uma proposta onde especifica a sua distância à célula afetada. Se for “confirm” significa que foi escolhido para socorrer determinada célula afetada, pelo que se desloca para lá, socorre as pessoas e torna-se novamente disponível .  Em cada comportamento cíclico são gastos recursos do abrigo de acordo com a sua ocupação atual,, e depois existe uma avaliação da necessidade de mais recursos. Caso sejam necessários, inicia um contract net com os supply agentes nara ver quem lhe pode fornecer mais recursos. Caso esta ajuda chegue, o abrigo é reabastecido, caso contrário os civis ficam desalojados e este agente inicia um novo contract net com os outos shelters para verificar quem pode receber estes civis.</a:t>
             </a:r>
           </a:p>
@@ -5152,7 +6648,7 @@
           <a:bodyPr lIns="45719" rIns="45719"/>
           <a:lstStyle/>
           <a:p>
-            <a:pPr/>
+            <a:endParaRPr/>
           </a:p>
         </p:txBody>
       </p:sp>
@@ -5181,7 +6677,7 @@
           <a:bodyPr lIns="45719" rIns="45719"/>
           <a:lstStyle/>
           <a:p>
-            <a:pPr/>
+            <a:endParaRPr/>
           </a:p>
         </p:txBody>
       </p:sp>
@@ -5210,7 +6706,7 @@
           <a:bodyPr lIns="45719" rIns="45719"/>
           <a:lstStyle/>
           <a:p>
-            <a:pPr/>
+            <a:endParaRPr/>
           </a:p>
         </p:txBody>
       </p:sp>
@@ -5233,13 +6729,13 @@
           </a:ln>
           <a:extLst>
             <a:ext uri="{C572A759-6A51-4108-AA02-DFA0A04FC94B}">
-              <ma14:wrappingTextBoxFlag xmlns:ma14="http://schemas.microsoft.com/office/mac/drawingml/2011/main" val="1"/>
+              <ma14:wrappingTextBoxFlag xmlns:ma14="http://schemas.microsoft.com/office/mac/drawingml/2011/main" xmlns:a14="http://schemas.microsoft.com/office/drawing/2010/main" xmlns:m="http://schemas.openxmlformats.org/officeDocument/2006/math" xmlns="" val="1"/>
             </a:ext>
           </a:extLst>
         </p:spPr>
         <p:txBody>
           <a:bodyPr lIns="45719" rIns="45719">
-            <a:normAutofit fontScale="100000" lnSpcReduction="0"/>
+            <a:normAutofit/>
           </a:bodyPr>
           <a:lstStyle/>
           <a:p>
@@ -5247,7 +6743,7 @@
               <a:lnSpc>
                 <a:spcPct val="90000"/>
               </a:lnSpc>
-              <a:defRPr spc="-99" sz="4752">
+              <a:defRPr sz="4752" spc="-99">
                 <a:solidFill>
                   <a:srgbClr val="FFFFFF"/>
                 </a:solidFill>
@@ -5258,10 +6754,11 @@
               </a:defRPr>
             </a:pPr>
             <a:r>
+              <a:rPr dirty="0"/>
               <a:t>Contract Net </a:t>
             </a:r>
             <a:r>
-              <a:rPr sz="2376"/>
+              <a:rPr sz="2376" dirty="0"/>
               <a:t>(Shelters):</a:t>
             </a:r>
           </a:p>
@@ -5270,7 +6767,7 @@
               <a:lnSpc>
                 <a:spcPct val="90000"/>
               </a:lnSpc>
-              <a:defRPr spc="-99" sz="4752">
+              <a:defRPr sz="1782" spc="-99">
                 <a:solidFill>
                   <a:srgbClr val="FFFFFF"/>
                 </a:solidFill>
@@ -5280,24 +6777,297 @@
                 <a:sym typeface="Batang"/>
               </a:defRPr>
             </a:pPr>
-          </a:p>
-          <a:p>
-            <a:pPr defTabSz="905255">
-              <a:lnSpc>
-                <a:spcPct val="90000"/>
-              </a:lnSpc>
-              <a:defRPr spc="-99" sz="1782">
-                <a:solidFill>
-                  <a:srgbClr val="FFFFFF"/>
-                </a:solidFill>
-                <a:latin typeface="Batang"/>
-                <a:ea typeface="Batang"/>
-                <a:cs typeface="Batang"/>
-                <a:sym typeface="Batang"/>
-              </a:defRPr>
-            </a:pPr>
-            <a:r>
-              <a:t>O Shelter Agent que inicia o protocolo envia para os outros Shelters um “request” com a localização da célula afetada e o nº de civis que necessitam de abrigo. Cada um desses Shelters ou responde com uma proposta (distância a que está da célula) ou com uma rejeição por estar ocupado.  O agente inicial avalia as propostas e escolhe a melhor, enviando mensagem de confirmação a um agente e rejeição aos outros. </a:t>
+            <a:r>
+              <a:rPr dirty="0"/>
+              <a:t>O Shelter Agent que </a:t>
+            </a:r>
+            <a:r>
+              <a:rPr dirty="0" err="1"/>
+              <a:t>inicia</a:t>
+            </a:r>
+            <a:r>
+              <a:rPr dirty="0"/>
+              <a:t> o </a:t>
+            </a:r>
+            <a:r>
+              <a:rPr dirty="0" err="1"/>
+              <a:t>protocolo</a:t>
+            </a:r>
+            <a:r>
+              <a:rPr dirty="0"/>
+              <a:t> </a:t>
+            </a:r>
+            <a:r>
+              <a:rPr dirty="0" err="1"/>
+              <a:t>envia</a:t>
+            </a:r>
+            <a:r>
+              <a:rPr dirty="0"/>
+              <a:t> para </a:t>
+            </a:r>
+            <a:r>
+              <a:rPr dirty="0" err="1"/>
+              <a:t>os</a:t>
+            </a:r>
+            <a:r>
+              <a:rPr dirty="0"/>
+              <a:t> outros Shelters um “request” com a </a:t>
+            </a:r>
+            <a:r>
+              <a:rPr dirty="0" err="1"/>
+              <a:t>localização</a:t>
+            </a:r>
+            <a:r>
+              <a:rPr dirty="0"/>
+              <a:t> da </a:t>
+            </a:r>
+            <a:r>
+              <a:rPr dirty="0" err="1"/>
+              <a:t>célula</a:t>
+            </a:r>
+            <a:r>
+              <a:rPr dirty="0"/>
+              <a:t> </a:t>
+            </a:r>
+            <a:r>
+              <a:rPr dirty="0" err="1"/>
+              <a:t>afetada</a:t>
+            </a:r>
+            <a:r>
+              <a:rPr dirty="0"/>
+              <a:t> e o nº de </a:t>
+            </a:r>
+            <a:r>
+              <a:rPr dirty="0" err="1"/>
+              <a:t>civis</a:t>
+            </a:r>
+            <a:r>
+              <a:rPr dirty="0"/>
+              <a:t> que </a:t>
+            </a:r>
+            <a:r>
+              <a:rPr dirty="0" err="1"/>
+              <a:t>necessitam</a:t>
+            </a:r>
+            <a:r>
+              <a:rPr dirty="0"/>
+              <a:t> de </a:t>
+            </a:r>
+            <a:r>
+              <a:rPr dirty="0" err="1"/>
+              <a:t>abrigo</a:t>
+            </a:r>
+            <a:r>
+              <a:rPr dirty="0"/>
+              <a:t>. Cada um </a:t>
+            </a:r>
+            <a:r>
+              <a:rPr dirty="0" err="1"/>
+              <a:t>desses</a:t>
+            </a:r>
+            <a:r>
+              <a:rPr dirty="0"/>
+              <a:t> Shelters </a:t>
+            </a:r>
+            <a:r>
+              <a:rPr dirty="0" err="1"/>
+              <a:t>ou</a:t>
+            </a:r>
+            <a:r>
+              <a:rPr dirty="0"/>
+              <a:t> </a:t>
+            </a:r>
+            <a:r>
+              <a:rPr dirty="0" err="1"/>
+              <a:t>responde</a:t>
+            </a:r>
+            <a:r>
+              <a:rPr dirty="0"/>
+              <a:t> com </a:t>
+            </a:r>
+            <a:r>
+              <a:rPr dirty="0" err="1"/>
+              <a:t>uma</a:t>
+            </a:r>
+            <a:r>
+              <a:rPr dirty="0"/>
+              <a:t> </a:t>
+            </a:r>
+            <a:r>
+              <a:rPr dirty="0" err="1"/>
+              <a:t>proposta</a:t>
+            </a:r>
+            <a:r>
+              <a:rPr dirty="0"/>
+              <a:t> (</a:t>
+            </a:r>
+            <a:r>
+              <a:rPr dirty="0" err="1"/>
+              <a:t>distância</a:t>
+            </a:r>
+            <a:r>
+              <a:rPr dirty="0"/>
+              <a:t> a que </a:t>
+            </a:r>
+            <a:r>
+              <a:rPr dirty="0" err="1"/>
+              <a:t>está</a:t>
+            </a:r>
+            <a:r>
+              <a:rPr dirty="0"/>
+              <a:t> da </a:t>
+            </a:r>
+            <a:r>
+              <a:rPr dirty="0" err="1"/>
+              <a:t>célula</a:t>
+            </a:r>
+            <a:r>
+              <a:rPr dirty="0"/>
+              <a:t>) </a:t>
+            </a:r>
+            <a:r>
+              <a:rPr dirty="0" err="1"/>
+              <a:t>ou</a:t>
+            </a:r>
+            <a:r>
+              <a:rPr dirty="0"/>
+              <a:t> com </a:t>
+            </a:r>
+            <a:r>
+              <a:rPr dirty="0" err="1"/>
+              <a:t>uma</a:t>
+            </a:r>
+            <a:r>
+              <a:rPr dirty="0"/>
+              <a:t> </a:t>
+            </a:r>
+            <a:r>
+              <a:rPr dirty="0" err="1"/>
+              <a:t>rejeição</a:t>
+            </a:r>
+            <a:r>
+              <a:rPr dirty="0"/>
+              <a:t> </a:t>
+            </a:r>
+            <a:r>
+              <a:rPr dirty="0" err="1"/>
+              <a:t>por</a:t>
+            </a:r>
+            <a:r>
+              <a:rPr dirty="0"/>
+              <a:t> </a:t>
+            </a:r>
+            <a:r>
+              <a:rPr dirty="0" err="1"/>
+              <a:t>estar</a:t>
+            </a:r>
+            <a:r>
+              <a:rPr dirty="0"/>
+              <a:t> </a:t>
+            </a:r>
+            <a:r>
+              <a:rPr dirty="0" err="1"/>
+              <a:t>ocupado</a:t>
+            </a:r>
+            <a:r>
+              <a:rPr dirty="0"/>
+              <a:t>.  O </a:t>
+            </a:r>
+            <a:r>
+              <a:rPr dirty="0" err="1"/>
+              <a:t>agente</a:t>
+            </a:r>
+            <a:r>
+              <a:rPr dirty="0"/>
+              <a:t> </a:t>
+            </a:r>
+            <a:r>
+              <a:rPr dirty="0" err="1"/>
+              <a:t>inicial</a:t>
+            </a:r>
+            <a:r>
+              <a:rPr dirty="0"/>
+              <a:t> </a:t>
+            </a:r>
+            <a:r>
+              <a:rPr dirty="0" err="1"/>
+              <a:t>avalia</a:t>
+            </a:r>
+            <a:r>
+              <a:rPr dirty="0"/>
+              <a:t> as </a:t>
+            </a:r>
+            <a:r>
+              <a:rPr dirty="0" err="1"/>
+              <a:t>propostas</a:t>
+            </a:r>
+            <a:r>
+              <a:rPr dirty="0"/>
+              <a:t> e </a:t>
+            </a:r>
+            <a:r>
+              <a:rPr dirty="0" err="1"/>
+              <a:t>escolhe</a:t>
+            </a:r>
+            <a:r>
+              <a:rPr dirty="0"/>
+              <a:t> a </a:t>
+            </a:r>
+            <a:r>
+              <a:rPr dirty="0" err="1"/>
+              <a:t>melhor</a:t>
+            </a:r>
+            <a:r>
+              <a:rPr dirty="0"/>
+              <a:t>, </a:t>
+            </a:r>
+            <a:r>
+              <a:rPr dirty="0" err="1"/>
+              <a:t>enviando</a:t>
+            </a:r>
+            <a:r>
+              <a:rPr dirty="0"/>
+              <a:t> </a:t>
+            </a:r>
+            <a:r>
+              <a:rPr dirty="0" err="1"/>
+              <a:t>mensagem</a:t>
+            </a:r>
+            <a:r>
+              <a:rPr dirty="0"/>
+              <a:t> de </a:t>
+            </a:r>
+            <a:r>
+              <a:rPr dirty="0" err="1"/>
+              <a:t>confirmação</a:t>
+            </a:r>
+            <a:r>
+              <a:rPr dirty="0"/>
+              <a:t> a um </a:t>
+            </a:r>
+            <a:r>
+              <a:rPr dirty="0" err="1"/>
+              <a:t>agente</a:t>
+            </a:r>
+            <a:r>
+              <a:rPr dirty="0"/>
+              <a:t> e </a:t>
+            </a:r>
+            <a:r>
+              <a:rPr dirty="0" err="1"/>
+              <a:t>rejeição</a:t>
+            </a:r>
+            <a:r>
+              <a:rPr dirty="0"/>
+              <a:t> </a:t>
+            </a:r>
+            <a:r>
+              <a:rPr dirty="0" err="1"/>
+              <a:t>aos</a:t>
+            </a:r>
+            <a:r>
+              <a:rPr dirty="0"/>
+              <a:t> outros. </a:t>
             </a:r>
           </a:p>
         </p:txBody>
@@ -5307,12 +7077,12 @@
   <p:clrMapOvr>
     <a:masterClrMapping/>
   </p:clrMapOvr>
-  <p:transition xmlns:p14="http://schemas.microsoft.com/office/powerpoint/2010/main" spd="med" advClick="1"/>
+  <p:transition spd="med"/>
 </p:sld>
 </file>
 
 <file path=ppt/slides/slide6.xml><?xml version="1.0" encoding="utf-8"?>
-<p:sld xmlns:a="http://schemas.openxmlformats.org/drawingml/2006/main" xmlns:r="http://schemas.openxmlformats.org/officeDocument/2006/relationships" xmlns:p="http://schemas.openxmlformats.org/presentationml/2006/main" xmlns:m="http://schemas.openxmlformats.org/officeDocument/2006/math" xmlns:a14="http://schemas.microsoft.com/office/drawing/2010/main" showMasterSp="1" showMasterPhAnim="1">
+<p:sld xmlns:a="http://schemas.openxmlformats.org/drawingml/2006/main" xmlns:r="http://schemas.openxmlformats.org/officeDocument/2006/relationships" xmlns:p="http://schemas.openxmlformats.org/presentationml/2006/main">
   <p:cSld>
     <p:spTree>
       <p:nvGrpSpPr>
@@ -5360,6 +7130,7 @@
                 </a:solidFill>
               </a:defRPr>
             </a:pPr>
+            <a:endParaRPr/>
           </a:p>
         </p:txBody>
       </p:sp>
@@ -5374,9 +7145,8 @@
         <p:blipFill>
           <a:blip r:embed="rId2">
             <a:alphaModFix amt="60000"/>
-            <a:extLst/>
           </a:blip>
-          <a:srcRect l="0" t="24982" r="0" b="0"/>
+          <a:srcRect t="24982"/>
           <a:stretch>
             <a:fillRect/>
           </a:stretch>
@@ -5397,7 +7167,9 @@
       <p:sp>
         <p:nvSpPr>
           <p:cNvPr id="162" name="Título 1"/>
-          <p:cNvSpPr txBox="1"/>
+          <p:cNvSpPr txBox="1">
+            <a:spLocks noGrp="1"/>
+          </p:cNvSpPr>
           <p:nvPr>
             <p:ph type="ctrTitle"/>
           </p:nvPr>
@@ -5474,7 +7246,7 @@
           <a:bodyPr lIns="45719" rIns="45719"/>
           <a:lstStyle/>
           <a:p>
-            <a:pPr/>
+            <a:endParaRPr/>
           </a:p>
         </p:txBody>
       </p:sp>
@@ -5503,7 +7275,7 @@
           <a:bodyPr lIns="45719" rIns="45719"/>
           <a:lstStyle/>
           <a:p>
-            <a:pPr/>
+            <a:endParaRPr/>
           </a:p>
         </p:txBody>
       </p:sp>
@@ -5532,7 +7304,7 @@
           <a:bodyPr lIns="45719" rIns="45719"/>
           <a:lstStyle/>
           <a:p>
-            <a:pPr/>
+            <a:endParaRPr/>
           </a:p>
         </p:txBody>
       </p:sp>
@@ -5555,13 +7327,13 @@
           </a:ln>
           <a:extLst>
             <a:ext uri="{C572A759-6A51-4108-AA02-DFA0A04FC94B}">
-              <ma14:wrappingTextBoxFlag xmlns:ma14="http://schemas.microsoft.com/office/mac/drawingml/2011/main" val="1"/>
+              <ma14:wrappingTextBoxFlag xmlns:ma14="http://schemas.microsoft.com/office/mac/drawingml/2011/main" xmlns:a14="http://schemas.microsoft.com/office/drawing/2010/main" xmlns:m="http://schemas.openxmlformats.org/officeDocument/2006/math" xmlns="" val="1"/>
             </a:ext>
           </a:extLst>
         </p:spPr>
         <p:txBody>
           <a:bodyPr lIns="45719" rIns="45719">
-            <a:normAutofit fontScale="100000" lnSpcReduction="0"/>
+            <a:normAutofit lnSpcReduction="10000"/>
           </a:bodyPr>
           <a:lstStyle/>
           <a:p>
@@ -5569,7 +7341,7 @@
               <a:lnSpc>
                 <a:spcPct val="90000"/>
               </a:lnSpc>
-              <a:defRPr spc="-99" sz="4752">
+              <a:defRPr sz="4752" spc="-99">
                 <a:solidFill>
                   <a:srgbClr val="FFFFFF"/>
                 </a:solidFill>
@@ -5580,11 +7352,20 @@
               </a:defRPr>
             </a:pPr>
             <a:r>
+              <a:rPr dirty="0"/>
               <a:t>Contract Net </a:t>
             </a:r>
             <a:r>
-              <a:rPr sz="2376"/>
-              <a:t>(Supplys):</a:t>
+              <a:rPr sz="2376" dirty="0"/>
+              <a:t>(</a:t>
+            </a:r>
+            <a:r>
+              <a:rPr sz="2376" dirty="0" err="1"/>
+              <a:t>Supplys</a:t>
+            </a:r>
+            <a:r>
+              <a:rPr sz="2376" dirty="0"/>
+              <a:t>):</a:t>
             </a:r>
           </a:p>
           <a:p>
@@ -5592,7 +7373,7 @@
               <a:lnSpc>
                 <a:spcPct val="90000"/>
               </a:lnSpc>
-              <a:defRPr spc="-99" sz="4752">
+              <a:defRPr sz="1782" spc="-99">
                 <a:solidFill>
                   <a:srgbClr val="FFFFFF"/>
                 </a:solidFill>
@@ -5602,24 +7383,313 @@
                 <a:sym typeface="Batang"/>
               </a:defRPr>
             </a:pPr>
-          </a:p>
-          <a:p>
-            <a:pPr defTabSz="905255">
-              <a:lnSpc>
-                <a:spcPct val="90000"/>
-              </a:lnSpc>
-              <a:defRPr spc="-99" sz="1782">
-                <a:solidFill>
-                  <a:srgbClr val="FFFFFF"/>
-                </a:solidFill>
-                <a:latin typeface="Batang"/>
-                <a:ea typeface="Batang"/>
-                <a:cs typeface="Batang"/>
-                <a:sym typeface="Batang"/>
-              </a:defRPr>
-            </a:pPr>
-            <a:r>
-              <a:t>O Shelter Agent que inicia o protocolo envia para os Supply Vehicle agents um “request” com a localização do abrigo e o nº de recursos de cada tipo (água, comida e medicamentos) necessário. Cada um dos Supplys ou responde com uma proposta (distância a que está da célula) ou com uma rejeição por estar ocupado.  O agente inicial avalia as propostas e escolhe a melhor, enviando mensagem de confirmação a um agente e rejeição aos outros. </a:t>
+            <a:r>
+              <a:rPr dirty="0"/>
+              <a:t>O Shelter Agent que </a:t>
+            </a:r>
+            <a:r>
+              <a:rPr dirty="0" err="1"/>
+              <a:t>inicia</a:t>
+            </a:r>
+            <a:r>
+              <a:rPr dirty="0"/>
+              <a:t> o </a:t>
+            </a:r>
+            <a:r>
+              <a:rPr dirty="0" err="1"/>
+              <a:t>protocolo</a:t>
+            </a:r>
+            <a:r>
+              <a:rPr dirty="0"/>
+              <a:t> </a:t>
+            </a:r>
+            <a:r>
+              <a:rPr dirty="0" err="1"/>
+              <a:t>envia</a:t>
+            </a:r>
+            <a:r>
+              <a:rPr dirty="0"/>
+              <a:t> para </a:t>
+            </a:r>
+            <a:r>
+              <a:rPr dirty="0" err="1"/>
+              <a:t>os</a:t>
+            </a:r>
+            <a:r>
+              <a:rPr dirty="0"/>
+              <a:t> Supply Vehicle agents um “request” com a </a:t>
+            </a:r>
+            <a:r>
+              <a:rPr dirty="0" err="1"/>
+              <a:t>localização</a:t>
+            </a:r>
+            <a:r>
+              <a:rPr dirty="0"/>
+              <a:t> do </a:t>
+            </a:r>
+            <a:r>
+              <a:rPr dirty="0" err="1"/>
+              <a:t>abrigo</a:t>
+            </a:r>
+            <a:r>
+              <a:rPr dirty="0"/>
+              <a:t> e o nº de </a:t>
+            </a:r>
+            <a:r>
+              <a:rPr dirty="0" err="1"/>
+              <a:t>recursos</a:t>
+            </a:r>
+            <a:r>
+              <a:rPr dirty="0"/>
+              <a:t> de </a:t>
+            </a:r>
+            <a:r>
+              <a:rPr dirty="0" err="1"/>
+              <a:t>cada</a:t>
+            </a:r>
+            <a:r>
+              <a:rPr dirty="0"/>
+              <a:t> </a:t>
+            </a:r>
+            <a:r>
+              <a:rPr dirty="0" err="1"/>
+              <a:t>tipo</a:t>
+            </a:r>
+            <a:r>
+              <a:rPr dirty="0"/>
+              <a:t> (</a:t>
+            </a:r>
+            <a:r>
+              <a:rPr dirty="0" err="1"/>
+              <a:t>água</a:t>
+            </a:r>
+            <a:r>
+              <a:rPr dirty="0"/>
+              <a:t>, comida e </a:t>
+            </a:r>
+            <a:r>
+              <a:rPr dirty="0" err="1"/>
+              <a:t>medicamentos</a:t>
+            </a:r>
+            <a:r>
+              <a:rPr dirty="0"/>
+              <a:t>) </a:t>
+            </a:r>
+            <a:r>
+              <a:rPr dirty="0" err="1"/>
+              <a:t>necessário</a:t>
+            </a:r>
+            <a:r>
+              <a:rPr dirty="0"/>
+              <a:t>. Cada um dos </a:t>
+            </a:r>
+            <a:r>
+              <a:rPr dirty="0" err="1"/>
+              <a:t>Supplys</a:t>
+            </a:r>
+            <a:r>
+              <a:rPr dirty="0"/>
+              <a:t> </a:t>
+            </a:r>
+            <a:r>
+              <a:rPr dirty="0" err="1"/>
+              <a:t>ou</a:t>
+            </a:r>
+            <a:r>
+              <a:rPr dirty="0"/>
+              <a:t> </a:t>
+            </a:r>
+            <a:r>
+              <a:rPr dirty="0" err="1"/>
+              <a:t>responde</a:t>
+            </a:r>
+            <a:r>
+              <a:rPr dirty="0"/>
+              <a:t> com </a:t>
+            </a:r>
+            <a:r>
+              <a:rPr dirty="0" err="1"/>
+              <a:t>uma</a:t>
+            </a:r>
+            <a:r>
+              <a:rPr dirty="0"/>
+              <a:t> </a:t>
+            </a:r>
+            <a:r>
+              <a:rPr dirty="0" err="1"/>
+              <a:t>proposta</a:t>
+            </a:r>
+            <a:r>
+              <a:rPr dirty="0"/>
+              <a:t> (</a:t>
+            </a:r>
+            <a:r>
+              <a:rPr dirty="0" err="1"/>
+              <a:t>distância</a:t>
+            </a:r>
+            <a:r>
+              <a:rPr dirty="0"/>
+              <a:t> a que </a:t>
+            </a:r>
+            <a:r>
+              <a:rPr dirty="0" err="1"/>
+              <a:t>está</a:t>
+            </a:r>
+            <a:r>
+              <a:rPr dirty="0"/>
+              <a:t> da </a:t>
+            </a:r>
+            <a:r>
+              <a:rPr dirty="0" err="1"/>
+              <a:t>célula</a:t>
+            </a:r>
+            <a:r>
+              <a:rPr dirty="0"/>
+              <a:t>) </a:t>
+            </a:r>
+            <a:r>
+              <a:rPr dirty="0" err="1"/>
+              <a:t>ou</a:t>
+            </a:r>
+            <a:r>
+              <a:rPr dirty="0"/>
+              <a:t> com </a:t>
+            </a:r>
+            <a:r>
+              <a:rPr dirty="0" err="1"/>
+              <a:t>uma</a:t>
+            </a:r>
+            <a:r>
+              <a:rPr dirty="0"/>
+              <a:t> </a:t>
+            </a:r>
+            <a:r>
+              <a:rPr dirty="0" err="1"/>
+              <a:t>rejeição</a:t>
+            </a:r>
+            <a:r>
+              <a:rPr dirty="0"/>
+              <a:t> </a:t>
+            </a:r>
+            <a:r>
+              <a:rPr dirty="0" err="1"/>
+              <a:t>por</a:t>
+            </a:r>
+            <a:r>
+              <a:rPr dirty="0"/>
+              <a:t> </a:t>
+            </a:r>
+            <a:r>
+              <a:rPr dirty="0" err="1"/>
+              <a:t>estar</a:t>
+            </a:r>
+            <a:r>
+              <a:rPr dirty="0"/>
+              <a:t> </a:t>
+            </a:r>
+            <a:r>
+              <a:rPr dirty="0" err="1"/>
+              <a:t>ocupado</a:t>
+            </a:r>
+            <a:r>
+              <a:rPr dirty="0"/>
+              <a:t>.  O </a:t>
+            </a:r>
+            <a:r>
+              <a:rPr dirty="0" err="1"/>
+              <a:t>agente</a:t>
+            </a:r>
+            <a:r>
+              <a:rPr dirty="0"/>
+              <a:t> </a:t>
+            </a:r>
+            <a:r>
+              <a:rPr dirty="0" err="1"/>
+              <a:t>inicial</a:t>
+            </a:r>
+            <a:r>
+              <a:rPr dirty="0"/>
+              <a:t> </a:t>
+            </a:r>
+            <a:r>
+              <a:rPr dirty="0" err="1"/>
+              <a:t>avalia</a:t>
+            </a:r>
+            <a:r>
+              <a:rPr dirty="0"/>
+              <a:t> as </a:t>
+            </a:r>
+            <a:r>
+              <a:rPr dirty="0" err="1"/>
+              <a:t>propostas</a:t>
+            </a:r>
+            <a:r>
+              <a:rPr dirty="0"/>
+              <a:t> e </a:t>
+            </a:r>
+            <a:r>
+              <a:rPr dirty="0" err="1"/>
+              <a:t>escolhe</a:t>
+            </a:r>
+            <a:r>
+              <a:rPr dirty="0"/>
+              <a:t> a </a:t>
+            </a:r>
+            <a:r>
+              <a:rPr dirty="0" err="1"/>
+              <a:t>melhor</a:t>
+            </a:r>
+            <a:r>
+              <a:rPr dirty="0"/>
+              <a:t>, </a:t>
+            </a:r>
+            <a:r>
+              <a:rPr dirty="0" err="1"/>
+              <a:t>enviando</a:t>
+            </a:r>
+            <a:r>
+              <a:rPr dirty="0"/>
+              <a:t> </a:t>
+            </a:r>
+            <a:r>
+              <a:rPr dirty="0" err="1"/>
+              <a:t>mensagem</a:t>
+            </a:r>
+            <a:r>
+              <a:rPr dirty="0"/>
+              <a:t> de </a:t>
+            </a:r>
+            <a:r>
+              <a:rPr dirty="0" err="1"/>
+              <a:t>confirmação</a:t>
+            </a:r>
+            <a:r>
+              <a:rPr dirty="0"/>
+              <a:t> a um </a:t>
+            </a:r>
+            <a:r>
+              <a:rPr dirty="0" err="1"/>
+              <a:t>agente</a:t>
+            </a:r>
+            <a:r>
+              <a:rPr dirty="0"/>
+              <a:t> e </a:t>
+            </a:r>
+            <a:r>
+              <a:rPr dirty="0" err="1"/>
+              <a:t>rejeição</a:t>
+            </a:r>
+            <a:r>
+              <a:rPr dirty="0"/>
+              <a:t> </a:t>
+            </a:r>
+            <a:r>
+              <a:rPr dirty="0" err="1"/>
+              <a:t>aos</a:t>
+            </a:r>
+            <a:r>
+              <a:rPr dirty="0"/>
+              <a:t> outros. </a:t>
             </a:r>
           </a:p>
         </p:txBody>
@@ -5629,12 +7699,12 @@
   <p:clrMapOvr>
     <a:masterClrMapping/>
   </p:clrMapOvr>
-  <p:transition xmlns:p14="http://schemas.microsoft.com/office/powerpoint/2010/main" spd="med" advClick="1"/>
+  <p:transition spd="med"/>
 </p:sld>
 </file>
 
 <file path=ppt/slides/slide7.xml><?xml version="1.0" encoding="utf-8"?>
-<p:sld xmlns:a="http://schemas.openxmlformats.org/drawingml/2006/main" xmlns:r="http://schemas.openxmlformats.org/officeDocument/2006/relationships" xmlns:p="http://schemas.openxmlformats.org/presentationml/2006/main" xmlns:m="http://schemas.openxmlformats.org/officeDocument/2006/math" xmlns:a14="http://schemas.microsoft.com/office/drawing/2010/main" showMasterSp="1" showMasterPhAnim="1">
+<p:sld xmlns:a="http://schemas.openxmlformats.org/drawingml/2006/main" xmlns:r="http://schemas.openxmlformats.org/officeDocument/2006/relationships" xmlns:p="http://schemas.openxmlformats.org/presentationml/2006/main">
   <p:cSld>
     <p:spTree>
       <p:nvGrpSpPr>
@@ -5682,6 +7752,7 @@
                 </a:solidFill>
               </a:defRPr>
             </a:pPr>
+            <a:endParaRPr/>
           </a:p>
         </p:txBody>
       </p:sp>
@@ -5696,16 +7767,15 @@
         <p:blipFill>
           <a:blip r:embed="rId2">
             <a:alphaModFix amt="60000"/>
-            <a:extLst/>
           </a:blip>
-          <a:srcRect l="0" t="24982" r="0" b="0"/>
+          <a:srcRect t="24982"/>
           <a:stretch>
             <a:fillRect/>
           </a:stretch>
         </p:blipFill>
         <p:spPr>
           <a:xfrm>
-            <a:off x="3047" y="-1"/>
+            <a:off x="-9632" y="35564"/>
             <a:ext cx="12188832" cy="6857900"/>
           </a:xfrm>
           <a:prstGeom prst="rect">
@@ -5719,7 +7789,9 @@
       <p:sp>
         <p:nvSpPr>
           <p:cNvPr id="170" name="Título 1"/>
-          <p:cNvSpPr txBox="1"/>
+          <p:cNvSpPr txBox="1">
+            <a:spLocks noGrp="1"/>
+          </p:cNvSpPr>
           <p:nvPr>
             <p:ph type="ctrTitle"/>
           </p:nvPr>
@@ -5748,6 +7820,7 @@
               <a:t>Simulação Terramoto:</a:t>
             </a:r>
             <a:br/>
+            <a:endParaRPr/>
           </a:p>
         </p:txBody>
       </p:sp>
@@ -5776,7 +7849,7 @@
           <a:bodyPr lIns="45719" rIns="45719"/>
           <a:lstStyle/>
           <a:p>
-            <a:pPr/>
+            <a:endParaRPr/>
           </a:p>
         </p:txBody>
       </p:sp>
@@ -5805,7 +7878,7 @@
           <a:bodyPr lIns="45719" rIns="45719"/>
           <a:lstStyle/>
           <a:p>
-            <a:pPr/>
+            <a:endParaRPr/>
           </a:p>
         </p:txBody>
       </p:sp>
@@ -5834,7 +7907,7 @@
           <a:bodyPr lIns="45719" rIns="45719"/>
           <a:lstStyle/>
           <a:p>
-            <a:pPr/>
+            <a:endParaRPr/>
           </a:p>
         </p:txBody>
       </p:sp>
@@ -5847,16 +7920,14 @@
           <p:nvPr/>
         </p:nvPicPr>
         <p:blipFill>
-          <a:blip r:embed="rId3">
-            <a:extLst/>
-          </a:blip>
+          <a:blip r:embed="rId3"/>
           <a:stretch>
             <a:fillRect/>
           </a:stretch>
         </p:blipFill>
         <p:spPr>
           <a:xfrm>
-            <a:off x="614652" y="2914279"/>
+            <a:off x="341139" y="2890159"/>
             <a:ext cx="5567363" cy="3186113"/>
           </a:xfrm>
           <a:prstGeom prst="rect">
@@ -5876,16 +7947,14 @@
           <p:nvPr/>
         </p:nvPicPr>
         <p:blipFill>
-          <a:blip r:embed="rId4">
-            <a:extLst/>
-          </a:blip>
+          <a:blip r:embed="rId4"/>
           <a:stretch>
             <a:fillRect/>
           </a:stretch>
         </p:blipFill>
         <p:spPr>
           <a:xfrm>
-            <a:off x="5913319" y="1118852"/>
+            <a:off x="5957000" y="1443316"/>
             <a:ext cx="2718223" cy="2401995"/>
           </a:xfrm>
           <a:prstGeom prst="rect">
@@ -5904,8 +7973,8 @@
         </p:nvSpPr>
         <p:spPr>
           <a:xfrm>
-            <a:off x="8999686" y="621339"/>
-            <a:ext cx="3039678" cy="5615322"/>
+            <a:off x="8940188" y="654743"/>
+            <a:ext cx="3239012" cy="5615322"/>
           </a:xfrm>
           <a:prstGeom prst="rect">
             <a:avLst/>
@@ -5915,13 +7984,13 @@
           </a:ln>
           <a:extLst>
             <a:ext uri="{C572A759-6A51-4108-AA02-DFA0A04FC94B}">
-              <ma14:wrappingTextBoxFlag xmlns:ma14="http://schemas.microsoft.com/office/mac/drawingml/2011/main" val="1"/>
+              <ma14:wrappingTextBoxFlag xmlns:ma14="http://schemas.microsoft.com/office/mac/drawingml/2011/main" xmlns:a14="http://schemas.microsoft.com/office/drawing/2010/main" xmlns:m="http://schemas.openxmlformats.org/officeDocument/2006/math" xmlns="" val="1"/>
             </a:ext>
           </a:extLst>
         </p:spPr>
         <p:txBody>
           <a:bodyPr lIns="45719" rIns="45719">
-            <a:normAutofit fontScale="100000" lnSpcReduction="0"/>
+            <a:normAutofit/>
           </a:bodyPr>
           <a:lstStyle/>
           <a:p>
@@ -5929,7 +7998,7 @@
               <a:lnSpc>
                 <a:spcPct val="90000"/>
               </a:lnSpc>
-              <a:defRPr spc="-100" sz="4800">
+              <a:defRPr sz="4800" spc="-100">
                 <a:solidFill>
                   <a:srgbClr val="FFFFFF"/>
                 </a:solidFill>
@@ -5940,24 +8009,13 @@
               </a:defRPr>
             </a:pPr>
             <a:r>
-              <a:t>Conclusões:</a:t>
-            </a:r>
-          </a:p>
-          <a:p>
-            <a:pPr>
-              <a:lnSpc>
-                <a:spcPct val="90000"/>
-              </a:lnSpc>
-              <a:defRPr spc="-100" sz="4800">
-                <a:solidFill>
-                  <a:srgbClr val="FFFFFF"/>
-                </a:solidFill>
-                <a:latin typeface="Batang"/>
-                <a:ea typeface="Batang"/>
-                <a:cs typeface="Batang"/>
-                <a:sym typeface="Batang"/>
-              </a:defRPr>
-            </a:pPr>
+              <a:rPr sz="4400" dirty="0" err="1"/>
+              <a:t>Conclusões</a:t>
+            </a:r>
+            <a:r>
+              <a:rPr sz="4400" dirty="0"/>
+              <a:t>:</a:t>
+            </a:r>
           </a:p>
           <a:p>
             <a:pPr>
@@ -5974,9 +8032,7 @@
                 <a:sym typeface="Batang"/>
               </a:defRPr>
             </a:pPr>
-            <a:r>
-              <a:t>Nesse teste as métricas foram muito positivas. Em 36 horas foi possível resgatar cerca de 88% dos mortos e feridos e abrigar mais de 70% dos civis. </a:t>
-            </a:r>
+            <a:endParaRPr lang="pt-PT" dirty="0"/>
           </a:p>
           <a:p>
             <a:pPr>
@@ -5994,7 +8050,112 @@
               </a:defRPr>
             </a:pPr>
             <a:r>
-              <a:t>Os recursos entregues foram bem utilizados: mais de 90% da comida e água e mais de 80% dos medicamentos.</a:t>
+              <a:rPr dirty="0"/>
+              <a:t>Nesse teste as </a:t>
+            </a:r>
+            <a:r>
+              <a:rPr dirty="0" err="1"/>
+              <a:t>métricas</a:t>
+            </a:r>
+            <a:r>
+              <a:rPr dirty="0"/>
+              <a:t> </a:t>
+            </a:r>
+            <a:r>
+              <a:rPr dirty="0" err="1"/>
+              <a:t>foram</a:t>
+            </a:r>
+            <a:r>
+              <a:rPr dirty="0"/>
+              <a:t> </a:t>
+            </a:r>
+            <a:r>
+              <a:rPr dirty="0" err="1"/>
+              <a:t>muito</a:t>
+            </a:r>
+            <a:r>
+              <a:rPr dirty="0"/>
+              <a:t> </a:t>
+            </a:r>
+            <a:r>
+              <a:rPr dirty="0" err="1"/>
+              <a:t>positivas</a:t>
+            </a:r>
+            <a:r>
+              <a:rPr dirty="0"/>
+              <a:t>. Em 36 horas </a:t>
+            </a:r>
+            <a:r>
+              <a:rPr dirty="0" err="1"/>
+              <a:t>foi</a:t>
+            </a:r>
+            <a:r>
+              <a:rPr dirty="0"/>
+              <a:t> </a:t>
+            </a:r>
+            <a:r>
+              <a:rPr dirty="0" err="1"/>
+              <a:t>possível</a:t>
+            </a:r>
+            <a:r>
+              <a:rPr dirty="0"/>
+              <a:t> </a:t>
+            </a:r>
+            <a:r>
+              <a:rPr dirty="0" err="1"/>
+              <a:t>resgatar</a:t>
+            </a:r>
+            <a:r>
+              <a:rPr dirty="0"/>
+              <a:t> </a:t>
+            </a:r>
+            <a:r>
+              <a:rPr dirty="0" err="1"/>
+              <a:t>cerca</a:t>
+            </a:r>
+            <a:r>
+              <a:rPr dirty="0"/>
+              <a:t> de 88% dos </a:t>
+            </a:r>
+            <a:r>
+              <a:rPr dirty="0" err="1"/>
+              <a:t>mortos</a:t>
+            </a:r>
+            <a:r>
+              <a:rPr dirty="0"/>
+              <a:t> e </a:t>
+            </a:r>
+            <a:r>
+              <a:rPr dirty="0" err="1"/>
+              <a:t>feridos</a:t>
+            </a:r>
+            <a:r>
+              <a:rPr dirty="0"/>
+              <a:t> e </a:t>
+            </a:r>
+            <a:r>
+              <a:rPr dirty="0" err="1"/>
+              <a:t>abrigar</a:t>
+            </a:r>
+            <a:r>
+              <a:rPr dirty="0"/>
+              <a:t> </a:t>
+            </a:r>
+            <a:r>
+              <a:rPr dirty="0" err="1"/>
+              <a:t>mais</a:t>
+            </a:r>
+            <a:r>
+              <a:rPr dirty="0"/>
+              <a:t> de 70% dos </a:t>
+            </a:r>
+            <a:r>
+              <a:rPr dirty="0" err="1"/>
+              <a:t>civis</a:t>
+            </a:r>
+            <a:r>
+              <a:rPr dirty="0"/>
+              <a:t>. </a:t>
             </a:r>
           </a:p>
           <a:p>
@@ -6013,7 +8174,176 @@
               </a:defRPr>
             </a:pPr>
             <a:r>
-              <a:t>O número de recusas foi zero, o que significa que o sistema funcionou quase sem falhas. </a:t>
+              <a:rPr dirty="0" err="1"/>
+              <a:t>Os</a:t>
+            </a:r>
+            <a:r>
+              <a:rPr dirty="0"/>
+              <a:t> </a:t>
+            </a:r>
+            <a:r>
+              <a:rPr dirty="0" err="1"/>
+              <a:t>recursos</a:t>
+            </a:r>
+            <a:r>
+              <a:rPr dirty="0"/>
+              <a:t> </a:t>
+            </a:r>
+            <a:r>
+              <a:rPr dirty="0" err="1"/>
+              <a:t>entregues</a:t>
+            </a:r>
+            <a:r>
+              <a:rPr dirty="0"/>
+              <a:t> </a:t>
+            </a:r>
+            <a:r>
+              <a:rPr dirty="0" err="1"/>
+              <a:t>foram</a:t>
+            </a:r>
+            <a:r>
+              <a:rPr dirty="0"/>
+              <a:t> </a:t>
+            </a:r>
+            <a:r>
+              <a:rPr dirty="0" err="1"/>
+              <a:t>bem</a:t>
+            </a:r>
+            <a:r>
+              <a:rPr dirty="0"/>
+              <a:t> </a:t>
+            </a:r>
+            <a:r>
+              <a:rPr dirty="0" err="1"/>
+              <a:t>utilizados</a:t>
+            </a:r>
+            <a:r>
+              <a:rPr dirty="0"/>
+              <a:t>: </a:t>
+            </a:r>
+            <a:r>
+              <a:rPr dirty="0" err="1"/>
+              <a:t>mais</a:t>
+            </a:r>
+            <a:r>
+              <a:rPr dirty="0"/>
+              <a:t> de 90% da comida e </a:t>
+            </a:r>
+            <a:r>
+              <a:rPr dirty="0" err="1"/>
+              <a:t>água</a:t>
+            </a:r>
+            <a:r>
+              <a:rPr dirty="0"/>
+              <a:t> e </a:t>
+            </a:r>
+            <a:r>
+              <a:rPr dirty="0" err="1"/>
+              <a:t>mais</a:t>
+            </a:r>
+            <a:r>
+              <a:rPr dirty="0"/>
+              <a:t> de 80% dos </a:t>
+            </a:r>
+            <a:r>
+              <a:rPr dirty="0" err="1"/>
+              <a:t>medicamentos</a:t>
+            </a:r>
+            <a:r>
+              <a:rPr dirty="0"/>
+              <a:t>.</a:t>
+            </a:r>
+          </a:p>
+          <a:p>
+            <a:pPr>
+              <a:lnSpc>
+                <a:spcPct val="90000"/>
+              </a:lnSpc>
+              <a:defRPr spc="-100">
+                <a:solidFill>
+                  <a:srgbClr val="FFFFFF"/>
+                </a:solidFill>
+                <a:latin typeface="Batang"/>
+                <a:ea typeface="Batang"/>
+                <a:cs typeface="Batang"/>
+                <a:sym typeface="Batang"/>
+              </a:defRPr>
+            </a:pPr>
+            <a:r>
+              <a:rPr dirty="0"/>
+              <a:t>O </a:t>
+            </a:r>
+            <a:r>
+              <a:rPr dirty="0" err="1"/>
+              <a:t>número</a:t>
+            </a:r>
+            <a:r>
+              <a:rPr dirty="0"/>
+              <a:t> de </a:t>
+            </a:r>
+            <a:r>
+              <a:rPr dirty="0" err="1"/>
+              <a:t>recusas</a:t>
+            </a:r>
+            <a:r>
+              <a:rPr dirty="0"/>
+              <a:t> </a:t>
+            </a:r>
+            <a:r>
+              <a:rPr dirty="0" err="1"/>
+              <a:t>foi</a:t>
+            </a:r>
+            <a:r>
+              <a:rPr dirty="0"/>
+              <a:t> zero, o que </a:t>
+            </a:r>
+            <a:r>
+              <a:rPr dirty="0" err="1"/>
+              <a:t>significa</a:t>
+            </a:r>
+            <a:r>
+              <a:rPr dirty="0"/>
+              <a:t> que o </a:t>
+            </a:r>
+            <a:r>
+              <a:rPr dirty="0" err="1"/>
+              <a:t>sistema</a:t>
+            </a:r>
+            <a:r>
+              <a:rPr dirty="0"/>
+              <a:t> </a:t>
+            </a:r>
+            <a:r>
+              <a:rPr dirty="0" err="1"/>
+              <a:t>funcionou</a:t>
+            </a:r>
+            <a:r>
+              <a:rPr dirty="0"/>
+              <a:t> </a:t>
+            </a:r>
+            <a:r>
+              <a:rPr dirty="0" err="1"/>
+              <a:t>quase</a:t>
+            </a:r>
+            <a:r>
+              <a:rPr dirty="0"/>
+              <a:t> </a:t>
+            </a:r>
+            <a:r>
+              <a:rPr dirty="0" err="1"/>
+              <a:t>sem</a:t>
+            </a:r>
+            <a:r>
+              <a:rPr dirty="0"/>
+              <a:t> </a:t>
+            </a:r>
+            <a:r>
+              <a:rPr dirty="0" err="1"/>
+              <a:t>falhas</a:t>
+            </a:r>
+            <a:r>
+              <a:rPr dirty="0"/>
+              <a:t>. </a:t>
             </a:r>
           </a:p>
         </p:txBody>
@@ -6023,12 +8353,12 @@
   <p:clrMapOvr>
     <a:masterClrMapping/>
   </p:clrMapOvr>
-  <p:transition xmlns:p14="http://schemas.microsoft.com/office/powerpoint/2010/main" spd="med" advClick="1"/>
+  <p:transition spd="med"/>
 </p:sld>
 </file>
 
 <file path=ppt/slides/slide8.xml><?xml version="1.0" encoding="utf-8"?>
-<p:sld xmlns:a="http://schemas.openxmlformats.org/drawingml/2006/main" xmlns:r="http://schemas.openxmlformats.org/officeDocument/2006/relationships" xmlns:p="http://schemas.openxmlformats.org/presentationml/2006/main" xmlns:m="http://schemas.openxmlformats.org/officeDocument/2006/math" xmlns:a14="http://schemas.microsoft.com/office/drawing/2010/main" showMasterSp="1" showMasterPhAnim="1">
+<p:sld xmlns:a="http://schemas.openxmlformats.org/drawingml/2006/main" xmlns:r="http://schemas.openxmlformats.org/officeDocument/2006/relationships" xmlns:p="http://schemas.openxmlformats.org/presentationml/2006/main">
   <p:cSld>
     <p:spTree>
       <p:nvGrpSpPr>
@@ -6076,6 +8406,7 @@
                 </a:solidFill>
               </a:defRPr>
             </a:pPr>
+            <a:endParaRPr/>
           </a:p>
         </p:txBody>
       </p:sp>
@@ -6090,9 +8421,8 @@
         <p:blipFill>
           <a:blip r:embed="rId2">
             <a:alphaModFix amt="60000"/>
-            <a:extLst/>
           </a:blip>
-          <a:srcRect l="0" t="24982" r="0" b="0"/>
+          <a:srcRect t="24982"/>
           <a:stretch>
             <a:fillRect/>
           </a:stretch>
@@ -6113,7 +8443,9 @@
       <p:sp>
         <p:nvSpPr>
           <p:cNvPr id="180" name="Título 1"/>
-          <p:cNvSpPr txBox="1"/>
+          <p:cNvSpPr txBox="1">
+            <a:spLocks noGrp="1"/>
+          </p:cNvSpPr>
           <p:nvPr>
             <p:ph type="ctrTitle"/>
           </p:nvPr>
@@ -6142,6 +8474,7 @@
               <a:t>Simulação Tsunami:</a:t>
             </a:r>
             <a:br/>
+            <a:endParaRPr/>
           </a:p>
         </p:txBody>
       </p:sp>
@@ -6170,7 +8503,7 @@
           <a:bodyPr lIns="45719" rIns="45719"/>
           <a:lstStyle/>
           <a:p>
-            <a:pPr/>
+            <a:endParaRPr/>
           </a:p>
         </p:txBody>
       </p:sp>
@@ -6199,7 +8532,7 @@
           <a:bodyPr lIns="45719" rIns="45719"/>
           <a:lstStyle/>
           <a:p>
-            <a:pPr/>
+            <a:endParaRPr/>
           </a:p>
         </p:txBody>
       </p:sp>
@@ -6228,7 +8561,7 @@
           <a:bodyPr lIns="45719" rIns="45719"/>
           <a:lstStyle/>
           <a:p>
-            <a:pPr/>
+            <a:endParaRPr/>
           </a:p>
         </p:txBody>
       </p:sp>
@@ -6241,16 +8574,14 @@
           <p:nvPr/>
         </p:nvPicPr>
         <p:blipFill>
-          <a:blip r:embed="rId3">
-            <a:extLst/>
-          </a:blip>
+          <a:blip r:embed="rId3"/>
           <a:stretch>
             <a:fillRect/>
           </a:stretch>
         </p:blipFill>
         <p:spPr>
           <a:xfrm>
-            <a:off x="634046" y="2928090"/>
+            <a:off x="407723" y="2963919"/>
             <a:ext cx="5560993" cy="3210081"/>
           </a:xfrm>
           <a:prstGeom prst="rect">
@@ -6270,16 +8601,14 @@
           <p:nvPr/>
         </p:nvPicPr>
         <p:blipFill>
-          <a:blip r:embed="rId4">
-            <a:extLst/>
-          </a:blip>
+          <a:blip r:embed="rId4"/>
           <a:stretch>
             <a:fillRect/>
           </a:stretch>
         </p:blipFill>
         <p:spPr>
           <a:xfrm>
-            <a:off x="5840182" y="819992"/>
+            <a:off x="5881776" y="1527915"/>
             <a:ext cx="2829826" cy="2481430"/>
           </a:xfrm>
           <a:prstGeom prst="rect">
@@ -6298,8 +8627,8 @@
         </p:nvSpPr>
         <p:spPr>
           <a:xfrm>
-            <a:off x="8999686" y="656853"/>
-            <a:ext cx="3039678" cy="5615321"/>
+            <a:off x="8939956" y="642527"/>
+            <a:ext cx="3189267" cy="5615321"/>
           </a:xfrm>
           <a:prstGeom prst="rect">
             <a:avLst/>
@@ -6309,13 +8638,13 @@
           </a:ln>
           <a:extLst>
             <a:ext uri="{C572A759-6A51-4108-AA02-DFA0A04FC94B}">
-              <ma14:wrappingTextBoxFlag xmlns:ma14="http://schemas.microsoft.com/office/mac/drawingml/2011/main" val="1"/>
+              <ma14:wrappingTextBoxFlag xmlns:ma14="http://schemas.microsoft.com/office/mac/drawingml/2011/main" xmlns:a14="http://schemas.microsoft.com/office/drawing/2010/main" xmlns:m="http://schemas.openxmlformats.org/officeDocument/2006/math" xmlns="" val="1"/>
             </a:ext>
           </a:extLst>
         </p:spPr>
         <p:txBody>
           <a:bodyPr lIns="45719" rIns="45719">
-            <a:normAutofit fontScale="100000" lnSpcReduction="0"/>
+            <a:normAutofit/>
           </a:bodyPr>
           <a:lstStyle/>
           <a:p>
@@ -6323,7 +8652,7 @@
               <a:lnSpc>
                 <a:spcPct val="90000"/>
               </a:lnSpc>
-              <a:defRPr spc="-100" sz="4800">
+              <a:defRPr sz="4800" spc="-100">
                 <a:solidFill>
                   <a:srgbClr val="FFFFFF"/>
                 </a:solidFill>
@@ -6334,24 +8663,13 @@
               </a:defRPr>
             </a:pPr>
             <a:r>
-              <a:t>Conclusões:</a:t>
-            </a:r>
-          </a:p>
-          <a:p>
-            <a:pPr>
-              <a:lnSpc>
-                <a:spcPct val="90000"/>
-              </a:lnSpc>
-              <a:defRPr spc="-100" sz="4800">
-                <a:solidFill>
-                  <a:srgbClr val="FFFFFF"/>
-                </a:solidFill>
-                <a:latin typeface="Batang"/>
-                <a:ea typeface="Batang"/>
-                <a:cs typeface="Batang"/>
-                <a:sym typeface="Batang"/>
-              </a:defRPr>
-            </a:pPr>
+              <a:rPr sz="4400" dirty="0" err="1"/>
+              <a:t>Conclusões</a:t>
+            </a:r>
+            <a:r>
+              <a:rPr sz="4400" dirty="0"/>
+              <a:t>:</a:t>
+            </a:r>
           </a:p>
           <a:p>
             <a:pPr>
@@ -6368,9 +8686,7 @@
                 <a:sym typeface="Batang"/>
               </a:defRPr>
             </a:pPr>
-            <a:r>
-              <a:t>Nesse teste as métricas foram positivas. Em 36 horas foi possível resgatar cerca de 75% dos mortos e feridos e abrigar mais de 80% dos civis. </a:t>
-            </a:r>
+            <a:endParaRPr lang="pt-PT" dirty="0"/>
           </a:p>
           <a:p>
             <a:pPr>
@@ -6388,7 +8704,104 @@
               </a:defRPr>
             </a:pPr>
             <a:r>
-              <a:t>Os recursos entregues foram bem utilizados: mais de 90% da comida e água e mais de 80% dos medicamentos.</a:t>
+              <a:rPr dirty="0"/>
+              <a:t>Nesse teste as </a:t>
+            </a:r>
+            <a:r>
+              <a:rPr dirty="0" err="1"/>
+              <a:t>métricas</a:t>
+            </a:r>
+            <a:r>
+              <a:rPr dirty="0"/>
+              <a:t> </a:t>
+            </a:r>
+            <a:r>
+              <a:rPr dirty="0" err="1"/>
+              <a:t>foram</a:t>
+            </a:r>
+            <a:r>
+              <a:rPr dirty="0"/>
+              <a:t> </a:t>
+            </a:r>
+            <a:r>
+              <a:rPr dirty="0" err="1"/>
+              <a:t>positivas</a:t>
+            </a:r>
+            <a:r>
+              <a:rPr dirty="0"/>
+              <a:t>. Em 36 horas </a:t>
+            </a:r>
+            <a:r>
+              <a:rPr dirty="0" err="1"/>
+              <a:t>foi</a:t>
+            </a:r>
+            <a:r>
+              <a:rPr dirty="0"/>
+              <a:t> </a:t>
+            </a:r>
+            <a:r>
+              <a:rPr dirty="0" err="1"/>
+              <a:t>possível</a:t>
+            </a:r>
+            <a:r>
+              <a:rPr dirty="0"/>
+              <a:t> </a:t>
+            </a:r>
+            <a:r>
+              <a:rPr dirty="0" err="1"/>
+              <a:t>resgatar</a:t>
+            </a:r>
+            <a:r>
+              <a:rPr dirty="0"/>
+              <a:t> </a:t>
+            </a:r>
+            <a:r>
+              <a:rPr dirty="0" err="1"/>
+              <a:t>cerca</a:t>
+            </a:r>
+            <a:r>
+              <a:rPr dirty="0"/>
+              <a:t> de 75% dos </a:t>
+            </a:r>
+            <a:r>
+              <a:rPr dirty="0" err="1"/>
+              <a:t>mortos</a:t>
+            </a:r>
+            <a:r>
+              <a:rPr dirty="0"/>
+              <a:t> e </a:t>
+            </a:r>
+            <a:r>
+              <a:rPr dirty="0" err="1"/>
+              <a:t>feridos</a:t>
+            </a:r>
+            <a:r>
+              <a:rPr dirty="0"/>
+              <a:t> e </a:t>
+            </a:r>
+            <a:r>
+              <a:rPr dirty="0" err="1"/>
+              <a:t>abrigar</a:t>
+            </a:r>
+            <a:r>
+              <a:rPr dirty="0"/>
+              <a:t> </a:t>
+            </a:r>
+            <a:r>
+              <a:rPr dirty="0" err="1"/>
+              <a:t>mais</a:t>
+            </a:r>
+            <a:r>
+              <a:rPr dirty="0"/>
+              <a:t> de 80% dos </a:t>
+            </a:r>
+            <a:r>
+              <a:rPr dirty="0" err="1"/>
+              <a:t>civis</a:t>
+            </a:r>
+            <a:r>
+              <a:rPr dirty="0"/>
+              <a:t>. </a:t>
             </a:r>
           </a:p>
           <a:p>
@@ -6407,7 +8820,168 @@
               </a:defRPr>
             </a:pPr>
             <a:r>
-              <a:t>O número de recusas foi 2, o que significa que o sistema funcionou com poucas falhas. </a:t>
+              <a:rPr dirty="0" err="1"/>
+              <a:t>Os</a:t>
+            </a:r>
+            <a:r>
+              <a:rPr dirty="0"/>
+              <a:t> </a:t>
+            </a:r>
+            <a:r>
+              <a:rPr dirty="0" err="1"/>
+              <a:t>recursos</a:t>
+            </a:r>
+            <a:r>
+              <a:rPr dirty="0"/>
+              <a:t> </a:t>
+            </a:r>
+            <a:r>
+              <a:rPr dirty="0" err="1"/>
+              <a:t>entregues</a:t>
+            </a:r>
+            <a:r>
+              <a:rPr dirty="0"/>
+              <a:t> </a:t>
+            </a:r>
+            <a:r>
+              <a:rPr dirty="0" err="1"/>
+              <a:t>foram</a:t>
+            </a:r>
+            <a:r>
+              <a:rPr dirty="0"/>
+              <a:t> </a:t>
+            </a:r>
+            <a:r>
+              <a:rPr dirty="0" err="1"/>
+              <a:t>bem</a:t>
+            </a:r>
+            <a:r>
+              <a:rPr dirty="0"/>
+              <a:t> </a:t>
+            </a:r>
+            <a:r>
+              <a:rPr dirty="0" err="1"/>
+              <a:t>utilizados</a:t>
+            </a:r>
+            <a:r>
+              <a:rPr dirty="0"/>
+              <a:t>: </a:t>
+            </a:r>
+            <a:r>
+              <a:rPr dirty="0" err="1"/>
+              <a:t>mais</a:t>
+            </a:r>
+            <a:r>
+              <a:rPr dirty="0"/>
+              <a:t> de 90% da comida e </a:t>
+            </a:r>
+            <a:r>
+              <a:rPr dirty="0" err="1"/>
+              <a:t>água</a:t>
+            </a:r>
+            <a:r>
+              <a:rPr dirty="0"/>
+              <a:t> e </a:t>
+            </a:r>
+            <a:r>
+              <a:rPr dirty="0" err="1"/>
+              <a:t>mais</a:t>
+            </a:r>
+            <a:r>
+              <a:rPr dirty="0"/>
+              <a:t> de 80% dos </a:t>
+            </a:r>
+            <a:r>
+              <a:rPr dirty="0" err="1"/>
+              <a:t>medicamentos</a:t>
+            </a:r>
+            <a:r>
+              <a:rPr dirty="0"/>
+              <a:t>.</a:t>
+            </a:r>
+          </a:p>
+          <a:p>
+            <a:pPr>
+              <a:lnSpc>
+                <a:spcPct val="90000"/>
+              </a:lnSpc>
+              <a:defRPr spc="-100">
+                <a:solidFill>
+                  <a:srgbClr val="FFFFFF"/>
+                </a:solidFill>
+                <a:latin typeface="Batang"/>
+                <a:ea typeface="Batang"/>
+                <a:cs typeface="Batang"/>
+                <a:sym typeface="Batang"/>
+              </a:defRPr>
+            </a:pPr>
+            <a:r>
+              <a:rPr dirty="0"/>
+              <a:t>O </a:t>
+            </a:r>
+            <a:r>
+              <a:rPr dirty="0" err="1"/>
+              <a:t>número</a:t>
+            </a:r>
+            <a:r>
+              <a:rPr dirty="0"/>
+              <a:t> de </a:t>
+            </a:r>
+            <a:r>
+              <a:rPr dirty="0" err="1"/>
+              <a:t>recusas</a:t>
+            </a:r>
+            <a:r>
+              <a:rPr dirty="0"/>
+              <a:t> </a:t>
+            </a:r>
+            <a:r>
+              <a:rPr dirty="0" err="1"/>
+              <a:t>foi</a:t>
+            </a:r>
+            <a:r>
+              <a:rPr dirty="0"/>
+              <a:t> 2, o que </a:t>
+            </a:r>
+            <a:r>
+              <a:rPr dirty="0" err="1"/>
+              <a:t>significa</a:t>
+            </a:r>
+            <a:r>
+              <a:rPr dirty="0"/>
+              <a:t> que o </a:t>
+            </a:r>
+            <a:r>
+              <a:rPr dirty="0" err="1"/>
+              <a:t>sistema</a:t>
+            </a:r>
+            <a:r>
+              <a:rPr dirty="0"/>
+              <a:t> </a:t>
+            </a:r>
+            <a:r>
+              <a:rPr dirty="0" err="1"/>
+              <a:t>funcionou</a:t>
+            </a:r>
+            <a:r>
+              <a:rPr dirty="0"/>
+              <a:t> com </a:t>
+            </a:r>
+            <a:r>
+              <a:rPr dirty="0" err="1"/>
+              <a:t>poucas</a:t>
+            </a:r>
+            <a:r>
+              <a:rPr dirty="0"/>
+              <a:t> </a:t>
+            </a:r>
+            <a:r>
+              <a:rPr dirty="0" err="1"/>
+              <a:t>falhas</a:t>
+            </a:r>
+            <a:r>
+              <a:rPr dirty="0"/>
+              <a:t>. </a:t>
             </a:r>
           </a:p>
         </p:txBody>
@@ -6417,12 +8991,12 @@
   <p:clrMapOvr>
     <a:masterClrMapping/>
   </p:clrMapOvr>
-  <p:transition xmlns:p14="http://schemas.microsoft.com/office/powerpoint/2010/main" spd="med" advClick="1"/>
+  <p:transition spd="med"/>
 </p:sld>
 </file>
 
 <file path=ppt/slides/slide9.xml><?xml version="1.0" encoding="utf-8"?>
-<p:sld xmlns:a="http://schemas.openxmlformats.org/drawingml/2006/main" xmlns:r="http://schemas.openxmlformats.org/officeDocument/2006/relationships" xmlns:p="http://schemas.openxmlformats.org/presentationml/2006/main" xmlns:m="http://schemas.openxmlformats.org/officeDocument/2006/math" xmlns:a14="http://schemas.microsoft.com/office/drawing/2010/main" showMasterSp="1" showMasterPhAnim="1">
+<p:sld xmlns:a="http://schemas.openxmlformats.org/drawingml/2006/main" xmlns:r="http://schemas.openxmlformats.org/officeDocument/2006/relationships" xmlns:p="http://schemas.openxmlformats.org/presentationml/2006/main">
   <p:cSld>
     <p:spTree>
       <p:nvGrpSpPr>
@@ -6470,6 +9044,7 @@
                 </a:solidFill>
               </a:defRPr>
             </a:pPr>
+            <a:endParaRPr/>
           </a:p>
         </p:txBody>
       </p:sp>
@@ -6484,9 +9059,8 @@
         <p:blipFill>
           <a:blip r:embed="rId2">
             <a:alphaModFix amt="60000"/>
-            <a:extLst/>
           </a:blip>
-          <a:srcRect l="0" t="24982" r="0" b="0"/>
+          <a:srcRect t="24982"/>
           <a:stretch>
             <a:fillRect/>
           </a:stretch>
@@ -6507,7 +9081,9 @@
       <p:sp>
         <p:nvSpPr>
           <p:cNvPr id="190" name="Título 1"/>
-          <p:cNvSpPr txBox="1"/>
+          <p:cNvSpPr txBox="1">
+            <a:spLocks noGrp="1"/>
+          </p:cNvSpPr>
           <p:nvPr>
             <p:ph type="ctrTitle"/>
           </p:nvPr>
@@ -6536,6 +9112,7 @@
               <a:t>Simulação Terramoto + Tsunami:</a:t>
             </a:r>
             <a:br/>
+            <a:endParaRPr/>
           </a:p>
         </p:txBody>
       </p:sp>
@@ -6564,7 +9141,7 @@
           <a:bodyPr lIns="45719" rIns="45719"/>
           <a:lstStyle/>
           <a:p>
-            <a:pPr/>
+            <a:endParaRPr/>
           </a:p>
         </p:txBody>
       </p:sp>
@@ -6593,7 +9170,7 @@
           <a:bodyPr lIns="45719" rIns="45719"/>
           <a:lstStyle/>
           <a:p>
-            <a:pPr/>
+            <a:endParaRPr/>
           </a:p>
         </p:txBody>
       </p:sp>
@@ -6622,7 +9199,7 @@
           <a:bodyPr lIns="45719" rIns="45719"/>
           <a:lstStyle/>
           <a:p>
-            <a:pPr/>
+            <a:endParaRPr/>
           </a:p>
         </p:txBody>
       </p:sp>
@@ -6645,13 +9222,13 @@
           </a:ln>
           <a:extLst>
             <a:ext uri="{C572A759-6A51-4108-AA02-DFA0A04FC94B}">
-              <ma14:wrappingTextBoxFlag xmlns:ma14="http://schemas.microsoft.com/office/mac/drawingml/2011/main" val="1"/>
+              <ma14:wrappingTextBoxFlag xmlns:ma14="http://schemas.microsoft.com/office/mac/drawingml/2011/main" xmlns:a14="http://schemas.microsoft.com/office/drawing/2010/main" xmlns:m="http://schemas.openxmlformats.org/officeDocument/2006/math" xmlns="" val="1"/>
             </a:ext>
           </a:extLst>
         </p:spPr>
         <p:txBody>
           <a:bodyPr lIns="45719" rIns="45719">
-            <a:normAutofit fontScale="100000" lnSpcReduction="0"/>
+            <a:normAutofit/>
           </a:bodyPr>
           <a:lstStyle/>
           <a:p>
@@ -6659,7 +9236,7 @@
               <a:lnSpc>
                 <a:spcPct val="90000"/>
               </a:lnSpc>
-              <a:defRPr spc="-100" sz="4400">
+              <a:defRPr sz="4400" spc="-100">
                 <a:solidFill>
                   <a:srgbClr val="FFFFFF"/>
                 </a:solidFill>
@@ -6670,7 +9247,12 @@
               </a:defRPr>
             </a:pPr>
             <a:r>
-              <a:t>Conclusões:</a:t>
+              <a:rPr dirty="0" err="1"/>
+              <a:t>Conclusões</a:t>
+            </a:r>
+            <a:r>
+              <a:rPr dirty="0"/>
+              <a:t>:</a:t>
             </a:r>
           </a:p>
           <a:p>
@@ -6678,7 +9260,7 @@
               <a:lnSpc>
                 <a:spcPct val="90000"/>
               </a:lnSpc>
-              <a:defRPr spc="-100" sz="4400">
+              <a:defRPr sz="4400" spc="-100">
                 <a:solidFill>
                   <a:srgbClr val="FFFFFF"/>
                 </a:solidFill>
@@ -6688,7 +9270,7 @@
                 <a:sym typeface="Batang"/>
               </a:defRPr>
             </a:pPr>
-            <a:endParaRPr sz="4800"/>
+            <a:endParaRPr sz="4800" dirty="0"/>
           </a:p>
           <a:p>
             <a:pPr>
@@ -6706,9 +9288,285 @@
               </a:defRPr>
             </a:pPr>
             <a:r>
-              <a:t>Neste teste as métricas foram medianas. Em 36 horas foi possível resgatar cerca de 55% dos mortos e feridos e abrigar apenas 34% dos civis, o que não são boas indicações. No entanto, os recursos entregues foram bem utilizados (mais de 90% da comida e água e mais de 80% dos medicamentos) e o número de recusas foi zero, o que significa que o sistema funcionou com poucas falhas.</a:t>
-            </a:r>
-            <a:br/>
+              <a:rPr dirty="0"/>
+              <a:t>Neste teste as </a:t>
+            </a:r>
+            <a:r>
+              <a:rPr dirty="0" err="1"/>
+              <a:t>métricas</a:t>
+            </a:r>
+            <a:r>
+              <a:rPr dirty="0"/>
+              <a:t> </a:t>
+            </a:r>
+            <a:r>
+              <a:rPr dirty="0" err="1"/>
+              <a:t>foram</a:t>
+            </a:r>
+            <a:r>
+              <a:rPr dirty="0"/>
+              <a:t> </a:t>
+            </a:r>
+            <a:r>
+              <a:rPr dirty="0" err="1"/>
+              <a:t>medianas</a:t>
+            </a:r>
+            <a:r>
+              <a:rPr dirty="0"/>
+              <a:t>. Em 36 horas </a:t>
+            </a:r>
+            <a:r>
+              <a:rPr dirty="0" err="1"/>
+              <a:t>foi</a:t>
+            </a:r>
+            <a:r>
+              <a:rPr dirty="0"/>
+              <a:t> </a:t>
+            </a:r>
+            <a:r>
+              <a:rPr dirty="0" err="1"/>
+              <a:t>possível</a:t>
+            </a:r>
+            <a:r>
+              <a:rPr dirty="0"/>
+              <a:t> </a:t>
+            </a:r>
+            <a:r>
+              <a:rPr dirty="0" err="1"/>
+              <a:t>resgatar</a:t>
+            </a:r>
+            <a:r>
+              <a:rPr dirty="0"/>
+              <a:t> </a:t>
+            </a:r>
+            <a:r>
+              <a:rPr dirty="0" err="1"/>
+              <a:t>cerca</a:t>
+            </a:r>
+            <a:r>
+              <a:rPr dirty="0"/>
+              <a:t> de 55% dos </a:t>
+            </a:r>
+            <a:r>
+              <a:rPr dirty="0" err="1"/>
+              <a:t>mortos</a:t>
+            </a:r>
+            <a:r>
+              <a:rPr dirty="0"/>
+              <a:t> e </a:t>
+            </a:r>
+            <a:r>
+              <a:rPr dirty="0" err="1"/>
+              <a:t>feridos</a:t>
+            </a:r>
+            <a:r>
+              <a:rPr dirty="0"/>
+              <a:t> e </a:t>
+            </a:r>
+            <a:r>
+              <a:rPr dirty="0" err="1"/>
+              <a:t>abrigar</a:t>
+            </a:r>
+            <a:r>
+              <a:rPr dirty="0"/>
+              <a:t> </a:t>
+            </a:r>
+            <a:r>
+              <a:rPr dirty="0" err="1"/>
+              <a:t>apenas</a:t>
+            </a:r>
+            <a:r>
+              <a:rPr dirty="0"/>
+              <a:t> 34% dos </a:t>
+            </a:r>
+            <a:r>
+              <a:rPr dirty="0" err="1"/>
+              <a:t>civis</a:t>
+            </a:r>
+            <a:r>
+              <a:rPr dirty="0"/>
+              <a:t>, o que </a:t>
+            </a:r>
+            <a:r>
+              <a:rPr dirty="0" err="1"/>
+              <a:t>não</a:t>
+            </a:r>
+            <a:r>
+              <a:rPr dirty="0"/>
+              <a:t> </a:t>
+            </a:r>
+            <a:r>
+              <a:rPr dirty="0" err="1"/>
+              <a:t>são</a:t>
+            </a:r>
+            <a:r>
+              <a:rPr dirty="0"/>
+              <a:t> boas </a:t>
+            </a:r>
+            <a:r>
+              <a:rPr dirty="0" err="1"/>
+              <a:t>indicações</a:t>
+            </a:r>
+            <a:r>
+              <a:rPr dirty="0"/>
+              <a:t>. No </a:t>
+            </a:r>
+            <a:r>
+              <a:rPr dirty="0" err="1"/>
+              <a:t>entanto</a:t>
+            </a:r>
+            <a:r>
+              <a:rPr dirty="0"/>
+              <a:t>, </a:t>
+            </a:r>
+            <a:r>
+              <a:rPr dirty="0" err="1"/>
+              <a:t>os</a:t>
+            </a:r>
+            <a:r>
+              <a:rPr dirty="0"/>
+              <a:t> </a:t>
+            </a:r>
+            <a:r>
+              <a:rPr dirty="0" err="1"/>
+              <a:t>recursos</a:t>
+            </a:r>
+            <a:r>
+              <a:rPr dirty="0"/>
+              <a:t> </a:t>
+            </a:r>
+            <a:r>
+              <a:rPr dirty="0" err="1"/>
+              <a:t>entregues</a:t>
+            </a:r>
+            <a:r>
+              <a:rPr dirty="0"/>
+              <a:t> </a:t>
+            </a:r>
+            <a:r>
+              <a:rPr dirty="0" err="1"/>
+              <a:t>foram</a:t>
+            </a:r>
+            <a:r>
+              <a:rPr dirty="0"/>
+              <a:t> </a:t>
+            </a:r>
+            <a:r>
+              <a:rPr dirty="0" err="1"/>
+              <a:t>bem</a:t>
+            </a:r>
+            <a:r>
+              <a:rPr dirty="0"/>
+              <a:t> </a:t>
+            </a:r>
+            <a:r>
+              <a:rPr dirty="0" err="1"/>
+              <a:t>utilizados</a:t>
+            </a:r>
+            <a:r>
+              <a:rPr dirty="0"/>
+              <a:t> (</a:t>
+            </a:r>
+            <a:r>
+              <a:rPr dirty="0" err="1"/>
+              <a:t>mais</a:t>
+            </a:r>
+            <a:r>
+              <a:rPr dirty="0"/>
+              <a:t> de 90% da comida e </a:t>
+            </a:r>
+            <a:r>
+              <a:rPr dirty="0" err="1"/>
+              <a:t>água</a:t>
+            </a:r>
+            <a:r>
+              <a:rPr dirty="0"/>
+              <a:t> e </a:t>
+            </a:r>
+            <a:r>
+              <a:rPr dirty="0" err="1"/>
+              <a:t>mais</a:t>
+            </a:r>
+            <a:r>
+              <a:rPr dirty="0"/>
+              <a:t> de 80% dos </a:t>
+            </a:r>
+            <a:r>
+              <a:rPr dirty="0" err="1"/>
+              <a:t>medicamentos</a:t>
+            </a:r>
+            <a:r>
+              <a:rPr dirty="0"/>
+              <a:t>) e o </a:t>
+            </a:r>
+            <a:r>
+              <a:rPr dirty="0" err="1"/>
+              <a:t>número</a:t>
+            </a:r>
+            <a:r>
+              <a:rPr dirty="0"/>
+              <a:t> de </a:t>
+            </a:r>
+            <a:r>
+              <a:rPr dirty="0" err="1"/>
+              <a:t>recusas</a:t>
+            </a:r>
+            <a:r>
+              <a:rPr dirty="0"/>
+              <a:t> </a:t>
+            </a:r>
+            <a:r>
+              <a:rPr dirty="0" err="1"/>
+              <a:t>foi</a:t>
+            </a:r>
+            <a:r>
+              <a:rPr dirty="0"/>
+              <a:t> zero, o que </a:t>
+            </a:r>
+            <a:r>
+              <a:rPr dirty="0" err="1"/>
+              <a:t>significa</a:t>
+            </a:r>
+            <a:r>
+              <a:rPr dirty="0"/>
+              <a:t> que o </a:t>
+            </a:r>
+            <a:r>
+              <a:rPr dirty="0" err="1"/>
+              <a:t>sistema</a:t>
+            </a:r>
+            <a:r>
+              <a:rPr dirty="0"/>
+              <a:t> </a:t>
+            </a:r>
+            <a:r>
+              <a:rPr dirty="0" err="1"/>
+              <a:t>funcionou</a:t>
+            </a:r>
+            <a:r>
+              <a:rPr dirty="0"/>
+              <a:t> com </a:t>
+            </a:r>
+            <a:r>
+              <a:rPr dirty="0" err="1"/>
+              <a:t>poucas</a:t>
+            </a:r>
+            <a:r>
+              <a:rPr dirty="0"/>
+              <a:t> </a:t>
+            </a:r>
+            <a:r>
+              <a:rPr dirty="0" err="1"/>
+              <a:t>falhas</a:t>
+            </a:r>
+            <a:r>
+              <a:rPr dirty="0"/>
+              <a:t>.</a:t>
+            </a:r>
+            <a:br>
+              <a:rPr dirty="0"/>
+            </a:br>
+            <a:endParaRPr dirty="0"/>
           </a:p>
         </p:txBody>
       </p:sp>
@@ -6721,9 +9579,7 @@
           <p:nvPr/>
         </p:nvPicPr>
         <p:blipFill>
-          <a:blip r:embed="rId3">
-            <a:extLst/>
-          </a:blip>
+          <a:blip r:embed="rId3"/>
           <a:stretch>
             <a:fillRect/>
           </a:stretch>
@@ -6750,16 +9606,14 @@
           <p:nvPr/>
         </p:nvPicPr>
         <p:blipFill>
-          <a:blip r:embed="rId4">
-            <a:extLst/>
-          </a:blip>
+          <a:blip r:embed="rId4"/>
           <a:stretch>
             <a:fillRect/>
           </a:stretch>
         </p:blipFill>
         <p:spPr>
           <a:xfrm>
-            <a:off x="499330" y="3128706"/>
+            <a:off x="460001" y="3118874"/>
             <a:ext cx="4941498" cy="2940568"/>
           </a:xfrm>
           <a:prstGeom prst="rect">
@@ -6775,12 +9629,12 @@
   <p:clrMapOvr>
     <a:masterClrMapping/>
   </p:clrMapOvr>
-  <p:transition xmlns:p14="http://schemas.microsoft.com/office/powerpoint/2010/main" spd="med" advClick="1"/>
+  <p:transition spd="med"/>
 </p:sld>
 </file>
 
 <file path=ppt/theme/theme1.xml><?xml version="1.0" encoding="utf-8"?>
-<a:theme xmlns:a="http://schemas.openxmlformats.org/drawingml/2006/main" xmlns:r="http://schemas.openxmlformats.org/officeDocument/2006/relationships" name="AlignmentVTI">
+<a:theme xmlns:a="http://schemas.openxmlformats.org/drawingml/2006/main" name="AlignmentVTI">
   <a:themeElements>
     <a:clrScheme name="AlignmentVTI">
       <a:dk1>
@@ -6982,7 +9836,7 @@
         <a:effectLst/>
         <a:sp3d/>
       </a:spPr>
-      <a:bodyPr rot="0" spcFirstLastPara="1" vertOverflow="overflow" horzOverflow="overflow" vert="horz" wrap="square" lIns="45719" tIns="45719" rIns="45719" bIns="45719" numCol="1" spcCol="38100" rtlCol="0" anchor="ctr" upright="0">
+      <a:bodyPr rot="0" spcFirstLastPara="1" vertOverflow="overflow" horzOverflow="overflow" vert="horz" wrap="square" lIns="45719" tIns="45719" rIns="45719" bIns="45719" numCol="1" spcCol="38100" rtlCol="0" anchor="ctr">
         <a:spAutoFit/>
       </a:bodyPr>
       <a:lstStyle>
@@ -7001,7 +9855,7 @@
           <a:buFontTx/>
           <a:buNone/>
           <a:tabLst/>
-          <a:defRPr b="0" baseline="0" cap="none" i="0" spc="0" strike="noStrike" sz="1800" u="none" kumimoji="0" normalizeH="0">
+          <a:defRPr kumimoji="0" sz="1800" b="0" i="0" u="none" strike="noStrike" cap="none" spc="0" normalizeH="0" baseline="0">
             <a:ln>
               <a:noFill/>
             </a:ln>
@@ -7031,7 +9885,7 @@
           <a:buFontTx/>
           <a:buNone/>
           <a:tabLst/>
-          <a:defRPr b="0" baseline="0" cap="none" i="0" spc="0" strike="noStrike" sz="1800" u="none" kumimoji="0" normalizeH="0">
+          <a:defRPr kumimoji="0" sz="1800" b="0" i="0" u="none" strike="noStrike" cap="none" spc="0" normalizeH="0" baseline="0">
             <a:ln>
               <a:noFill/>
             </a:ln>
@@ -7057,7 +9911,7 @@
           <a:buFontTx/>
           <a:buNone/>
           <a:tabLst/>
-          <a:defRPr b="0" baseline="0" cap="none" i="0" spc="0" strike="noStrike" sz="1800" u="none" kumimoji="0" normalizeH="0">
+          <a:defRPr kumimoji="0" sz="1800" b="0" i="0" u="none" strike="noStrike" cap="none" spc="0" normalizeH="0" baseline="0">
             <a:ln>
               <a:noFill/>
             </a:ln>
@@ -7083,7 +9937,7 @@
           <a:buFontTx/>
           <a:buNone/>
           <a:tabLst/>
-          <a:defRPr b="0" baseline="0" cap="none" i="0" spc="0" strike="noStrike" sz="1800" u="none" kumimoji="0" normalizeH="0">
+          <a:defRPr kumimoji="0" sz="1800" b="0" i="0" u="none" strike="noStrike" cap="none" spc="0" normalizeH="0" baseline="0">
             <a:ln>
               <a:noFill/>
             </a:ln>
@@ -7109,7 +9963,7 @@
           <a:buFontTx/>
           <a:buNone/>
           <a:tabLst/>
-          <a:defRPr b="0" baseline="0" cap="none" i="0" spc="0" strike="noStrike" sz="1800" u="none" kumimoji="0" normalizeH="0">
+          <a:defRPr kumimoji="0" sz="1800" b="0" i="0" u="none" strike="noStrike" cap="none" spc="0" normalizeH="0" baseline="0">
             <a:ln>
               <a:noFill/>
             </a:ln>
@@ -7135,7 +9989,7 @@
           <a:buFontTx/>
           <a:buNone/>
           <a:tabLst/>
-          <a:defRPr b="0" baseline="0" cap="none" i="0" spc="0" strike="noStrike" sz="1800" u="none" kumimoji="0" normalizeH="0">
+          <a:defRPr kumimoji="0" sz="1800" b="0" i="0" u="none" strike="noStrike" cap="none" spc="0" normalizeH="0" baseline="0">
             <a:ln>
               <a:noFill/>
             </a:ln>
@@ -7161,7 +10015,7 @@
           <a:buFontTx/>
           <a:buNone/>
           <a:tabLst/>
-          <a:defRPr b="0" baseline="0" cap="none" i="0" spc="0" strike="noStrike" sz="1800" u="none" kumimoji="0" normalizeH="0">
+          <a:defRPr kumimoji="0" sz="1800" b="0" i="0" u="none" strike="noStrike" cap="none" spc="0" normalizeH="0" baseline="0">
             <a:ln>
               <a:noFill/>
             </a:ln>
@@ -7187,7 +10041,7 @@
           <a:buFontTx/>
           <a:buNone/>
           <a:tabLst/>
-          <a:defRPr b="0" baseline="0" cap="none" i="0" spc="0" strike="noStrike" sz="1800" u="none" kumimoji="0" normalizeH="0">
+          <a:defRPr kumimoji="0" sz="1800" b="0" i="0" u="none" strike="noStrike" cap="none" spc="0" normalizeH="0" baseline="0">
             <a:ln>
               <a:noFill/>
             </a:ln>
@@ -7213,7 +10067,7 @@
           <a:buFontTx/>
           <a:buNone/>
           <a:tabLst/>
-          <a:defRPr b="0" baseline="0" cap="none" i="0" spc="0" strike="noStrike" sz="1800" u="none" kumimoji="0" normalizeH="0">
+          <a:defRPr kumimoji="0" sz="1800" b="0" i="0" u="none" strike="noStrike" cap="none" spc="0" normalizeH="0" baseline="0">
             <a:ln>
               <a:noFill/>
             </a:ln>
@@ -7239,7 +10093,7 @@
           <a:buFontTx/>
           <a:buNone/>
           <a:tabLst/>
-          <a:defRPr b="0" baseline="0" cap="none" i="0" spc="0" strike="noStrike" sz="1800" u="none" kumimoji="0" normalizeH="0">
+          <a:defRPr kumimoji="0" sz="1800" b="0" i="0" u="none" strike="noStrike" cap="none" spc="0" normalizeH="0" baseline="0">
             <a:ln>
               <a:noFill/>
             </a:ln>
@@ -7252,9 +10106,15 @@
         </a:lvl9pPr>
       </a:lstStyle>
       <a:style>
-        <a:lnRef idx="0"/>
-        <a:fillRef idx="0"/>
-        <a:effectRef idx="0"/>
+        <a:lnRef idx="0">
+          <a:scrgbClr r="0" g="0" b="0"/>
+        </a:lnRef>
+        <a:fillRef idx="0">
+          <a:scrgbClr r="0" g="0" b="0"/>
+        </a:fillRef>
+        <a:effectRef idx="0">
+          <a:scrgbClr r="0" g="0" b="0"/>
+        </a:effectRef>
         <a:fontRef idx="none"/>
       </a:style>
     </a:spDef>
@@ -7271,7 +10131,7 @@
         <a:effectLst/>
         <a:sp3d/>
       </a:spPr>
-      <a:bodyPr rot="0" spcFirstLastPara="1" vertOverflow="overflow" horzOverflow="overflow" vert="horz" wrap="square" lIns="91439" tIns="45719" rIns="91439" bIns="45719" numCol="1" spcCol="38100" rtlCol="0" anchor="t" upright="0">
+      <a:bodyPr rot="0" spcFirstLastPara="1" vertOverflow="overflow" horzOverflow="overflow" vert="horz" wrap="square" lIns="91439" tIns="45719" rIns="91439" bIns="45719" numCol="1" spcCol="38100" rtlCol="0" anchor="t">
         <a:noAutofit/>
       </a:bodyPr>
       <a:lstStyle>
@@ -7290,7 +10150,7 @@
           <a:buFontTx/>
           <a:buNone/>
           <a:tabLst/>
-          <a:defRPr b="0" baseline="0" cap="none" i="0" spc="0" strike="noStrike" sz="1800" u="none" kumimoji="0" normalizeH="0">
+          <a:defRPr kumimoji="0" sz="1800" b="0" i="0" u="none" strike="noStrike" cap="none" spc="0" normalizeH="0" baseline="0">
             <a:ln>
               <a:noFill/>
             </a:ln>
@@ -7316,7 +10176,7 @@
           <a:buFontTx/>
           <a:buNone/>
           <a:tabLst/>
-          <a:defRPr b="0" baseline="0" cap="none" i="0" spc="0" strike="noStrike" sz="1800" u="none" kumimoji="0" normalizeH="0">
+          <a:defRPr kumimoji="0" sz="1800" b="0" i="0" u="none" strike="noStrike" cap="none" spc="0" normalizeH="0" baseline="0">
             <a:ln>
               <a:noFill/>
             </a:ln>
@@ -7342,7 +10202,7 @@
           <a:buFontTx/>
           <a:buNone/>
           <a:tabLst/>
-          <a:defRPr b="0" baseline="0" cap="none" i="0" spc="0" strike="noStrike" sz="1800" u="none" kumimoji="0" normalizeH="0">
+          <a:defRPr kumimoji="0" sz="1800" b="0" i="0" u="none" strike="noStrike" cap="none" spc="0" normalizeH="0" baseline="0">
             <a:ln>
               <a:noFill/>
             </a:ln>
@@ -7368,7 +10228,7 @@
           <a:buFontTx/>
           <a:buNone/>
           <a:tabLst/>
-          <a:defRPr b="0" baseline="0" cap="none" i="0" spc="0" strike="noStrike" sz="1800" u="none" kumimoji="0" normalizeH="0">
+          <a:defRPr kumimoji="0" sz="1800" b="0" i="0" u="none" strike="noStrike" cap="none" spc="0" normalizeH="0" baseline="0">
             <a:ln>
               <a:noFill/>
             </a:ln>
@@ -7394,7 +10254,7 @@
           <a:buFontTx/>
           <a:buNone/>
           <a:tabLst/>
-          <a:defRPr b="0" baseline="0" cap="none" i="0" spc="0" strike="noStrike" sz="1800" u="none" kumimoji="0" normalizeH="0">
+          <a:defRPr kumimoji="0" sz="1800" b="0" i="0" u="none" strike="noStrike" cap="none" spc="0" normalizeH="0" baseline="0">
             <a:ln>
               <a:noFill/>
             </a:ln>
@@ -7420,7 +10280,7 @@
           <a:buFontTx/>
           <a:buNone/>
           <a:tabLst/>
-          <a:defRPr b="0" baseline="0" cap="none" i="0" spc="0" strike="noStrike" sz="1800" u="none" kumimoji="0" normalizeH="0">
+          <a:defRPr kumimoji="0" sz="1800" b="0" i="0" u="none" strike="noStrike" cap="none" spc="0" normalizeH="0" baseline="0">
             <a:ln>
               <a:noFill/>
             </a:ln>
@@ -7446,7 +10306,7 @@
           <a:buFontTx/>
           <a:buNone/>
           <a:tabLst/>
-          <a:defRPr b="0" baseline="0" cap="none" i="0" spc="0" strike="noStrike" sz="1800" u="none" kumimoji="0" normalizeH="0">
+          <a:defRPr kumimoji="0" sz="1800" b="0" i="0" u="none" strike="noStrike" cap="none" spc="0" normalizeH="0" baseline="0">
             <a:ln>
               <a:noFill/>
             </a:ln>
@@ -7472,7 +10332,7 @@
           <a:buFontTx/>
           <a:buNone/>
           <a:tabLst/>
-          <a:defRPr b="0" baseline="0" cap="none" i="0" spc="0" strike="noStrike" sz="1800" u="none" kumimoji="0" normalizeH="0">
+          <a:defRPr kumimoji="0" sz="1800" b="0" i="0" u="none" strike="noStrike" cap="none" spc="0" normalizeH="0" baseline="0">
             <a:ln>
               <a:noFill/>
             </a:ln>
@@ -7498,7 +10358,7 @@
           <a:buFontTx/>
           <a:buNone/>
           <a:tabLst/>
-          <a:defRPr b="0" baseline="0" cap="none" i="0" spc="0" strike="noStrike" sz="1800" u="none" kumimoji="0" normalizeH="0">
+          <a:defRPr kumimoji="0" sz="1800" b="0" i="0" u="none" strike="noStrike" cap="none" spc="0" normalizeH="0" baseline="0">
             <a:ln>
               <a:noFill/>
             </a:ln>
@@ -7524,7 +10384,7 @@
           <a:buFontTx/>
           <a:buNone/>
           <a:tabLst/>
-          <a:defRPr b="0" baseline="0" cap="none" i="0" spc="0" strike="noStrike" sz="1800" u="none" kumimoji="0" normalizeH="0">
+          <a:defRPr kumimoji="0" sz="1800" b="0" i="0" u="none" strike="noStrike" cap="none" spc="0" normalizeH="0" baseline="0">
             <a:ln>
               <a:noFill/>
             </a:ln>
@@ -7537,9 +10397,15 @@
         </a:lvl9pPr>
       </a:lstStyle>
       <a:style>
-        <a:lnRef idx="0"/>
-        <a:fillRef idx="0"/>
-        <a:effectRef idx="0"/>
+        <a:lnRef idx="0">
+          <a:scrgbClr r="0" g="0" b="0"/>
+        </a:lnRef>
+        <a:fillRef idx="0">
+          <a:scrgbClr r="0" g="0" b="0"/>
+        </a:fillRef>
+        <a:effectRef idx="0">
+          <a:scrgbClr r="0" g="0" b="0"/>
+        </a:effectRef>
         <a:fontRef idx="none"/>
       </a:style>
     </a:lnDef>
@@ -7553,7 +10419,7 @@
         <a:effectLst/>
         <a:sp3d/>
       </a:spPr>
-      <a:bodyPr rot="0" spcFirstLastPara="1" vertOverflow="overflow" horzOverflow="overflow" vert="horz" wrap="square" lIns="45719" tIns="45719" rIns="45719" bIns="45719" numCol="1" spcCol="38100" rtlCol="0" anchor="t" upright="0">
+      <a:bodyPr rot="0" spcFirstLastPara="1" vertOverflow="overflow" horzOverflow="overflow" vert="horz" wrap="square" lIns="45719" tIns="45719" rIns="45719" bIns="45719" numCol="1" spcCol="38100" rtlCol="0" anchor="t">
         <a:spAutoFit/>
       </a:bodyPr>
       <a:lstStyle>
@@ -7572,7 +10438,7 @@
           <a:buFontTx/>
           <a:buNone/>
           <a:tabLst/>
-          <a:defRPr b="0" baseline="0" cap="none" i="0" spc="0" strike="noStrike" sz="1800" u="none" kumimoji="0" normalizeH="0">
+          <a:defRPr kumimoji="0" sz="1800" b="0" i="0" u="none" strike="noStrike" cap="none" spc="0" normalizeH="0" baseline="0">
             <a:ln>
               <a:noFill/>
             </a:ln>
@@ -7602,7 +10468,7 @@
           <a:buFontTx/>
           <a:buNone/>
           <a:tabLst/>
-          <a:defRPr b="0" baseline="0" cap="none" i="0" spc="0" strike="noStrike" sz="1800" u="none" kumimoji="0" normalizeH="0">
+          <a:defRPr kumimoji="0" sz="1800" b="0" i="0" u="none" strike="noStrike" cap="none" spc="0" normalizeH="0" baseline="0">
             <a:ln>
               <a:noFill/>
             </a:ln>
@@ -7628,7 +10494,7 @@
           <a:buFontTx/>
           <a:buNone/>
           <a:tabLst/>
-          <a:defRPr b="0" baseline="0" cap="none" i="0" spc="0" strike="noStrike" sz="1800" u="none" kumimoji="0" normalizeH="0">
+          <a:defRPr kumimoji="0" sz="1800" b="0" i="0" u="none" strike="noStrike" cap="none" spc="0" normalizeH="0" baseline="0">
             <a:ln>
               <a:noFill/>
             </a:ln>
@@ -7654,7 +10520,7 @@
           <a:buFontTx/>
           <a:buNone/>
           <a:tabLst/>
-          <a:defRPr b="0" baseline="0" cap="none" i="0" spc="0" strike="noStrike" sz="1800" u="none" kumimoji="0" normalizeH="0">
+          <a:defRPr kumimoji="0" sz="1800" b="0" i="0" u="none" strike="noStrike" cap="none" spc="0" normalizeH="0" baseline="0">
             <a:ln>
               <a:noFill/>
             </a:ln>
@@ -7680,7 +10546,7 @@
           <a:buFontTx/>
           <a:buNone/>
           <a:tabLst/>
-          <a:defRPr b="0" baseline="0" cap="none" i="0" spc="0" strike="noStrike" sz="1800" u="none" kumimoji="0" normalizeH="0">
+          <a:defRPr kumimoji="0" sz="1800" b="0" i="0" u="none" strike="noStrike" cap="none" spc="0" normalizeH="0" baseline="0">
             <a:ln>
               <a:noFill/>
             </a:ln>
@@ -7706,7 +10572,7 @@
           <a:buFontTx/>
           <a:buNone/>
           <a:tabLst/>
-          <a:defRPr b="0" baseline="0" cap="none" i="0" spc="0" strike="noStrike" sz="1800" u="none" kumimoji="0" normalizeH="0">
+          <a:defRPr kumimoji="0" sz="1800" b="0" i="0" u="none" strike="noStrike" cap="none" spc="0" normalizeH="0" baseline="0">
             <a:ln>
               <a:noFill/>
             </a:ln>
@@ -7732,7 +10598,7 @@
           <a:buFontTx/>
           <a:buNone/>
           <a:tabLst/>
-          <a:defRPr b="0" baseline="0" cap="none" i="0" spc="0" strike="noStrike" sz="1800" u="none" kumimoji="0" normalizeH="0">
+          <a:defRPr kumimoji="0" sz="1800" b="0" i="0" u="none" strike="noStrike" cap="none" spc="0" normalizeH="0" baseline="0">
             <a:ln>
               <a:noFill/>
             </a:ln>
@@ -7758,7 +10624,7 @@
           <a:buFontTx/>
           <a:buNone/>
           <a:tabLst/>
-          <a:defRPr b="0" baseline="0" cap="none" i="0" spc="0" strike="noStrike" sz="1800" u="none" kumimoji="0" normalizeH="0">
+          <a:defRPr kumimoji="0" sz="1800" b="0" i="0" u="none" strike="noStrike" cap="none" spc="0" normalizeH="0" baseline="0">
             <a:ln>
               <a:noFill/>
             </a:ln>
@@ -7784,7 +10650,7 @@
           <a:buFontTx/>
           <a:buNone/>
           <a:tabLst/>
-          <a:defRPr b="0" baseline="0" cap="none" i="0" spc="0" strike="noStrike" sz="1800" u="none" kumimoji="0" normalizeH="0">
+          <a:defRPr kumimoji="0" sz="1800" b="0" i="0" u="none" strike="noStrike" cap="none" spc="0" normalizeH="0" baseline="0">
             <a:ln>
               <a:noFill/>
             </a:ln>
@@ -7810,7 +10676,7 @@
           <a:buFontTx/>
           <a:buNone/>
           <a:tabLst/>
-          <a:defRPr b="0" baseline="0" cap="none" i="0" spc="0" strike="noStrike" sz="1800" u="none" kumimoji="0" normalizeH="0">
+          <a:defRPr kumimoji="0" sz="1800" b="0" i="0" u="none" strike="noStrike" cap="none" spc="0" normalizeH="0" baseline="0">
             <a:ln>
               <a:noFill/>
             </a:ln>
@@ -7823,18 +10689,25 @@
         </a:lvl9pPr>
       </a:lstStyle>
       <a:style>
-        <a:lnRef idx="0"/>
-        <a:fillRef idx="0"/>
-        <a:effectRef idx="0"/>
+        <a:lnRef idx="0">
+          <a:scrgbClr r="0" g="0" b="0"/>
+        </a:lnRef>
+        <a:fillRef idx="0">
+          <a:scrgbClr r="0" g="0" b="0"/>
+        </a:fillRef>
+        <a:effectRef idx="0">
+          <a:scrgbClr r="0" g="0" b="0"/>
+        </a:effectRef>
         <a:fontRef idx="none"/>
       </a:style>
     </a:txDef>
   </a:objectDefaults>
+  <a:extraClrSchemeLst/>
 </a:theme>
 </file>
 
 <file path=ppt/theme/theme2.xml><?xml version="1.0" encoding="utf-8"?>
-<a:theme xmlns:a="http://schemas.openxmlformats.org/drawingml/2006/main" xmlns:r="http://schemas.openxmlformats.org/officeDocument/2006/relationships" name="AlignmentVTI">
+<a:theme xmlns:a="http://schemas.openxmlformats.org/drawingml/2006/main" name="AlignmentVTI">
   <a:themeElements>
     <a:clrScheme name="AlignmentVTI">
       <a:dk1>
@@ -8036,7 +10909,7 @@
         <a:effectLst/>
         <a:sp3d/>
       </a:spPr>
-      <a:bodyPr rot="0" spcFirstLastPara="1" vertOverflow="overflow" horzOverflow="overflow" vert="horz" wrap="square" lIns="45719" tIns="45719" rIns="45719" bIns="45719" numCol="1" spcCol="38100" rtlCol="0" anchor="ctr" upright="0">
+      <a:bodyPr rot="0" spcFirstLastPara="1" vertOverflow="overflow" horzOverflow="overflow" vert="horz" wrap="square" lIns="45719" tIns="45719" rIns="45719" bIns="45719" numCol="1" spcCol="38100" rtlCol="0" anchor="ctr">
         <a:spAutoFit/>
       </a:bodyPr>
       <a:lstStyle>
@@ -8055,7 +10928,7 @@
           <a:buFontTx/>
           <a:buNone/>
           <a:tabLst/>
-          <a:defRPr b="0" baseline="0" cap="none" i="0" spc="0" strike="noStrike" sz="1800" u="none" kumimoji="0" normalizeH="0">
+          <a:defRPr kumimoji="0" sz="1800" b="0" i="0" u="none" strike="noStrike" cap="none" spc="0" normalizeH="0" baseline="0">
             <a:ln>
               <a:noFill/>
             </a:ln>
@@ -8085,7 +10958,7 @@
           <a:buFontTx/>
           <a:buNone/>
           <a:tabLst/>
-          <a:defRPr b="0" baseline="0" cap="none" i="0" spc="0" strike="noStrike" sz="1800" u="none" kumimoji="0" normalizeH="0">
+          <a:defRPr kumimoji="0" sz="1800" b="0" i="0" u="none" strike="noStrike" cap="none" spc="0" normalizeH="0" baseline="0">
             <a:ln>
               <a:noFill/>
             </a:ln>
@@ -8111,7 +10984,7 @@
           <a:buFontTx/>
           <a:buNone/>
           <a:tabLst/>
-          <a:defRPr b="0" baseline="0" cap="none" i="0" spc="0" strike="noStrike" sz="1800" u="none" kumimoji="0" normalizeH="0">
+          <a:defRPr kumimoji="0" sz="1800" b="0" i="0" u="none" strike="noStrike" cap="none" spc="0" normalizeH="0" baseline="0">
             <a:ln>
               <a:noFill/>
             </a:ln>
@@ -8137,7 +11010,7 @@
           <a:buFontTx/>
           <a:buNone/>
           <a:tabLst/>
-          <a:defRPr b="0" baseline="0" cap="none" i="0" spc="0" strike="noStrike" sz="1800" u="none" kumimoji="0" normalizeH="0">
+          <a:defRPr kumimoji="0" sz="1800" b="0" i="0" u="none" strike="noStrike" cap="none" spc="0" normalizeH="0" baseline="0">
             <a:ln>
               <a:noFill/>
             </a:ln>
@@ -8163,7 +11036,7 @@
           <a:buFontTx/>
           <a:buNone/>
           <a:tabLst/>
-          <a:defRPr b="0" baseline="0" cap="none" i="0" spc="0" strike="noStrike" sz="1800" u="none" kumimoji="0" normalizeH="0">
+          <a:defRPr kumimoji="0" sz="1800" b="0" i="0" u="none" strike="noStrike" cap="none" spc="0" normalizeH="0" baseline="0">
             <a:ln>
               <a:noFill/>
             </a:ln>
@@ -8189,7 +11062,7 @@
           <a:buFontTx/>
           <a:buNone/>
           <a:tabLst/>
-          <a:defRPr b="0" baseline="0" cap="none" i="0" spc="0" strike="noStrike" sz="1800" u="none" kumimoji="0" normalizeH="0">
+          <a:defRPr kumimoji="0" sz="1800" b="0" i="0" u="none" strike="noStrike" cap="none" spc="0" normalizeH="0" baseline="0">
             <a:ln>
               <a:noFill/>
             </a:ln>
@@ -8215,7 +11088,7 @@
           <a:buFontTx/>
           <a:buNone/>
           <a:tabLst/>
-          <a:defRPr b="0" baseline="0" cap="none" i="0" spc="0" strike="noStrike" sz="1800" u="none" kumimoji="0" normalizeH="0">
+          <a:defRPr kumimoji="0" sz="1800" b="0" i="0" u="none" strike="noStrike" cap="none" spc="0" normalizeH="0" baseline="0">
             <a:ln>
               <a:noFill/>
             </a:ln>
@@ -8241,7 +11114,7 @@
           <a:buFontTx/>
           <a:buNone/>
           <a:tabLst/>
-          <a:defRPr b="0" baseline="0" cap="none" i="0" spc="0" strike="noStrike" sz="1800" u="none" kumimoji="0" normalizeH="0">
+          <a:defRPr kumimoji="0" sz="1800" b="0" i="0" u="none" strike="noStrike" cap="none" spc="0" normalizeH="0" baseline="0">
             <a:ln>
               <a:noFill/>
             </a:ln>
@@ -8267,7 +11140,7 @@
           <a:buFontTx/>
           <a:buNone/>
           <a:tabLst/>
-          <a:defRPr b="0" baseline="0" cap="none" i="0" spc="0" strike="noStrike" sz="1800" u="none" kumimoji="0" normalizeH="0">
+          <a:defRPr kumimoji="0" sz="1800" b="0" i="0" u="none" strike="noStrike" cap="none" spc="0" normalizeH="0" baseline="0">
             <a:ln>
               <a:noFill/>
             </a:ln>
@@ -8293,7 +11166,7 @@
           <a:buFontTx/>
           <a:buNone/>
           <a:tabLst/>
-          <a:defRPr b="0" baseline="0" cap="none" i="0" spc="0" strike="noStrike" sz="1800" u="none" kumimoji="0" normalizeH="0">
+          <a:defRPr kumimoji="0" sz="1800" b="0" i="0" u="none" strike="noStrike" cap="none" spc="0" normalizeH="0" baseline="0">
             <a:ln>
               <a:noFill/>
             </a:ln>
@@ -8306,9 +11179,15 @@
         </a:lvl9pPr>
       </a:lstStyle>
       <a:style>
-        <a:lnRef idx="0"/>
-        <a:fillRef idx="0"/>
-        <a:effectRef idx="0"/>
+        <a:lnRef idx="0">
+          <a:scrgbClr r="0" g="0" b="0"/>
+        </a:lnRef>
+        <a:fillRef idx="0">
+          <a:scrgbClr r="0" g="0" b="0"/>
+        </a:fillRef>
+        <a:effectRef idx="0">
+          <a:scrgbClr r="0" g="0" b="0"/>
+        </a:effectRef>
         <a:fontRef idx="none"/>
       </a:style>
     </a:spDef>
@@ -8325,7 +11204,7 @@
         <a:effectLst/>
         <a:sp3d/>
       </a:spPr>
-      <a:bodyPr rot="0" spcFirstLastPara="1" vertOverflow="overflow" horzOverflow="overflow" vert="horz" wrap="square" lIns="91439" tIns="45719" rIns="91439" bIns="45719" numCol="1" spcCol="38100" rtlCol="0" anchor="t" upright="0">
+      <a:bodyPr rot="0" spcFirstLastPara="1" vertOverflow="overflow" horzOverflow="overflow" vert="horz" wrap="square" lIns="91439" tIns="45719" rIns="91439" bIns="45719" numCol="1" spcCol="38100" rtlCol="0" anchor="t">
         <a:noAutofit/>
       </a:bodyPr>
       <a:lstStyle>
@@ -8344,7 +11223,7 @@
           <a:buFontTx/>
           <a:buNone/>
           <a:tabLst/>
-          <a:defRPr b="0" baseline="0" cap="none" i="0" spc="0" strike="noStrike" sz="1800" u="none" kumimoji="0" normalizeH="0">
+          <a:defRPr kumimoji="0" sz="1800" b="0" i="0" u="none" strike="noStrike" cap="none" spc="0" normalizeH="0" baseline="0">
             <a:ln>
               <a:noFill/>
             </a:ln>
@@ -8370,7 +11249,7 @@
           <a:buFontTx/>
           <a:buNone/>
           <a:tabLst/>
-          <a:defRPr b="0" baseline="0" cap="none" i="0" spc="0" strike="noStrike" sz="1800" u="none" kumimoji="0" normalizeH="0">
+          <a:defRPr kumimoji="0" sz="1800" b="0" i="0" u="none" strike="noStrike" cap="none" spc="0" normalizeH="0" baseline="0">
             <a:ln>
               <a:noFill/>
             </a:ln>
@@ -8396,7 +11275,7 @@
           <a:buFontTx/>
           <a:buNone/>
           <a:tabLst/>
-          <a:defRPr b="0" baseline="0" cap="none" i="0" spc="0" strike="noStrike" sz="1800" u="none" kumimoji="0" normalizeH="0">
+          <a:defRPr kumimoji="0" sz="1800" b="0" i="0" u="none" strike="noStrike" cap="none" spc="0" normalizeH="0" baseline="0">
             <a:ln>
               <a:noFill/>
             </a:ln>
@@ -8422,7 +11301,7 @@
           <a:buFontTx/>
           <a:buNone/>
           <a:tabLst/>
-          <a:defRPr b="0" baseline="0" cap="none" i="0" spc="0" strike="noStrike" sz="1800" u="none" kumimoji="0" normalizeH="0">
+          <a:defRPr kumimoji="0" sz="1800" b="0" i="0" u="none" strike="noStrike" cap="none" spc="0" normalizeH="0" baseline="0">
             <a:ln>
               <a:noFill/>
             </a:ln>
@@ -8448,7 +11327,7 @@
           <a:buFontTx/>
           <a:buNone/>
           <a:tabLst/>
-          <a:defRPr b="0" baseline="0" cap="none" i="0" spc="0" strike="noStrike" sz="1800" u="none" kumimoji="0" normalizeH="0">
+          <a:defRPr kumimoji="0" sz="1800" b="0" i="0" u="none" strike="noStrike" cap="none" spc="0" normalizeH="0" baseline="0">
             <a:ln>
               <a:noFill/>
             </a:ln>
@@ -8474,7 +11353,7 @@
           <a:buFontTx/>
           <a:buNone/>
           <a:tabLst/>
-          <a:defRPr b="0" baseline="0" cap="none" i="0" spc="0" strike="noStrike" sz="1800" u="none" kumimoji="0" normalizeH="0">
+          <a:defRPr kumimoji="0" sz="1800" b="0" i="0" u="none" strike="noStrike" cap="none" spc="0" normalizeH="0" baseline="0">
             <a:ln>
               <a:noFill/>
             </a:ln>
@@ -8500,7 +11379,7 @@
           <a:buFontTx/>
           <a:buNone/>
           <a:tabLst/>
-          <a:defRPr b="0" baseline="0" cap="none" i="0" spc="0" strike="noStrike" sz="1800" u="none" kumimoji="0" normalizeH="0">
+          <a:defRPr kumimoji="0" sz="1800" b="0" i="0" u="none" strike="noStrike" cap="none" spc="0" normalizeH="0" baseline="0">
             <a:ln>
               <a:noFill/>
             </a:ln>
@@ -8526,7 +11405,7 @@
           <a:buFontTx/>
           <a:buNone/>
           <a:tabLst/>
-          <a:defRPr b="0" baseline="0" cap="none" i="0" spc="0" strike="noStrike" sz="1800" u="none" kumimoji="0" normalizeH="0">
+          <a:defRPr kumimoji="0" sz="1800" b="0" i="0" u="none" strike="noStrike" cap="none" spc="0" normalizeH="0" baseline="0">
             <a:ln>
               <a:noFill/>
             </a:ln>
@@ -8552,7 +11431,7 @@
           <a:buFontTx/>
           <a:buNone/>
           <a:tabLst/>
-          <a:defRPr b="0" baseline="0" cap="none" i="0" spc="0" strike="noStrike" sz="1800" u="none" kumimoji="0" normalizeH="0">
+          <a:defRPr kumimoji="0" sz="1800" b="0" i="0" u="none" strike="noStrike" cap="none" spc="0" normalizeH="0" baseline="0">
             <a:ln>
               <a:noFill/>
             </a:ln>
@@ -8578,7 +11457,7 @@
           <a:buFontTx/>
           <a:buNone/>
           <a:tabLst/>
-          <a:defRPr b="0" baseline="0" cap="none" i="0" spc="0" strike="noStrike" sz="1800" u="none" kumimoji="0" normalizeH="0">
+          <a:defRPr kumimoji="0" sz="1800" b="0" i="0" u="none" strike="noStrike" cap="none" spc="0" normalizeH="0" baseline="0">
             <a:ln>
               <a:noFill/>
             </a:ln>
@@ -8591,9 +11470,15 @@
         </a:lvl9pPr>
       </a:lstStyle>
       <a:style>
-        <a:lnRef idx="0"/>
-        <a:fillRef idx="0"/>
-        <a:effectRef idx="0"/>
+        <a:lnRef idx="0">
+          <a:scrgbClr r="0" g="0" b="0"/>
+        </a:lnRef>
+        <a:fillRef idx="0">
+          <a:scrgbClr r="0" g="0" b="0"/>
+        </a:fillRef>
+        <a:effectRef idx="0">
+          <a:scrgbClr r="0" g="0" b="0"/>
+        </a:effectRef>
         <a:fontRef idx="none"/>
       </a:style>
     </a:lnDef>
@@ -8607,7 +11492,7 @@
         <a:effectLst/>
         <a:sp3d/>
       </a:spPr>
-      <a:bodyPr rot="0" spcFirstLastPara="1" vertOverflow="overflow" horzOverflow="overflow" vert="horz" wrap="square" lIns="45719" tIns="45719" rIns="45719" bIns="45719" numCol="1" spcCol="38100" rtlCol="0" anchor="t" upright="0">
+      <a:bodyPr rot="0" spcFirstLastPara="1" vertOverflow="overflow" horzOverflow="overflow" vert="horz" wrap="square" lIns="45719" tIns="45719" rIns="45719" bIns="45719" numCol="1" spcCol="38100" rtlCol="0" anchor="t">
         <a:spAutoFit/>
       </a:bodyPr>
       <a:lstStyle>
@@ -8626,7 +11511,7 @@
           <a:buFontTx/>
           <a:buNone/>
           <a:tabLst/>
-          <a:defRPr b="0" baseline="0" cap="none" i="0" spc="0" strike="noStrike" sz="1800" u="none" kumimoji="0" normalizeH="0">
+          <a:defRPr kumimoji="0" sz="1800" b="0" i="0" u="none" strike="noStrike" cap="none" spc="0" normalizeH="0" baseline="0">
             <a:ln>
               <a:noFill/>
             </a:ln>
@@ -8656,7 +11541,7 @@
           <a:buFontTx/>
           <a:buNone/>
           <a:tabLst/>
-          <a:defRPr b="0" baseline="0" cap="none" i="0" spc="0" strike="noStrike" sz="1800" u="none" kumimoji="0" normalizeH="0">
+          <a:defRPr kumimoji="0" sz="1800" b="0" i="0" u="none" strike="noStrike" cap="none" spc="0" normalizeH="0" baseline="0">
             <a:ln>
               <a:noFill/>
             </a:ln>
@@ -8682,7 +11567,7 @@
           <a:buFontTx/>
           <a:buNone/>
           <a:tabLst/>
-          <a:defRPr b="0" baseline="0" cap="none" i="0" spc="0" strike="noStrike" sz="1800" u="none" kumimoji="0" normalizeH="0">
+          <a:defRPr kumimoji="0" sz="1800" b="0" i="0" u="none" strike="noStrike" cap="none" spc="0" normalizeH="0" baseline="0">
             <a:ln>
               <a:noFill/>
             </a:ln>
@@ -8708,7 +11593,7 @@
           <a:buFontTx/>
           <a:buNone/>
           <a:tabLst/>
-          <a:defRPr b="0" baseline="0" cap="none" i="0" spc="0" strike="noStrike" sz="1800" u="none" kumimoji="0" normalizeH="0">
+          <a:defRPr kumimoji="0" sz="1800" b="0" i="0" u="none" strike="noStrike" cap="none" spc="0" normalizeH="0" baseline="0">
             <a:ln>
               <a:noFill/>
             </a:ln>
@@ -8734,7 +11619,7 @@
           <a:buFontTx/>
           <a:buNone/>
           <a:tabLst/>
-          <a:defRPr b="0" baseline="0" cap="none" i="0" spc="0" strike="noStrike" sz="1800" u="none" kumimoji="0" normalizeH="0">
+          <a:defRPr kumimoji="0" sz="1800" b="0" i="0" u="none" strike="noStrike" cap="none" spc="0" normalizeH="0" baseline="0">
             <a:ln>
               <a:noFill/>
             </a:ln>
@@ -8760,7 +11645,7 @@
           <a:buFontTx/>
           <a:buNone/>
           <a:tabLst/>
-          <a:defRPr b="0" baseline="0" cap="none" i="0" spc="0" strike="noStrike" sz="1800" u="none" kumimoji="0" normalizeH="0">
+          <a:defRPr kumimoji="0" sz="1800" b="0" i="0" u="none" strike="noStrike" cap="none" spc="0" normalizeH="0" baseline="0">
             <a:ln>
               <a:noFill/>
             </a:ln>
@@ -8786,7 +11671,7 @@
           <a:buFontTx/>
           <a:buNone/>
           <a:tabLst/>
-          <a:defRPr b="0" baseline="0" cap="none" i="0" spc="0" strike="noStrike" sz="1800" u="none" kumimoji="0" normalizeH="0">
+          <a:defRPr kumimoji="0" sz="1800" b="0" i="0" u="none" strike="noStrike" cap="none" spc="0" normalizeH="0" baseline="0">
             <a:ln>
               <a:noFill/>
             </a:ln>
@@ -8812,7 +11697,7 @@
           <a:buFontTx/>
           <a:buNone/>
           <a:tabLst/>
-          <a:defRPr b="0" baseline="0" cap="none" i="0" spc="0" strike="noStrike" sz="1800" u="none" kumimoji="0" normalizeH="0">
+          <a:defRPr kumimoji="0" sz="1800" b="0" i="0" u="none" strike="noStrike" cap="none" spc="0" normalizeH="0" baseline="0">
             <a:ln>
               <a:noFill/>
             </a:ln>
@@ -8838,7 +11723,7 @@
           <a:buFontTx/>
           <a:buNone/>
           <a:tabLst/>
-          <a:defRPr b="0" baseline="0" cap="none" i="0" spc="0" strike="noStrike" sz="1800" u="none" kumimoji="0" normalizeH="0">
+          <a:defRPr kumimoji="0" sz="1800" b="0" i="0" u="none" strike="noStrike" cap="none" spc="0" normalizeH="0" baseline="0">
             <a:ln>
               <a:noFill/>
             </a:ln>
@@ -8864,7 +11749,7 @@
           <a:buFontTx/>
           <a:buNone/>
           <a:tabLst/>
-          <a:defRPr b="0" baseline="0" cap="none" i="0" spc="0" strike="noStrike" sz="1800" u="none" kumimoji="0" normalizeH="0">
+          <a:defRPr kumimoji="0" sz="1800" b="0" i="0" u="none" strike="noStrike" cap="none" spc="0" normalizeH="0" baseline="0">
             <a:ln>
               <a:noFill/>
             </a:ln>
@@ -8877,12 +11762,19 @@
         </a:lvl9pPr>
       </a:lstStyle>
       <a:style>
-        <a:lnRef idx="0"/>
-        <a:fillRef idx="0"/>
-        <a:effectRef idx="0"/>
+        <a:lnRef idx="0">
+          <a:scrgbClr r="0" g="0" b="0"/>
+        </a:lnRef>
+        <a:fillRef idx="0">
+          <a:scrgbClr r="0" g="0" b="0"/>
+        </a:fillRef>
+        <a:effectRef idx="0">
+          <a:scrgbClr r="0" g="0" b="0"/>
+        </a:effectRef>
         <a:fontRef idx="none"/>
       </a:style>
     </a:txDef>
   </a:objectDefaults>
+  <a:extraClrSchemeLst/>
 </a:theme>
 </file>